--- a/CoworkPlaybook/Cowork_教育訓練簡報_航空業版.pptx
+++ b/CoworkPlaybook/Cowork_教育訓練簡報_航空業版.pptx
@@ -3761,7 +3761,7 @@
                 <a:ea typeface="Microsoft JhengHei" pitchFamily="34" charset="-122"/>
                 <a:cs typeface="Microsoft JhengHei" pitchFamily="34" charset="-120"/>
               </a:rPr>
-              <a:t>實測結果值得逐條看，因為每一條都在示範一種不同的誤判。</a:t>
+              <a:t>四筆結果值得逐條看，因為每一條都在示範一種不同的誤判。</a:t>
             </a:r>
             <a:endParaRPr lang="en-US" sz="1300" dirty="0"/>
           </a:p>
@@ -7254,7 +7254,7 @@
                 <a:ea typeface="Microsoft JhengHei" pitchFamily="34" charset="-122"/>
                 <a:cs typeface="Microsoft JhengHei" pitchFamily="34" charset="-120"/>
               </a:rPr>
-              <a:t>⚠️ 品牌範本要放 OneDrive 根目錄，這一步最常出錯</a:t>
+              <a:t>⚠️ 品牌範本必須放 OneDrive 根目錄</a:t>
             </a:r>
             <a:endParaRPr lang="en-US" sz="1600" dirty="0"/>
           </a:p>
@@ -7443,7 +7443,7 @@
                 <a:ea typeface="Microsoft JhengHei" pitchFamily="34" charset="-122"/>
                 <a:cs typeface="Microsoft JhengHei" pitchFamily="34" charset="-120"/>
               </a:rPr>
-              <a:t>實測的分析結果值得逐條看。</a:t>
+              <a:t>三個結論值得逐條看。</a:t>
             </a:r>
             <a:endParaRPr lang="en-US" sz="1300" dirty="0"/>
           </a:p>
@@ -9145,7 +9145,7 @@
                 <a:ea typeface="Microsoft JhengHei" pitchFamily="34" charset="-122"/>
                 <a:cs typeface="Microsoft JhengHei" pitchFamily="34" charset="-120"/>
               </a:rPr>
-              <a:t>實測拿到 **89 分（Excellent）**，四條紅線都完整寫入。</a:t>
+              <a:t>這個技能可以拿到 **89 分（Excellent）**，四條紅線都完整寫入。</a:t>
             </a:r>
             <a:endParaRPr lang="en-US" sz="1300" dirty="0"/>
           </a:p>
@@ -20135,7 +20135,7 @@
         </p:nvSpPr>
         <p:spPr>
           <a:xfrm>
-            <a:off x="4526280" y="3310128"/>
+            <a:off x="4526280" y="3090672"/>
             <a:ext cx="457200" cy="457200"/>
           </a:xfrm>
           <a:prstGeom prst="ellipse">
@@ -20162,7 +20162,7 @@
         </p:nvSpPr>
         <p:spPr>
           <a:xfrm>
-            <a:off x="4526280" y="3310128"/>
+            <a:off x="4526280" y="3090672"/>
             <a:ext cx="457200" cy="457200"/>
           </a:xfrm>
           <a:prstGeom prst="rect">
@@ -20201,7 +20201,7 @@
         </p:nvSpPr>
         <p:spPr>
           <a:xfrm>
-            <a:off x="5166360" y="3291840"/>
+            <a:off x="5166360" y="3072384"/>
             <a:ext cx="6492240" cy="365760"/>
           </a:xfrm>
           <a:prstGeom prst="rect">
@@ -20240,7 +20240,7 @@
         </p:nvSpPr>
         <p:spPr>
           <a:xfrm>
-            <a:off x="5166360" y="3657600"/>
+            <a:off x="5166360" y="3438144"/>
             <a:ext cx="6492240" cy="502920"/>
           </a:xfrm>
           <a:prstGeom prst="rect">
@@ -20268,7 +20268,7 @@
                 <a:ea typeface="Microsoft JhengHei" pitchFamily="34" charset="-122"/>
                 <a:cs typeface="Microsoft JhengHei" pitchFamily="34" charset="-120"/>
               </a:rPr>
-              <a:t>實測八位分級全對，其中四位是刻意設計的陷阱。</a:t>
+              <a:t>八位分級都會判對，其中四位是刻意設計的陷阱。</a:t>
             </a:r>
             <a:endParaRPr lang="en-US" sz="1300" dirty="0"/>
           </a:p>
@@ -20282,7 +20282,7 @@
         </p:nvSpPr>
         <p:spPr>
           <a:xfrm>
-            <a:off x="4526280" y="4334256"/>
+            <a:off x="4526280" y="3895344"/>
             <a:ext cx="457200" cy="457200"/>
           </a:xfrm>
           <a:prstGeom prst="ellipse">
@@ -20309,7 +20309,7 @@
         </p:nvSpPr>
         <p:spPr>
           <a:xfrm>
-            <a:off x="4526280" y="4334256"/>
+            <a:off x="4526280" y="3895344"/>
             <a:ext cx="457200" cy="457200"/>
           </a:xfrm>
           <a:prstGeom prst="rect">
@@ -20348,7 +20348,7 @@
         </p:nvSpPr>
         <p:spPr>
           <a:xfrm>
-            <a:off x="5166360" y="4315968"/>
+            <a:off x="5166360" y="3877056"/>
             <a:ext cx="6492240" cy="365760"/>
           </a:xfrm>
           <a:prstGeom prst="rect">
@@ -20373,7 +20373,7 @@
                 <a:ea typeface="Microsoft JhengHei" pitchFamily="34" charset="-122"/>
                 <a:cs typeface="Microsoft JhengHei" pitchFamily="34" charset="-120"/>
               </a:rPr>
-              <a:t>八封草稿，以及它不肯代填的兩件事</a:t>
+              <a:t>八封草稿：它從母資料夾自己找出了收件窗口</a:t>
             </a:r>
             <a:endParaRPr lang="en-US" sz="1600" dirty="0"/>
           </a:p>
@@ -20387,7 +20387,7 @@
         </p:nvSpPr>
         <p:spPr>
           <a:xfrm>
-            <a:off x="5166360" y="4681728"/>
+            <a:off x="5166360" y="4242816"/>
             <a:ext cx="6492240" cy="502920"/>
           </a:xfrm>
           <a:prstGeom prst="rect">
@@ -20415,7 +20415,7 @@
                 <a:ea typeface="Microsoft JhengHei" pitchFamily="34" charset="-122"/>
                 <a:cs typeface="Microsoft JhengHei" pitchFamily="34" charset="-120"/>
               </a:rPr>
-              <a:t>八封通知都存成草稿，主旨以「【草稿｜待核准】」開頭，方便你在草稿匣一眼認出。</a:t>
+              <a:t>八封通知都存成草稿，內容依旅客需求各自不同：單獨旅行孩童那封依原則寫成「致監護人」…</a:t>
             </a:r>
             <a:endParaRPr lang="en-US" sz="1300" dirty="0"/>
           </a:p>
@@ -20429,22 +20429,20 @@
         </p:nvSpPr>
         <p:spPr>
           <a:xfrm>
-            <a:off x="4526280" y="5440680"/>
-            <a:ext cx="7132320" cy="777240"/>
-          </a:xfrm>
-          <a:prstGeom prst="rect">
+            <a:off x="4526280" y="4700016"/>
+            <a:ext cx="457200" cy="457200"/>
+          </a:xfrm>
+          <a:prstGeom prst="ellipse">
             <a:avLst/>
           </a:prstGeom>
           <a:solidFill>
             <a:srgbClr val="FFFFFF">
-              <a:alpha val="10000"/>
+              <a:alpha val="12000"/>
             </a:srgbClr>
           </a:solidFill>
-          <a:ln w="12700">
+          <a:ln w="19050">
             <a:solidFill>
-              <a:srgbClr val="0E2A47">
-                <a:alpha val="65000"/>
-              </a:srgbClr>
+              <a:srgbClr val="0E2A47"/>
             </a:solidFill>
             <a:prstDash val="solid"/>
           </a:ln>
@@ -20452,58 +20450,92 @@
       </p:sp>
       <p:sp>
         <p:nvSpPr>
-          <p:cNvPr id="31" name="Shape 28"/>
-          <p:cNvSpPr/>
-          <p:nvPr/>
-        </p:nvSpPr>
-        <p:spPr>
-          <a:xfrm>
-            <a:off x="4526280" y="5440680"/>
-            <a:ext cx="73152" cy="777240"/>
-          </a:xfrm>
-          <a:prstGeom prst="rect">
-            <a:avLst/>
-          </a:prstGeom>
-          <a:solidFill>
-            <a:srgbClr val="0E2A47"/>
-          </a:solidFill>
-          <a:ln/>
-        </p:spPr>
-      </p:sp>
-      <p:pic>
-        <p:nvPicPr>
-          <p:cNvPr id="32" name="Image 1" descr="preencoded.png">    </p:cNvPr>
-          <p:cNvPicPr>
-            <a:picLocks noChangeAspect="1"/>
-          </p:cNvPicPr>
-          <p:nvPr/>
-        </p:nvPicPr>
-        <p:blipFill>
-          <a:blip r:embed="rId2"/>
-          <a:stretch>
-            <a:fillRect/>
-          </a:stretch>
-        </p:blipFill>
-        <p:spPr>
-          <a:xfrm>
-            <a:off x="4782312" y="5687568"/>
-            <a:ext cx="292608" cy="292608"/>
-          </a:xfrm>
-          <a:prstGeom prst="rect">
-            <a:avLst/>
-          </a:prstGeom>
-        </p:spPr>
-      </p:pic>
-      <p:sp>
-        <p:nvSpPr>
-          <p:cNvPr id="33" name="Text 29"/>
-          <p:cNvSpPr/>
-          <p:nvPr/>
-        </p:nvSpPr>
-        <p:spPr>
-          <a:xfrm>
-            <a:off x="5239512" y="5440680"/>
-            <a:ext cx="6309360" cy="777240"/>
+          <p:cNvPr id="31" name="Text 28"/>
+          <p:cNvSpPr/>
+          <p:nvPr/>
+        </p:nvSpPr>
+        <p:spPr>
+          <a:xfrm>
+            <a:off x="4526280" y="4700016"/>
+            <a:ext cx="457200" cy="457200"/>
+          </a:xfrm>
+          <a:prstGeom prst="rect">
+            <a:avLst/>
+          </a:prstGeom>
+          <a:noFill/>
+          <a:ln/>
+        </p:spPr>
+        <p:txBody>
+          <a:bodyPr wrap="square" rtlCol="0" anchor="ctr"/>
+          <a:lstStyle/>
+          <a:p>
+            <a:pPr algn="ctr" indent="0" marL="0">
+              <a:buNone/>
+            </a:pPr>
+            <a:r>
+              <a:rPr lang="en-US" sz="1600" b="1" dirty="0">
+                <a:solidFill>
+                  <a:srgbClr val="0E2A47"/>
+                </a:solidFill>
+                <a:latin typeface="Microsoft JhengHei" pitchFamily="34" charset="0"/>
+                <a:ea typeface="Microsoft JhengHei" pitchFamily="34" charset="-122"/>
+                <a:cs typeface="Microsoft JhengHei" pitchFamily="34" charset="-120"/>
+              </a:rPr>
+              <a:t>4</a:t>
+            </a:r>
+            <a:endParaRPr lang="en-US" sz="1600" dirty="0"/>
+          </a:p>
+        </p:txBody>
+      </p:sp>
+      <p:sp>
+        <p:nvSpPr>
+          <p:cNvPr id="32" name="Text 29"/>
+          <p:cNvSpPr/>
+          <p:nvPr/>
+        </p:nvSpPr>
+        <p:spPr>
+          <a:xfrm>
+            <a:off x="5166360" y="4681728"/>
+            <a:ext cx="6492240" cy="365760"/>
+          </a:xfrm>
+          <a:prstGeom prst="rect">
+            <a:avLst/>
+          </a:prstGeom>
+          <a:noFill/>
+          <a:ln/>
+        </p:spPr>
+        <p:txBody>
+          <a:bodyPr wrap="square" rtlCol="0" anchor="ctr"/>
+          <a:lstStyle/>
+          <a:p>
+            <a:pPr indent="0" marL="0">
+              <a:buNone/>
+            </a:pPr>
+            <a:r>
+              <a:rPr lang="en-US" sz="1600" b="1" dirty="0">
+                <a:solidFill>
+                  <a:srgbClr val="FFFFFF"/>
+                </a:solidFill>
+                <a:latin typeface="Microsoft JhengHei" pitchFamily="34" charset="0"/>
+                <a:ea typeface="Microsoft JhengHei" pitchFamily="34" charset="-122"/>
+                <a:cs typeface="Microsoft JhengHei" pitchFamily="34" charset="-120"/>
+              </a:rPr>
+              <a:t>核准送出：批次卡按一次不一定全部送完</a:t>
+            </a:r>
+            <a:endParaRPr lang="en-US" sz="1600" dirty="0"/>
+          </a:p>
+        </p:txBody>
+      </p:sp>
+      <p:sp>
+        <p:nvSpPr>
+          <p:cNvPr id="33" name="Text 30"/>
+          <p:cNvSpPr/>
+          <p:nvPr/>
+        </p:nvSpPr>
+        <p:spPr>
+          <a:xfrm>
+            <a:off x="5166360" y="5047488"/>
+            <a:ext cx="6492240" cy="502920"/>
           </a:xfrm>
           <a:prstGeom prst="rect">
             <a:avLst/>
@@ -20522,7 +20554,112 @@
               <a:buNone/>
             </a:pPr>
             <a:r>
-              <a:rPr lang="en-US" sz="1250" b="1" dirty="0">
+              <a:rPr lang="en-US" sz="1300" dirty="0">
+                <a:solidFill>
+                  <a:srgbClr val="AEB2D8"/>
+                </a:solidFill>
+                <a:latin typeface="Microsoft JhengHei" pitchFamily="34" charset="0"/>
+                <a:ea typeface="Microsoft JhengHei" pitchFamily="34" charset="-122"/>
+                <a:cs typeface="Microsoft JhengHei" pitchFamily="34" charset="-120"/>
+              </a:rPr>
+              <a:t>核准前建議依分級順序檢查，而不是照草稿匣的排列順序 —— Tier 1 那三封最需要仔細看，因為對象是孩童…</a:t>
+            </a:r>
+            <a:endParaRPr lang="en-US" sz="1300" dirty="0"/>
+          </a:p>
+        </p:txBody>
+      </p:sp>
+      <p:sp>
+        <p:nvSpPr>
+          <p:cNvPr id="34" name="Shape 31"/>
+          <p:cNvSpPr/>
+          <p:nvPr/>
+        </p:nvSpPr>
+        <p:spPr>
+          <a:xfrm>
+            <a:off x="4526280" y="5504688"/>
+            <a:ext cx="457200" cy="457200"/>
+          </a:xfrm>
+          <a:prstGeom prst="ellipse">
+            <a:avLst/>
+          </a:prstGeom>
+          <a:solidFill>
+            <a:srgbClr val="FFFFFF">
+              <a:alpha val="12000"/>
+            </a:srgbClr>
+          </a:solidFill>
+          <a:ln w="19050">
+            <a:solidFill>
+              <a:srgbClr val="0E2A47"/>
+            </a:solidFill>
+            <a:prstDash val="solid"/>
+          </a:ln>
+        </p:spPr>
+      </p:sp>
+      <p:sp>
+        <p:nvSpPr>
+          <p:cNvPr id="35" name="Text 32"/>
+          <p:cNvSpPr/>
+          <p:nvPr/>
+        </p:nvSpPr>
+        <p:spPr>
+          <a:xfrm>
+            <a:off x="4526280" y="5504688"/>
+            <a:ext cx="457200" cy="457200"/>
+          </a:xfrm>
+          <a:prstGeom prst="rect">
+            <a:avLst/>
+          </a:prstGeom>
+          <a:noFill/>
+          <a:ln/>
+        </p:spPr>
+        <p:txBody>
+          <a:bodyPr wrap="square" rtlCol="0" anchor="ctr"/>
+          <a:lstStyle/>
+          <a:p>
+            <a:pPr algn="ctr" indent="0" marL="0">
+              <a:buNone/>
+            </a:pPr>
+            <a:r>
+              <a:rPr lang="en-US" sz="1600" b="1" dirty="0">
+                <a:solidFill>
+                  <a:srgbClr val="0E2A47"/>
+                </a:solidFill>
+                <a:latin typeface="Microsoft JhengHei" pitchFamily="34" charset="0"/>
+                <a:ea typeface="Microsoft JhengHei" pitchFamily="34" charset="-122"/>
+                <a:cs typeface="Microsoft JhengHei" pitchFamily="34" charset="-120"/>
+              </a:rPr>
+              <a:t>5</a:t>
+            </a:r>
+            <a:endParaRPr lang="en-US" sz="1600" dirty="0"/>
+          </a:p>
+        </p:txBody>
+      </p:sp>
+      <p:sp>
+        <p:nvSpPr>
+          <p:cNvPr id="36" name="Text 33"/>
+          <p:cNvSpPr/>
+          <p:nvPr/>
+        </p:nvSpPr>
+        <p:spPr>
+          <a:xfrm>
+            <a:off x="5166360" y="5486400"/>
+            <a:ext cx="6492240" cy="365760"/>
+          </a:xfrm>
+          <a:prstGeom prst="rect">
+            <a:avLst/>
+          </a:prstGeom>
+          <a:noFill/>
+          <a:ln/>
+        </p:spPr>
+        <p:txBody>
+          <a:bodyPr wrap="square" rtlCol="0" anchor="ctr"/>
+          <a:lstStyle/>
+          <a:p>
+            <a:pPr indent="0" marL="0">
+              <a:buNone/>
+            </a:pPr>
+            <a:r>
+              <a:rPr lang="en-US" sz="1600" b="1" dirty="0">
                 <a:solidFill>
                   <a:srgbClr val="FFFFFF"/>
                 </a:solidFill>
@@ -20530,8 +20667,33 @@
                 <a:ea typeface="Microsoft JhengHei" pitchFamily="34" charset="-122"/>
                 <a:cs typeface="Microsoft JhengHei" pitchFamily="34" charset="-120"/>
               </a:rPr>
-              <a:t>把關重點　</a:t>
-            </a:r>
+              <a:t>打開寄出的信：UM 那封確實寫給監護人</a:t>
+            </a:r>
+            <a:endParaRPr lang="en-US" sz="1600" dirty="0"/>
+          </a:p>
+        </p:txBody>
+      </p:sp>
+      <p:sp>
+        <p:nvSpPr>
+          <p:cNvPr id="37" name="Text 34"/>
+          <p:cNvSpPr/>
+          <p:nvPr/>
+        </p:nvSpPr>
+        <p:spPr>
+          <a:xfrm>
+            <a:off x="5166360" y="5852160"/>
+            <a:ext cx="6492240" cy="502920"/>
+          </a:xfrm>
+          <a:prstGeom prst="rect">
+            <a:avLst/>
+          </a:prstGeom>
+          <a:noFill/>
+          <a:ln/>
+        </p:spPr>
+        <p:txBody>
+          <a:bodyPr wrap="square" rtlCol="0" anchor="ctr"/>
+          <a:lstStyle/>
+          <a:p>
             <a:pPr indent="0" marL="0">
               <a:lnSpc>
                 <a:spcPct val="115000"/>
@@ -20539,23 +20701,23 @@
               <a:buNone/>
             </a:pPr>
             <a:r>
-              <a:rPr lang="en-US" sz="1250" dirty="0">
-                <a:solidFill>
-                  <a:srgbClr val="C7CAEC"/>
-                </a:solidFill>
-                <a:latin typeface="Microsoft JhengHei" pitchFamily="34" charset="0"/>
-                <a:ea typeface="Microsoft JhengHei" pitchFamily="34" charset="-122"/>
-                <a:cs typeface="Microsoft JhengHei" pitchFamily="34" charset="-120"/>
-              </a:rPr>
-              <a:t>八封通知都停在草稿匣，沒有任何一封被寄出。</a:t>
-            </a:r>
-            <a:endParaRPr lang="en-US" sz="1250" dirty="0"/>
-          </a:p>
-        </p:txBody>
-      </p:sp>
-      <p:sp>
-        <p:nvSpPr>
-          <p:cNvPr id="34" name="Text 30"/>
+              <a:rPr lang="en-US" sz="1300" dirty="0">
+                <a:solidFill>
+                  <a:srgbClr val="AEB2D8"/>
+                </a:solidFill>
+                <a:latin typeface="Microsoft JhengHei" pitchFamily="34" charset="0"/>
+                <a:ea typeface="Microsoft JhengHei" pitchFamily="34" charset="-122"/>
+                <a:cs typeface="Microsoft JhengHei" pitchFamily="34" charset="-120"/>
+              </a:rPr>
+              <a:t>最後一定要到**寄件備份**打開幾封來看，不要只信對話裡的摘要。</a:t>
+            </a:r>
+            <a:endParaRPr lang="en-US" sz="1300" dirty="0"/>
+          </a:p>
+        </p:txBody>
+      </p:sp>
+      <p:sp>
+        <p:nvSpPr>
+          <p:cNvPr id="38" name="Text 35"/>
           <p:cNvSpPr/>
           <p:nvPr/>
         </p:nvSpPr>
@@ -20594,7 +20756,7 @@
       </p:sp>
       <p:sp>
         <p:nvSpPr>
-          <p:cNvPr id="35" name="Text 31"/>
+          <p:cNvPr id="39" name="Text 36"/>
           <p:cNvSpPr/>
           <p:nvPr/>
         </p:nvSpPr>
@@ -20864,8 +21026,8 @@
         </p:nvSpPr>
         <p:spPr>
           <a:xfrm>
-            <a:off x="640080" y="5074920"/>
-            <a:ext cx="10911535" cy="1143000"/>
+            <a:off x="6163056" y="1773936"/>
+            <a:ext cx="5184648" cy="3433186"/>
           </a:xfrm>
           <a:prstGeom prst="rect">
             <a:avLst/>
@@ -20879,70 +21041,18 @@
             </a:solidFill>
             <a:prstDash val="solid"/>
           </a:ln>
-        </p:spPr>
-      </p:sp>
-      <p:sp>
-        <p:nvSpPr>
-          <p:cNvPr id="9" name="Shape 6"/>
-          <p:cNvSpPr/>
-          <p:nvPr/>
-        </p:nvSpPr>
-        <p:spPr>
-          <a:xfrm>
-            <a:off x="640080" y="5074920"/>
-            <a:ext cx="91440" cy="1143000"/>
-          </a:xfrm>
-          <a:prstGeom prst="rect">
-            <a:avLst/>
-          </a:prstGeom>
-          <a:solidFill>
-            <a:srgbClr val="0E2A47"/>
-          </a:solidFill>
-          <a:ln/>
-        </p:spPr>
-      </p:sp>
-      <p:sp>
-        <p:nvSpPr>
-          <p:cNvPr id="10" name="Text 7"/>
-          <p:cNvSpPr/>
-          <p:nvPr/>
-        </p:nvSpPr>
-        <p:spPr>
-          <a:xfrm>
-            <a:off x="914400" y="5184648"/>
-            <a:ext cx="1828800" cy="320040"/>
-          </a:xfrm>
-          <a:prstGeom prst="rect">
-            <a:avLst/>
-          </a:prstGeom>
-          <a:noFill/>
-          <a:ln/>
-        </p:spPr>
-        <p:txBody>
-          <a:bodyPr wrap="square" rtlCol="0" anchor="ctr"/>
-          <a:lstStyle/>
-          <a:p>
-            <a:pPr indent="0" marL="0">
-              <a:buNone/>
-            </a:pPr>
-            <a:r>
-              <a:rPr lang="en-US" sz="1400" b="1" dirty="0">
-                <a:solidFill>
-                  <a:srgbClr val="1E2235"/>
-                </a:solidFill>
-                <a:latin typeface="Microsoft JhengHei" pitchFamily="34" charset="0"/>
-                <a:ea typeface="Microsoft JhengHei" pitchFamily="34" charset="-122"/>
-                <a:cs typeface="Microsoft JhengHei" pitchFamily="34" charset="-120"/>
-              </a:rPr>
-              <a:t>產出驗收</a:t>
-            </a:r>
-            <a:endParaRPr lang="en-US" sz="1400" dirty="0"/>
-          </a:p>
-        </p:txBody>
+          <a:effectLst>
+            <a:outerShdw sx="100000" sy="100000" kx="0" ky="0" algn="bl" rotWithShape="0" blurRad="114300" dist="38100" dir="5400000">
+              <a:srgbClr val="8A90B5">
+                <a:alpha val="22000"/>
+              </a:srgbClr>
+            </a:outerShdw>
+          </a:effectLst>
+        </p:spPr>
       </p:sp>
       <p:pic>
         <p:nvPicPr>
-          <p:cNvPr id="11" name="Image 1" descr="preencoded.png">    </p:cNvPr>
+          <p:cNvPr id="9" name="Image 1" descr="C:\temp\CoworkLab\v2\_working\screenshots\air1_04_sent_email_um.png">    </p:cNvPr>
           <p:cNvPicPr>
             <a:picLocks noChangeAspect="1"/>
           </p:cNvPicPr>
@@ -20956,8 +21066,8 @@
         </p:blipFill>
         <p:spPr>
           <a:xfrm>
-            <a:off x="2834640" y="5221224"/>
-            <a:ext cx="182880" cy="182880"/>
+            <a:off x="6217920" y="1828800"/>
+            <a:ext cx="5074920" cy="3323458"/>
           </a:xfrm>
           <a:prstGeom prst="rect">
             <a:avLst/>
@@ -20966,14 +21076,98 @@
       </p:pic>
       <p:sp>
         <p:nvSpPr>
-          <p:cNvPr id="12" name="Text 8"/>
-          <p:cNvSpPr/>
-          <p:nvPr/>
-        </p:nvSpPr>
-        <p:spPr>
-          <a:xfrm>
-            <a:off x="3108960" y="5166360"/>
-            <a:ext cx="8168335" cy="310896"/>
+          <p:cNvPr id="10" name="Text 6"/>
+          <p:cNvSpPr/>
+          <p:nvPr/>
+        </p:nvSpPr>
+        <p:spPr>
+          <a:xfrm>
+            <a:off x="6217920" y="5261986"/>
+            <a:ext cx="5074920" cy="320040"/>
+          </a:xfrm>
+          <a:prstGeom prst="rect">
+            <a:avLst/>
+          </a:prstGeom>
+          <a:noFill/>
+          <a:ln/>
+        </p:spPr>
+        <p:txBody>
+          <a:bodyPr wrap="square" rtlCol="0" anchor="ctr"/>
+          <a:lstStyle/>
+          <a:p>
+            <a:pPr algn="ctr" indent="0" marL="0">
+              <a:buNone/>
+            </a:pPr>
+            <a:r>
+              <a:rPr lang="en-US" sz="1350" b="1" dirty="0">
+                <a:solidFill>
+                  <a:srgbClr val="0E2A47"/>
+                </a:solidFill>
+                <a:latin typeface="Microsoft JhengHei" pitchFamily="34" charset="0"/>
+                <a:ea typeface="Microsoft JhengHei" pitchFamily="34" charset="-122"/>
+                <a:cs typeface="Microsoft JhengHei" pitchFamily="34" charset="-120"/>
+              </a:rPr>
+              <a:t>② 產出成果</a:t>
+            </a:r>
+            <a:endParaRPr lang="en-US" sz="1350" dirty="0"/>
+          </a:p>
+        </p:txBody>
+      </p:sp>
+      <p:sp>
+        <p:nvSpPr>
+          <p:cNvPr id="11" name="Shape 7"/>
+          <p:cNvSpPr/>
+          <p:nvPr/>
+        </p:nvSpPr>
+        <p:spPr>
+          <a:xfrm>
+            <a:off x="640080" y="5074920"/>
+            <a:ext cx="10911535" cy="1143000"/>
+          </a:xfrm>
+          <a:prstGeom prst="rect">
+            <a:avLst/>
+          </a:prstGeom>
+          <a:solidFill>
+            <a:srgbClr val="FFFFFF"/>
+          </a:solidFill>
+          <a:ln w="12700">
+            <a:solidFill>
+              <a:srgbClr val="E4E7F2"/>
+            </a:solidFill>
+            <a:prstDash val="solid"/>
+          </a:ln>
+        </p:spPr>
+      </p:sp>
+      <p:sp>
+        <p:nvSpPr>
+          <p:cNvPr id="12" name="Shape 8"/>
+          <p:cNvSpPr/>
+          <p:nvPr/>
+        </p:nvSpPr>
+        <p:spPr>
+          <a:xfrm>
+            <a:off x="640080" y="5074920"/>
+            <a:ext cx="91440" cy="1143000"/>
+          </a:xfrm>
+          <a:prstGeom prst="rect">
+            <a:avLst/>
+          </a:prstGeom>
+          <a:solidFill>
+            <a:srgbClr val="0E2A47"/>
+          </a:solidFill>
+          <a:ln/>
+        </p:spPr>
+      </p:sp>
+      <p:sp>
+        <p:nvSpPr>
+          <p:cNvPr id="13" name="Text 9"/>
+          <p:cNvSpPr/>
+          <p:nvPr/>
+        </p:nvSpPr>
+        <p:spPr>
+          <a:xfrm>
+            <a:off x="914400" y="5184648"/>
+            <a:ext cx="1828800" cy="320040"/>
           </a:xfrm>
           <a:prstGeom prst="rect">
             <a:avLst/>
@@ -20989,7 +21183,7 @@
               <a:buNone/>
             </a:pPr>
             <a:r>
-              <a:rPr lang="en-US" sz="1300" dirty="0">
+              <a:rPr lang="en-US" sz="1400" b="1" dirty="0">
                 <a:solidFill>
                   <a:srgbClr val="1E2235"/>
                 </a:solidFill>
@@ -20997,15 +21191,15 @@
                 <a:ea typeface="Microsoft JhengHei" pitchFamily="34" charset="-122"/>
                 <a:cs typeface="Microsoft JhengHei" pitchFamily="34" charset="-120"/>
               </a:rPr>
-              <a:t>八位旅客都有分級，且每位都寫出所依據的條件</a:t>
-            </a:r>
-            <a:endParaRPr lang="en-US" sz="1300" dirty="0"/>
+              <a:t>產出驗收</a:t>
+            </a:r>
+            <a:endParaRPr lang="en-US" sz="1400" dirty="0"/>
           </a:p>
         </p:txBody>
       </p:sp>
       <p:pic>
         <p:nvPicPr>
-          <p:cNvPr id="13" name="Image 2" descr="preencoded.png">    </p:cNvPr>
+          <p:cNvPr id="14" name="Image 2" descr="preencoded.png">    </p:cNvPr>
           <p:cNvPicPr>
             <a:picLocks noChangeAspect="1"/>
           </p:cNvPicPr>
@@ -21019,7 +21213,7 @@
         </p:blipFill>
         <p:spPr>
           <a:xfrm>
-            <a:off x="2834640" y="5559552"/>
+            <a:off x="2834640" y="5221224"/>
             <a:ext cx="182880" cy="182880"/>
           </a:xfrm>
           <a:prstGeom prst="rect">
@@ -21029,13 +21223,13 @@
       </p:pic>
       <p:sp>
         <p:nvSpPr>
-          <p:cNvPr id="14" name="Text 9"/>
-          <p:cNvSpPr/>
-          <p:nvPr/>
-        </p:nvSpPr>
-        <p:spPr>
-          <a:xfrm>
-            <a:off x="3108960" y="5504688"/>
+          <p:cNvPr id="15" name="Text 10"/>
+          <p:cNvSpPr/>
+          <p:nvPr/>
+        </p:nvSpPr>
+        <p:spPr>
+          <a:xfrm>
+            <a:off x="3108960" y="5166360"/>
             <a:ext cx="8168335" cy="310896"/>
           </a:xfrm>
           <a:prstGeom prst="rect">
@@ -21060,7 +21254,7 @@
                 <a:ea typeface="Microsoft JhengHei" pitchFamily="34" charset="-122"/>
                 <a:cs typeface="Microsoft JhengHei" pitchFamily="34" charset="-120"/>
               </a:rPr>
-              <a:t>鑽石卡但終點站抵達者被判為 Tier 4，未因會員等級提前</a:t>
+              <a:t>八位旅客都有分級，且每位都寫出所依據的條件</a:t>
             </a:r>
             <a:endParaRPr lang="en-US" sz="1300" dirty="0"/>
           </a:p>
@@ -21068,7 +21262,7 @@
       </p:sp>
       <p:pic>
         <p:nvPicPr>
-          <p:cNvPr id="15" name="Image 3" descr="preencoded.png">    </p:cNvPr>
+          <p:cNvPr id="16" name="Image 3" descr="preencoded.png">    </p:cNvPr>
           <p:cNvPicPr>
             <a:picLocks noChangeAspect="1"/>
           </p:cNvPicPr>
@@ -21082,6 +21276,69 @@
         </p:blipFill>
         <p:spPr>
           <a:xfrm>
+            <a:off x="2834640" y="5559552"/>
+            <a:ext cx="182880" cy="182880"/>
+          </a:xfrm>
+          <a:prstGeom prst="rect">
+            <a:avLst/>
+          </a:prstGeom>
+        </p:spPr>
+      </p:pic>
+      <p:sp>
+        <p:nvSpPr>
+          <p:cNvPr id="17" name="Text 11"/>
+          <p:cNvSpPr/>
+          <p:nvPr/>
+        </p:nvSpPr>
+        <p:spPr>
+          <a:xfrm>
+            <a:off x="3108960" y="5504688"/>
+            <a:ext cx="8168335" cy="310896"/>
+          </a:xfrm>
+          <a:prstGeom prst="rect">
+            <a:avLst/>
+          </a:prstGeom>
+          <a:noFill/>
+          <a:ln/>
+        </p:spPr>
+        <p:txBody>
+          <a:bodyPr wrap="square" rtlCol="0" anchor="ctr"/>
+          <a:lstStyle/>
+          <a:p>
+            <a:pPr indent="0" marL="0">
+              <a:buNone/>
+            </a:pPr>
+            <a:r>
+              <a:rPr lang="en-US" sz="1300" dirty="0">
+                <a:solidFill>
+                  <a:srgbClr val="1E2235"/>
+                </a:solidFill>
+                <a:latin typeface="Microsoft JhengHei" pitchFamily="34" charset="0"/>
+                <a:ea typeface="Microsoft JhengHei" pitchFamily="34" charset="-122"/>
+                <a:cs typeface="Microsoft JhengHei" pitchFamily="34" charset="-120"/>
+              </a:rPr>
+              <a:t>鑽石卡但終點站抵達者被判為 Tier 4，未因會員等級提前</a:t>
+            </a:r>
+            <a:endParaRPr lang="en-US" sz="1300" dirty="0"/>
+          </a:p>
+        </p:txBody>
+      </p:sp>
+      <p:pic>
+        <p:nvPicPr>
+          <p:cNvPr id="18" name="Image 4" descr="preencoded.png">    </p:cNvPr>
+          <p:cNvPicPr>
+            <a:picLocks noChangeAspect="1"/>
+          </p:cNvPicPr>
+          <p:nvPr/>
+        </p:nvPicPr>
+        <p:blipFill>
+          <a:blip r:embed="rId5"/>
+          <a:stretch>
+            <a:fillRect/>
+          </a:stretch>
+        </p:blipFill>
+        <p:spPr>
+          <a:xfrm>
             <a:off x="2834640" y="5897880"/>
             <a:ext cx="182880" cy="182880"/>
           </a:xfrm>
@@ -21092,7 +21349,7 @@
       </p:pic>
       <p:sp>
         <p:nvSpPr>
-          <p:cNvPr id="16" name="Text 10"/>
+          <p:cNvPr id="19" name="Text 12"/>
           <p:cNvSpPr/>
           <p:nvPr/>
         </p:nvSpPr>
@@ -21131,7 +21388,7 @@
       </p:sp>
       <p:sp>
         <p:nvSpPr>
-          <p:cNvPr id="17" name="Text 11"/>
+          <p:cNvPr id="20" name="Text 13"/>
           <p:cNvSpPr/>
           <p:nvPr/>
         </p:nvSpPr>
@@ -21170,7 +21427,7 @@
       </p:sp>
       <p:sp>
         <p:nvSpPr>
-          <p:cNvPr id="18" name="Text 12"/>
+          <p:cNvPr id="21" name="Text 14"/>
           <p:cNvSpPr/>
           <p:nvPr/>
         </p:nvSpPr>

--- a/CoworkPlaybook/Cowork_教育訓練簡報_航空業版.pptx
+++ b/CoworkPlaybook/Cowork_教育訓練簡報_航空業版.pptx
@@ -26,9 +26,10 @@
     <p:sldId id="274" r:id="rId20"/>
     <p:sldId id="275" r:id="rId21"/>
     <p:sldId id="276" r:id="rId22"/>
+    <p:sldId id="277" r:id="rId23"/>
   </p:sldIdLst>
   <p:notesMasterIdLst>
-    <p:notesMasterId r:id="rId23"/>
+    <p:notesMasterId r:id="rId24"/>
   </p:notesMasterIdLst>
   <p:sldSz cx="12191695" cy="6858000"/>
   <p:notesSz cx="6858000" cy="12191695"/>
@@ -1690,6 +1691,94 @@
             <a:fld id="{F7021451-1387-4CA6-816F-3879F97B5CBC}" type="slidenum">
               <a:rPr lang="en-US"/>
               <a:t>21</a:t>
+            </a:fld>
+            <a:endParaRPr lang="en-US"/>
+          </a:p>
+        </p:txBody>
+      </p:sp>
+    </p:spTree>
+    <p:extLst>
+      <p:ext uri="{BB962C8B-B14F-4D97-AF65-F5344CB8AC3E}">
+        <p14:creationId xmlns:p14="http://schemas.microsoft.com/office/powerpoint/2010/main" val="1024086991"/>
+      </p:ext>
+    </p:extLst>
+  </p:cSld>
+  <p:clrMapOvr>
+    <a:masterClrMapping/>
+  </p:clrMapOvr>
+</p:notes>
+</file>
+
+<file path=ppt/notesSlides/notesSlide22.xml><?xml version="1.0" encoding="utf-8"?>
+<p:notes xmlns:a="http://schemas.openxmlformats.org/drawingml/2006/main" xmlns:r="http://schemas.openxmlformats.org/officeDocument/2006/relationships" xmlns:p="http://schemas.openxmlformats.org/presentationml/2006/main">
+  <p:cSld>
+    <p:spTree>
+      <p:nvGrpSpPr>
+        <p:cNvPr id="1" name=""/>
+        <p:cNvGrpSpPr/>
+        <p:nvPr/>
+      </p:nvGrpSpPr>
+      <p:grpSpPr>
+        <a:xfrm>
+          <a:off x="0" y="0"/>
+          <a:ext cx="0" cy="0"/>
+          <a:chOff x="0" y="0"/>
+          <a:chExt cx="0" cy="0"/>
+        </a:xfrm>
+      </p:grpSpPr>
+      <p:sp>
+        <p:nvSpPr>
+          <p:cNvPr id="2" name="Slide Image Placeholder 1"/>
+          <p:cNvSpPr>
+            <a:spLocks noGrp="1" noRot="1" noChangeAspect="1"/>
+          </p:cNvSpPr>
+          <p:nvPr>
+            <p:ph type="sldImg"/>
+          </p:nvPr>
+        </p:nvSpPr>
+        <p:spPr/>
+      </p:sp>
+      <p:sp>
+        <p:nvSpPr>
+          <p:cNvPr id="3" name="Notes Placeholder 2"/>
+          <p:cNvSpPr>
+            <a:spLocks noGrp="1"/>
+          </p:cNvSpPr>
+          <p:nvPr>
+            <p:ph type="body" idx="1"/>
+          </p:nvPr>
+        </p:nvSpPr>
+        <p:spPr/>
+        <p:txBody>
+          <a:bodyPr/>
+          <a:lstStyle/>
+          <a:p>
+            <a:r>
+              <a:rPr lang="en-US" dirty="0"/>
+              <a:t/>
+            </a:r>
+            <a:endParaRPr lang="en-US" dirty="0"/>
+          </a:p>
+        </p:txBody>
+      </p:sp>
+      <p:sp>
+        <p:nvSpPr>
+          <p:cNvPr id="4" name="Slide Number Placeholder 3"/>
+          <p:cNvSpPr>
+            <a:spLocks noGrp="1"/>
+          </p:cNvSpPr>
+          <p:nvPr>
+            <p:ph type="sldNum" sz="quarter" idx="10"/>
+          </p:nvPr>
+        </p:nvSpPr>
+        <p:spPr/>
+        <p:txBody>
+          <a:bodyPr/>
+          <a:lstStyle/>
+          <a:p>
+            <a:fld id="{F7021451-1387-4CA6-816F-3879F97B5CBC}" type="slidenum">
+              <a:rPr lang="en-US"/>
+              <a:t>22</a:t>
             </a:fld>
             <a:endParaRPr lang="en-US"/>
           </a:p>
@@ -2951,6 +3040,677 @@
     <p:bg>
       <p:bgPr>
         <a:solidFill>
+          <a:srgbClr val="F7F8FC"/>
+        </a:solidFill>
+      </p:bgPr>
+    </p:bg>
+    <p:spTree>
+      <p:nvGrpSpPr>
+        <p:cNvPr id="1" name=""/>
+        <p:cNvGrpSpPr/>
+        <p:nvPr/>
+      </p:nvGrpSpPr>
+      <p:grpSpPr>
+        <a:xfrm>
+          <a:off x="0" y="0"/>
+          <a:ext cx="0" cy="0"/>
+          <a:chOff x="0" y="0"/>
+          <a:chExt cx="0" cy="0"/>
+        </a:xfrm>
+      </p:grpSpPr>
+      <p:sp>
+        <p:nvSpPr>
+          <p:cNvPr id="2" name="Shape 0"/>
+          <p:cNvSpPr/>
+          <p:nvPr/>
+        </p:nvSpPr>
+        <p:spPr>
+          <a:xfrm>
+            <a:off x="640080" y="566928"/>
+            <a:ext cx="384048" cy="128016"/>
+          </a:xfrm>
+          <a:prstGeom prst="rect">
+            <a:avLst/>
+          </a:prstGeom>
+          <a:solidFill>
+            <a:srgbClr val="0E2A47"/>
+          </a:solidFill>
+          <a:ln/>
+        </p:spPr>
+      </p:sp>
+      <p:sp>
+        <p:nvSpPr>
+          <p:cNvPr id="3" name="Text 1"/>
+          <p:cNvSpPr/>
+          <p:nvPr/>
+        </p:nvSpPr>
+        <p:spPr>
+          <a:xfrm>
+            <a:off x="1143000" y="457200"/>
+            <a:ext cx="8229600" cy="310896"/>
+          </a:xfrm>
+          <a:prstGeom prst="rect">
+            <a:avLst/>
+          </a:prstGeom>
+          <a:noFill/>
+          <a:ln/>
+        </p:spPr>
+        <p:txBody>
+          <a:bodyPr wrap="square" rtlCol="0" anchor="ctr"/>
+          <a:lstStyle/>
+          <a:p>
+            <a:pPr indent="0" marL="0">
+              <a:buNone/>
+            </a:pPr>
+            <a:r>
+              <a:rPr lang="en-US" sz="1200" b="1" spc="200" kern="0" dirty="0">
+                <a:solidFill>
+                  <a:srgbClr val="0E2A47"/>
+                </a:solidFill>
+                <a:latin typeface="Microsoft JhengHei" pitchFamily="34" charset="0"/>
+                <a:ea typeface="Microsoft JhengHei" pitchFamily="34" charset="-122"/>
+                <a:cs typeface="Microsoft JhengHei" pitchFamily="34" charset="-120"/>
+              </a:rPr>
+              <a:t>情境 01 · 實機示範</a:t>
+            </a:r>
+            <a:endParaRPr lang="en-US" sz="1200" dirty="0"/>
+          </a:p>
+        </p:txBody>
+      </p:sp>
+      <p:sp>
+        <p:nvSpPr>
+          <p:cNvPr id="4" name="Text 2"/>
+          <p:cNvSpPr/>
+          <p:nvPr/>
+        </p:nvSpPr>
+        <p:spPr>
+          <a:xfrm>
+            <a:off x="640080" y="786384"/>
+            <a:ext cx="10972800" cy="640080"/>
+          </a:xfrm>
+          <a:prstGeom prst="rect">
+            <a:avLst/>
+          </a:prstGeom>
+          <a:noFill/>
+          <a:ln/>
+        </p:spPr>
+        <p:txBody>
+          <a:bodyPr wrap="square" rtlCol="0" anchor="ctr"/>
+          <a:lstStyle/>
+          <a:p>
+            <a:pPr indent="0" marL="0">
+              <a:buNone/>
+            </a:pPr>
+            <a:r>
+              <a:rPr lang="en-US" sz="3000" b="1" dirty="0">
+                <a:solidFill>
+                  <a:srgbClr val="1E2235"/>
+                </a:solidFill>
+                <a:latin typeface="Microsoft JhengHei" pitchFamily="34" charset="0"/>
+                <a:ea typeface="Microsoft JhengHei" pitchFamily="34" charset="-122"/>
+                <a:cs typeface="Microsoft JhengHei" pitchFamily="34" charset="-120"/>
+              </a:rPr>
+              <a:t>看 Cowork 怎麼做、產出什麼</a:t>
+            </a:r>
+            <a:endParaRPr lang="en-US" sz="3000" dirty="0"/>
+          </a:p>
+        </p:txBody>
+      </p:sp>
+      <p:sp>
+        <p:nvSpPr>
+          <p:cNvPr id="5" name="Shape 3"/>
+          <p:cNvSpPr/>
+          <p:nvPr/>
+        </p:nvSpPr>
+        <p:spPr>
+          <a:xfrm>
+            <a:off x="585216" y="1773936"/>
+            <a:ext cx="5184648" cy="3433186"/>
+          </a:xfrm>
+          <a:prstGeom prst="rect">
+            <a:avLst/>
+          </a:prstGeom>
+          <a:solidFill>
+            <a:srgbClr val="FFFFFF"/>
+          </a:solidFill>
+          <a:ln w="12700">
+            <a:solidFill>
+              <a:srgbClr val="E4E7F2"/>
+            </a:solidFill>
+            <a:prstDash val="solid"/>
+          </a:ln>
+          <a:effectLst>
+            <a:outerShdw sx="100000" sy="100000" kx="0" ky="0" algn="bl" rotWithShape="0" blurRad="114300" dist="38100" dir="5400000">
+              <a:srgbClr val="8A90B5">
+                <a:alpha val="22000"/>
+              </a:srgbClr>
+            </a:outerShdw>
+          </a:effectLst>
+        </p:spPr>
+      </p:sp>
+      <p:pic>
+        <p:nvPicPr>
+          <p:cNvPr id="6" name="Image 0" descr="C:\temp\CoworkLab\v2\_working\screenshots\air1_01_tiers.png">    </p:cNvPr>
+          <p:cNvPicPr>
+            <a:picLocks noChangeAspect="1"/>
+          </p:cNvPicPr>
+          <p:nvPr/>
+        </p:nvPicPr>
+        <p:blipFill>
+          <a:blip r:embed="rId1"/>
+          <a:stretch>
+            <a:fillRect/>
+          </a:stretch>
+        </p:blipFill>
+        <p:spPr>
+          <a:xfrm>
+            <a:off x="640080" y="1828800"/>
+            <a:ext cx="5074920" cy="3323458"/>
+          </a:xfrm>
+          <a:prstGeom prst="rect">
+            <a:avLst/>
+          </a:prstGeom>
+        </p:spPr>
+      </p:pic>
+      <p:sp>
+        <p:nvSpPr>
+          <p:cNvPr id="7" name="Text 4"/>
+          <p:cNvSpPr/>
+          <p:nvPr/>
+        </p:nvSpPr>
+        <p:spPr>
+          <a:xfrm>
+            <a:off x="640080" y="5261986"/>
+            <a:ext cx="5074920" cy="320040"/>
+          </a:xfrm>
+          <a:prstGeom prst="rect">
+            <a:avLst/>
+          </a:prstGeom>
+          <a:noFill/>
+          <a:ln/>
+        </p:spPr>
+        <p:txBody>
+          <a:bodyPr wrap="square" rtlCol="0" anchor="ctr"/>
+          <a:lstStyle/>
+          <a:p>
+            <a:pPr algn="ctr" indent="0" marL="0">
+              <a:buNone/>
+            </a:pPr>
+            <a:r>
+              <a:rPr lang="en-US" sz="1350" b="1" dirty="0">
+                <a:solidFill>
+                  <a:srgbClr val="0E2A47"/>
+                </a:solidFill>
+                <a:latin typeface="Microsoft JhengHei" pitchFamily="34" charset="0"/>
+                <a:ea typeface="Microsoft JhengHei" pitchFamily="34" charset="-122"/>
+                <a:cs typeface="Microsoft JhengHei" pitchFamily="34" charset="-120"/>
+              </a:rPr>
+              <a:t>① 你的輸入與指令</a:t>
+            </a:r>
+            <a:endParaRPr lang="en-US" sz="1350" dirty="0"/>
+          </a:p>
+        </p:txBody>
+      </p:sp>
+      <p:sp>
+        <p:nvSpPr>
+          <p:cNvPr id="8" name="Shape 5"/>
+          <p:cNvSpPr/>
+          <p:nvPr/>
+        </p:nvSpPr>
+        <p:spPr>
+          <a:xfrm>
+            <a:off x="6163056" y="1773936"/>
+            <a:ext cx="5184648" cy="3433186"/>
+          </a:xfrm>
+          <a:prstGeom prst="rect">
+            <a:avLst/>
+          </a:prstGeom>
+          <a:solidFill>
+            <a:srgbClr val="FFFFFF"/>
+          </a:solidFill>
+          <a:ln w="12700">
+            <a:solidFill>
+              <a:srgbClr val="E4E7F2"/>
+            </a:solidFill>
+            <a:prstDash val="solid"/>
+          </a:ln>
+          <a:effectLst>
+            <a:outerShdw sx="100000" sy="100000" kx="0" ky="0" algn="bl" rotWithShape="0" blurRad="114300" dist="38100" dir="5400000">
+              <a:srgbClr val="8A90B5">
+                <a:alpha val="22000"/>
+              </a:srgbClr>
+            </a:outerShdw>
+          </a:effectLst>
+        </p:spPr>
+      </p:sp>
+      <p:pic>
+        <p:nvPicPr>
+          <p:cNvPr id="9" name="Image 1" descr="C:\temp\CoworkLab\v2\_working\screenshots\air1_04_sent_email_um.png">    </p:cNvPr>
+          <p:cNvPicPr>
+            <a:picLocks noChangeAspect="1"/>
+          </p:cNvPicPr>
+          <p:nvPr/>
+        </p:nvPicPr>
+        <p:blipFill>
+          <a:blip r:embed="rId2"/>
+          <a:stretch>
+            <a:fillRect/>
+          </a:stretch>
+        </p:blipFill>
+        <p:spPr>
+          <a:xfrm>
+            <a:off x="6217920" y="1828800"/>
+            <a:ext cx="5074920" cy="3323458"/>
+          </a:xfrm>
+          <a:prstGeom prst="rect">
+            <a:avLst/>
+          </a:prstGeom>
+        </p:spPr>
+      </p:pic>
+      <p:sp>
+        <p:nvSpPr>
+          <p:cNvPr id="10" name="Text 6"/>
+          <p:cNvSpPr/>
+          <p:nvPr/>
+        </p:nvSpPr>
+        <p:spPr>
+          <a:xfrm>
+            <a:off x="6217920" y="5261986"/>
+            <a:ext cx="5074920" cy="320040"/>
+          </a:xfrm>
+          <a:prstGeom prst="rect">
+            <a:avLst/>
+          </a:prstGeom>
+          <a:noFill/>
+          <a:ln/>
+        </p:spPr>
+        <p:txBody>
+          <a:bodyPr wrap="square" rtlCol="0" anchor="ctr"/>
+          <a:lstStyle/>
+          <a:p>
+            <a:pPr algn="ctr" indent="0" marL="0">
+              <a:buNone/>
+            </a:pPr>
+            <a:r>
+              <a:rPr lang="en-US" sz="1350" b="1" dirty="0">
+                <a:solidFill>
+                  <a:srgbClr val="0E2A47"/>
+                </a:solidFill>
+                <a:latin typeface="Microsoft JhengHei" pitchFamily="34" charset="0"/>
+                <a:ea typeface="Microsoft JhengHei" pitchFamily="34" charset="-122"/>
+                <a:cs typeface="Microsoft JhengHei" pitchFamily="34" charset="-120"/>
+              </a:rPr>
+              <a:t>② 產出成果</a:t>
+            </a:r>
+            <a:endParaRPr lang="en-US" sz="1350" dirty="0"/>
+          </a:p>
+        </p:txBody>
+      </p:sp>
+      <p:sp>
+        <p:nvSpPr>
+          <p:cNvPr id="11" name="Shape 7"/>
+          <p:cNvSpPr/>
+          <p:nvPr/>
+        </p:nvSpPr>
+        <p:spPr>
+          <a:xfrm>
+            <a:off x="640080" y="5074920"/>
+            <a:ext cx="10911535" cy="1143000"/>
+          </a:xfrm>
+          <a:prstGeom prst="rect">
+            <a:avLst/>
+          </a:prstGeom>
+          <a:solidFill>
+            <a:srgbClr val="FFFFFF"/>
+          </a:solidFill>
+          <a:ln w="12700">
+            <a:solidFill>
+              <a:srgbClr val="E4E7F2"/>
+            </a:solidFill>
+            <a:prstDash val="solid"/>
+          </a:ln>
+        </p:spPr>
+      </p:sp>
+      <p:sp>
+        <p:nvSpPr>
+          <p:cNvPr id="12" name="Shape 8"/>
+          <p:cNvSpPr/>
+          <p:nvPr/>
+        </p:nvSpPr>
+        <p:spPr>
+          <a:xfrm>
+            <a:off x="640080" y="5074920"/>
+            <a:ext cx="91440" cy="1143000"/>
+          </a:xfrm>
+          <a:prstGeom prst="rect">
+            <a:avLst/>
+          </a:prstGeom>
+          <a:solidFill>
+            <a:srgbClr val="0E2A47"/>
+          </a:solidFill>
+          <a:ln/>
+        </p:spPr>
+      </p:sp>
+      <p:sp>
+        <p:nvSpPr>
+          <p:cNvPr id="13" name="Text 9"/>
+          <p:cNvSpPr/>
+          <p:nvPr/>
+        </p:nvSpPr>
+        <p:spPr>
+          <a:xfrm>
+            <a:off x="914400" y="5184648"/>
+            <a:ext cx="1828800" cy="320040"/>
+          </a:xfrm>
+          <a:prstGeom prst="rect">
+            <a:avLst/>
+          </a:prstGeom>
+          <a:noFill/>
+          <a:ln/>
+        </p:spPr>
+        <p:txBody>
+          <a:bodyPr wrap="square" rtlCol="0" anchor="ctr"/>
+          <a:lstStyle/>
+          <a:p>
+            <a:pPr indent="0" marL="0">
+              <a:buNone/>
+            </a:pPr>
+            <a:r>
+              <a:rPr lang="en-US" sz="1400" b="1" dirty="0">
+                <a:solidFill>
+                  <a:srgbClr val="1E2235"/>
+                </a:solidFill>
+                <a:latin typeface="Microsoft JhengHei" pitchFamily="34" charset="0"/>
+                <a:ea typeface="Microsoft JhengHei" pitchFamily="34" charset="-122"/>
+                <a:cs typeface="Microsoft JhengHei" pitchFamily="34" charset="-120"/>
+              </a:rPr>
+              <a:t>產出驗收</a:t>
+            </a:r>
+            <a:endParaRPr lang="en-US" sz="1400" dirty="0"/>
+          </a:p>
+        </p:txBody>
+      </p:sp>
+      <p:pic>
+        <p:nvPicPr>
+          <p:cNvPr id="14" name="Image 2" descr="preencoded.png">    </p:cNvPr>
+          <p:cNvPicPr>
+            <a:picLocks noChangeAspect="1"/>
+          </p:cNvPicPr>
+          <p:nvPr/>
+        </p:nvPicPr>
+        <p:blipFill>
+          <a:blip r:embed="rId3"/>
+          <a:stretch>
+            <a:fillRect/>
+          </a:stretch>
+        </p:blipFill>
+        <p:spPr>
+          <a:xfrm>
+            <a:off x="2834640" y="5221224"/>
+            <a:ext cx="182880" cy="182880"/>
+          </a:xfrm>
+          <a:prstGeom prst="rect">
+            <a:avLst/>
+          </a:prstGeom>
+        </p:spPr>
+      </p:pic>
+      <p:sp>
+        <p:nvSpPr>
+          <p:cNvPr id="15" name="Text 10"/>
+          <p:cNvSpPr/>
+          <p:nvPr/>
+        </p:nvSpPr>
+        <p:spPr>
+          <a:xfrm>
+            <a:off x="3108960" y="5166360"/>
+            <a:ext cx="8168335" cy="310896"/>
+          </a:xfrm>
+          <a:prstGeom prst="rect">
+            <a:avLst/>
+          </a:prstGeom>
+          <a:noFill/>
+          <a:ln/>
+        </p:spPr>
+        <p:txBody>
+          <a:bodyPr wrap="square" rtlCol="0" anchor="ctr"/>
+          <a:lstStyle/>
+          <a:p>
+            <a:pPr indent="0" marL="0">
+              <a:buNone/>
+            </a:pPr>
+            <a:r>
+              <a:rPr lang="en-US" sz="1300" dirty="0">
+                <a:solidFill>
+                  <a:srgbClr val="1E2235"/>
+                </a:solidFill>
+                <a:latin typeface="Microsoft JhengHei" pitchFamily="34" charset="0"/>
+                <a:ea typeface="Microsoft JhengHei" pitchFamily="34" charset="-122"/>
+                <a:cs typeface="Microsoft JhengHei" pitchFamily="34" charset="-120"/>
+              </a:rPr>
+              <a:t>八位旅客都有分級，且每位都寫出所依據的條件</a:t>
+            </a:r>
+            <a:endParaRPr lang="en-US" sz="1300" dirty="0"/>
+          </a:p>
+        </p:txBody>
+      </p:sp>
+      <p:pic>
+        <p:nvPicPr>
+          <p:cNvPr id="16" name="Image 3" descr="preencoded.png">    </p:cNvPr>
+          <p:cNvPicPr>
+            <a:picLocks noChangeAspect="1"/>
+          </p:cNvPicPr>
+          <p:nvPr/>
+        </p:nvPicPr>
+        <p:blipFill>
+          <a:blip r:embed="rId4"/>
+          <a:stretch>
+            <a:fillRect/>
+          </a:stretch>
+        </p:blipFill>
+        <p:spPr>
+          <a:xfrm>
+            <a:off x="2834640" y="5559552"/>
+            <a:ext cx="182880" cy="182880"/>
+          </a:xfrm>
+          <a:prstGeom prst="rect">
+            <a:avLst/>
+          </a:prstGeom>
+        </p:spPr>
+      </p:pic>
+      <p:sp>
+        <p:nvSpPr>
+          <p:cNvPr id="17" name="Text 11"/>
+          <p:cNvSpPr/>
+          <p:nvPr/>
+        </p:nvSpPr>
+        <p:spPr>
+          <a:xfrm>
+            <a:off x="3108960" y="5504688"/>
+            <a:ext cx="8168335" cy="310896"/>
+          </a:xfrm>
+          <a:prstGeom prst="rect">
+            <a:avLst/>
+          </a:prstGeom>
+          <a:noFill/>
+          <a:ln/>
+        </p:spPr>
+        <p:txBody>
+          <a:bodyPr wrap="square" rtlCol="0" anchor="ctr"/>
+          <a:lstStyle/>
+          <a:p>
+            <a:pPr indent="0" marL="0">
+              <a:buNone/>
+            </a:pPr>
+            <a:r>
+              <a:rPr lang="en-US" sz="1300" dirty="0">
+                <a:solidFill>
+                  <a:srgbClr val="1E2235"/>
+                </a:solidFill>
+                <a:latin typeface="Microsoft JhengHei" pitchFamily="34" charset="0"/>
+                <a:ea typeface="Microsoft JhengHei" pitchFamily="34" charset="-122"/>
+                <a:cs typeface="Microsoft JhengHei" pitchFamily="34" charset="-120"/>
+              </a:rPr>
+              <a:t>鑽石卡但終點站抵達者被判為 Tier 4，未因會員等級提前</a:t>
+            </a:r>
+            <a:endParaRPr lang="en-US" sz="1300" dirty="0"/>
+          </a:p>
+        </p:txBody>
+      </p:sp>
+      <p:pic>
+        <p:nvPicPr>
+          <p:cNvPr id="18" name="Image 4" descr="preencoded.png">    </p:cNvPr>
+          <p:cNvPicPr>
+            <a:picLocks noChangeAspect="1"/>
+          </p:cNvPicPr>
+          <p:nvPr/>
+        </p:nvPicPr>
+        <p:blipFill>
+          <a:blip r:embed="rId5"/>
+          <a:stretch>
+            <a:fillRect/>
+          </a:stretch>
+        </p:blipFill>
+        <p:spPr>
+          <a:xfrm>
+            <a:off x="2834640" y="5897880"/>
+            <a:ext cx="182880" cy="182880"/>
+          </a:xfrm>
+          <a:prstGeom prst="rect">
+            <a:avLst/>
+          </a:prstGeom>
+        </p:spPr>
+      </p:pic>
+      <p:sp>
+        <p:nvSpPr>
+          <p:cNvPr id="19" name="Text 12"/>
+          <p:cNvSpPr/>
+          <p:nvPr/>
+        </p:nvSpPr>
+        <p:spPr>
+          <a:xfrm>
+            <a:off x="3108960" y="5843016"/>
+            <a:ext cx="8168335" cy="310896"/>
+          </a:xfrm>
+          <a:prstGeom prst="rect">
+            <a:avLst/>
+          </a:prstGeom>
+          <a:noFill/>
+          <a:ln/>
+        </p:spPr>
+        <p:txBody>
+          <a:bodyPr wrap="square" rtlCol="0" anchor="ctr"/>
+          <a:lstStyle/>
+          <a:p>
+            <a:pPr indent="0" marL="0">
+              <a:buNone/>
+            </a:pPr>
+            <a:r>
+              <a:rPr lang="en-US" sz="1300" dirty="0">
+                <a:solidFill>
+                  <a:srgbClr val="1E2235"/>
+                </a:solidFill>
+                <a:latin typeface="Microsoft JhengHei" pitchFamily="34" charset="0"/>
+                <a:ea typeface="Microsoft JhengHei" pitchFamily="34" charset="-122"/>
+                <a:cs typeface="Microsoft JhengHei" pitchFamily="34" charset="-120"/>
+              </a:rPr>
+              <a:t>經濟艙的單獨旅行孩童被判為 Tier 1，未因艙等降級</a:t>
+            </a:r>
+            <a:endParaRPr lang="en-US" sz="1300" dirty="0"/>
+          </a:p>
+        </p:txBody>
+      </p:sp>
+      <p:sp>
+        <p:nvSpPr>
+          <p:cNvPr id="20" name="Text 13"/>
+          <p:cNvSpPr/>
+          <p:nvPr/>
+        </p:nvSpPr>
+        <p:spPr>
+          <a:xfrm>
+            <a:off x="640080" y="6473952"/>
+            <a:ext cx="5486400" cy="274320"/>
+          </a:xfrm>
+          <a:prstGeom prst="rect">
+            <a:avLst/>
+          </a:prstGeom>
+          <a:noFill/>
+          <a:ln/>
+        </p:spPr>
+        <p:txBody>
+          <a:bodyPr wrap="square" rtlCol="0" anchor="ctr"/>
+          <a:lstStyle/>
+          <a:p>
+            <a:pPr algn="l" indent="0" marL="0">
+              <a:buNone/>
+            </a:pPr>
+            <a:r>
+              <a:rPr lang="en-US" sz="900" dirty="0">
+                <a:solidFill>
+                  <a:srgbClr val="5B6079"/>
+                </a:solidFill>
+                <a:latin typeface="Microsoft JhengHei" pitchFamily="34" charset="0"/>
+                <a:ea typeface="Microsoft JhengHei" pitchFamily="34" charset="-122"/>
+                <a:cs typeface="Microsoft JhengHei" pitchFamily="34" charset="-120"/>
+              </a:rPr>
+              <a:t>Microsoft 365 Copilot Cowork</a:t>
+            </a:r>
+            <a:endParaRPr lang="en-US" sz="900" dirty="0"/>
+          </a:p>
+        </p:txBody>
+      </p:sp>
+      <p:sp>
+        <p:nvSpPr>
+          <p:cNvPr id="21" name="Text 14"/>
+          <p:cNvSpPr/>
+          <p:nvPr/>
+        </p:nvSpPr>
+        <p:spPr>
+          <a:xfrm>
+            <a:off x="11002975" y="6473952"/>
+            <a:ext cx="548640" cy="274320"/>
+          </a:xfrm>
+          <a:prstGeom prst="rect">
+            <a:avLst/>
+          </a:prstGeom>
+          <a:noFill/>
+          <a:ln/>
+        </p:spPr>
+        <p:txBody>
+          <a:bodyPr wrap="square" rtlCol="0" anchor="ctr"/>
+          <a:lstStyle/>
+          <a:p>
+            <a:pPr algn="r" indent="0" marL="0">
+              <a:buNone/>
+            </a:pPr>
+            <a:r>
+              <a:rPr lang="en-US" sz="900" dirty="0">
+                <a:solidFill>
+                  <a:srgbClr val="5B6079"/>
+                </a:solidFill>
+                <a:latin typeface="Microsoft JhengHei" pitchFamily="34" charset="0"/>
+                <a:ea typeface="Microsoft JhengHei" pitchFamily="34" charset="-122"/>
+                <a:cs typeface="Microsoft JhengHei" pitchFamily="34" charset="-120"/>
+              </a:rPr>
+              <a:t>9</a:t>
+            </a:r>
+            <a:endParaRPr lang="en-US" sz="900" dirty="0"/>
+          </a:p>
+        </p:txBody>
+      </p:sp>
+    </p:spTree>
+  </p:cSld>
+  <p:clrMapOvr>
+    <a:masterClrMapping/>
+  </p:clrMapOvr>
+</p:sld>
+</file>
+
+<file path=ppt/slides/slide11.xml><?xml version="1.0" encoding="utf-8"?>
+<p:sld xmlns:a="http://schemas.openxmlformats.org/drawingml/2006/main" xmlns:r="http://schemas.openxmlformats.org/officeDocument/2006/relationships" xmlns:p="http://schemas.openxmlformats.org/presentationml/2006/main">
+  <p:cSld name="Slide 11">
+    <p:bg>
+      <p:bgPr>
+        <a:solidFill>
           <a:srgbClr val="0F1031"/>
         </a:solidFill>
       </p:bgPr>
@@ -3428,7 +4188,7 @@
                 <a:ea typeface="Microsoft JhengHei" pitchFamily="34" charset="-122"/>
                 <a:cs typeface="Microsoft JhengHei" pitchFamily="34" charset="-120"/>
               </a:rPr>
-              <a:t>飛時限制不是一條線，是四條各自獨立的線：月累計、近七日滾動、兩段執勤間休息、單日執勤時數。任一條超限就是違規。難的地方在於**它們會互相掩護** —— 月累計最高的人可能完全合規，月累計最低的人反而因為近七日過度集中而超標，而所有時數都漂亮的人可能因為紅眼航班後接早班，休息差了三十分鐘。再加一層：**目前合規不等於安全**，還要看月底會不會超標。</a:t>
+              <a:t>飛時限制不是一條線，是四條各自獨立的線：月累計、近七日滾動、兩段執勤間休息、單日執勤時數。任一條超限就是違規。難的地方在於它們會互相掩護 —— 月累計最高的人可能完全合規，月累計最低的人反而因為近七日過度集中而超標，而所有時數都漂亮的人可能因為紅眼航班後接早班，休息差了三十分鐘。再加一層：目前合規不等於安全，還要看月底會不會超標。</a:t>
             </a:r>
             <a:endParaRPr lang="en-US" sz="1600" dirty="0"/>
           </a:p>
@@ -3614,7 +4374,7 @@
                 <a:ea typeface="Microsoft JhengHei" pitchFamily="34" charset="-122"/>
                 <a:cs typeface="Microsoft JhengHei" pitchFamily="34" charset="-120"/>
               </a:rPr>
-              <a:t>提示詞有兩個關鍵要求。</a:t>
+              <a:t>同樣不要上傳檔案。</a:t>
             </a:r>
             <a:endParaRPr lang="en-US" sz="1300" dirty="0"/>
           </a:p>
@@ -3761,7 +4521,7 @@
                 <a:ea typeface="Microsoft JhengHei" pitchFamily="34" charset="-122"/>
                 <a:cs typeface="Microsoft JhengHei" pitchFamily="34" charset="-120"/>
               </a:rPr>
-              <a:t>四筆結果值得逐條看，因為每一條都在示範一種不同的誤判。</a:t>
+              <a:t>等它跑完四個維度的檢查，逐條對照下面四筆結果。</a:t>
             </a:r>
             <a:endParaRPr lang="en-US" sz="1300" dirty="0"/>
           </a:p>
@@ -3908,7 +4668,7 @@
                 <a:ea typeface="Microsoft JhengHei" pitchFamily="34" charset="-122"/>
                 <a:cs typeface="Microsoft JhengHei" pitchFamily="34" charset="-120"/>
               </a:rPr>
-              <a:t>這一點是整個情境最值得帶走的。</a:t>
+              <a:t>特別回頭看第四個維度「單日執勤時數」，注意它是怎麼回答的。</a:t>
             </a:r>
             <a:endParaRPr lang="en-US" sz="1300" dirty="0"/>
           </a:p>
@@ -4118,7 +4878,7 @@
                 <a:ea typeface="Microsoft JhengHei" pitchFamily="34" charset="-122"/>
                 <a:cs typeface="Microsoft JhengHei" pitchFamily="34" charset="-120"/>
               </a:rPr>
-              <a:t>9</a:t>
+              <a:t>10</a:t>
             </a:r>
             <a:endParaRPr lang="en-US" sz="900" dirty="0"/>
           </a:p>
@@ -4132,9 +4892,9 @@
 </p:sld>
 </file>
 
-<file path=ppt/slides/slide11.xml><?xml version="1.0" encoding="utf-8"?>
+<file path=ppt/slides/slide12.xml><?xml version="1.0" encoding="utf-8"?>
 <p:sld xmlns:a="http://schemas.openxmlformats.org/drawingml/2006/main" xmlns:r="http://schemas.openxmlformats.org/officeDocument/2006/relationships" xmlns:p="http://schemas.openxmlformats.org/presentationml/2006/main">
-  <p:cSld name="Slide 11">
+  <p:cSld name="Slide 12">
     <p:bg>
       <p:bgPr>
         <a:solidFill>
@@ -4694,7 +5454,7 @@
                 <a:ea typeface="Microsoft JhengHei" pitchFamily="34" charset="-122"/>
                 <a:cs typeface="Microsoft JhengHei" pitchFamily="34" charset="-120"/>
               </a:rPr>
-              <a:t>10</a:t>
+              <a:t>11</a:t>
             </a:r>
             <a:endParaRPr lang="en-US" sz="900" dirty="0"/>
           </a:p>
@@ -4708,9 +5468,9 @@
 </p:sld>
 </file>
 
-<file path=ppt/slides/slide12.xml><?xml version="1.0" encoding="utf-8"?>
+<file path=ppt/slides/slide13.xml><?xml version="1.0" encoding="utf-8"?>
 <p:sld xmlns:a="http://schemas.openxmlformats.org/drawingml/2006/main" xmlns:r="http://schemas.openxmlformats.org/officeDocument/2006/relationships" xmlns:p="http://schemas.openxmlformats.org/presentationml/2006/main">
-  <p:cSld name="Slide 12">
+  <p:cSld name="Slide 13">
     <p:bg>
       <p:bgPr>
         <a:solidFill>
@@ -5252,7 +6012,7 @@
                 <a:ea typeface="Microsoft JhengHei" pitchFamily="34" charset="-122"/>
                 <a:cs typeface="Microsoft JhengHei" pitchFamily="34" charset="-120"/>
               </a:rPr>
-              <a:t>前面的觸發任務都是收信啟動，這一個換了觸發源：**在 Teams 被 @提及**。而事件本身是全教材最容易判錯的一個 —— 通報寫著「輕微擦撞、無人受傷」，聽起來可以當場結案，但只要航機有實體損傷，最低就是應通報主管機關的等級。更關鍵的是：**這件事真正的嚴重性，不在這則訊息裡** —— 要回頭查同一架飛機近九十天的紀錄才看得出來。</a:t>
+              <a:t>前面的觸發任務都是收信啟動，這一個換了觸發源：在 Teams 被 @提及。而事件本身是全教材最容易判錯的一個 —— 通報寫著「輕微擦撞、無人受傷」，聽起來可以當場結案，但只要航機有實體損傷，最低就是應通報主管機關的等級。更關鍵的是：這件事真正的嚴重性，不在這則訊息裡 —— 要回頭查同一架飛機近九十天的紀錄才看得出來。</a:t>
             </a:r>
             <a:endParaRPr lang="en-US" sz="1600" dirty="0"/>
           </a:p>
@@ -5438,7 +6198,7 @@
                 <a:ea typeface="Microsoft JhengHei" pitchFamily="34" charset="-122"/>
                 <a:cs typeface="Microsoft JhengHei" pitchFamily="34" charset="-120"/>
               </a:rPr>
-              <a:t>這一步會遇到一個**設計上必須先知道的限制**：Teams 的 @提及觸發**無法整個 Teams 全域監看…</a:t>
+              <a:t>課前請先在 Teams 建好要監看的頻道（本例為「機坪安全通報」），再送出下面的提示詞建立事件觸發任務。</a:t>
             </a:r>
             <a:endParaRPr lang="en-US" sz="1300" dirty="0"/>
           </a:p>
@@ -5585,7 +6345,7 @@
                 <a:ea typeface="Microsoft JhengHei" pitchFamily="34" charset="-122"/>
                 <a:cs typeface="Microsoft JhengHei" pitchFamily="34" charset="-120"/>
               </a:rPr>
-              <a:t>觸發器建立後，設定卡會顯示觸發類型是「Teams 頻道訊息送達」…</a:t>
+              <a:t>檢查觸發器的設定卡，確認觸發類型與待命狀態。</a:t>
             </a:r>
             <a:endParaRPr lang="en-US" sz="1300" dirty="0"/>
           </a:p>
@@ -5732,7 +6492,7 @@
                 <a:ea typeface="Microsoft JhengHei" pitchFamily="34" charset="-122"/>
                 <a:cs typeface="Microsoft JhengHei" pitchFamily="34" charset="-120"/>
               </a:rPr>
-              <a:t>這是本情境的核心，判定分兩段，兩個陷阱都避開了。</a:t>
+              <a:t>觸發後不要下任何指令，等它自己跑完，再讀它的分級判定。</a:t>
             </a:r>
             <a:endParaRPr lang="en-US" sz="1300" dirty="0"/>
           </a:p>
@@ -5942,7 +6702,7 @@
                 <a:ea typeface="Microsoft JhengHei" pitchFamily="34" charset="-122"/>
                 <a:cs typeface="Microsoft JhengHei" pitchFamily="34" charset="-120"/>
               </a:rPr>
-              <a:t>11</a:t>
+              <a:t>12</a:t>
             </a:r>
             <a:endParaRPr lang="en-US" sz="900" dirty="0"/>
           </a:p>
@@ -5956,9 +6716,9 @@
 </p:sld>
 </file>
 
-<file path=ppt/slides/slide13.xml><?xml version="1.0" encoding="utf-8"?>
+<file path=ppt/slides/slide14.xml><?xml version="1.0" encoding="utf-8"?>
 <p:sld xmlns:a="http://schemas.openxmlformats.org/drawingml/2006/main" xmlns:r="http://schemas.openxmlformats.org/officeDocument/2006/relationships" xmlns:p="http://schemas.openxmlformats.org/presentationml/2006/main">
-  <p:cSld name="Slide 13">
+  <p:cSld name="Slide 14">
     <p:bg>
       <p:bgPr>
         <a:solidFill>
@@ -6613,7 +7373,7 @@
                 <a:ea typeface="Microsoft JhengHei" pitchFamily="34" charset="-122"/>
                 <a:cs typeface="Microsoft JhengHei" pitchFamily="34" charset="-120"/>
               </a:rPr>
-              <a:t>12</a:t>
+              <a:t>13</a:t>
             </a:r>
             <a:endParaRPr lang="en-US" sz="900" dirty="0"/>
           </a:p>
@@ -6627,9 +7387,9 @@
 </p:sld>
 </file>
 
-<file path=ppt/slides/slide14.xml><?xml version="1.0" encoding="utf-8"?>
+<file path=ppt/slides/slide15.xml><?xml version="1.0" encoding="utf-8"?>
 <p:sld xmlns:a="http://schemas.openxmlformats.org/drawingml/2006/main" xmlns:r="http://schemas.openxmlformats.org/officeDocument/2006/relationships" xmlns:p="http://schemas.openxmlformats.org/presentationml/2006/main">
-  <p:cSld name="Slide 14">
+  <p:cSld name="Slide 15">
     <p:bg>
       <p:bgPr>
         <a:solidFill>
@@ -7110,7 +7870,7 @@
                 <a:ea typeface="Microsoft JhengHei" pitchFamily="34" charset="-122"/>
                 <a:cs typeface="Microsoft JhengHei" pitchFamily="34" charset="-120"/>
               </a:rPr>
-              <a:t>前面所有情境的產出都是文字、信件或分析報告；這一個**真的生出一份簡報**，而且套用公司品牌範本 —— 主題色、字型、Logo、版面配置全部繼承，Cowork 只改寫文字內容，不動設計。至於分析本身，這個情境要示範一件反直覺的事：**營收最高的航線，往往不是最賺錢的那條。**</a:t>
+              <a:t>前面所有情境的產出都是文字、信件或分析報告；這一個真的生出一份簡報，而且套用公司品牌範本 —— 主題色、字型、Logo、版面配置全部繼承，Cowork 只改寫文字內容，不動設計。至於分析本身，這個情境要示範一件反直覺的事：營收最高的航線，往往不是最賺錢的那條。</a:t>
             </a:r>
             <a:endParaRPr lang="en-US" sz="1600" dirty="0"/>
           </a:p>
@@ -7296,7 +8056,7 @@
                 <a:ea typeface="Microsoft JhengHei" pitchFamily="34" charset="-122"/>
                 <a:cs typeface="Microsoft JhengHei" pitchFamily="34" charset="-120"/>
               </a:rPr>
-              <a:t>這是本情境唯一需要事前確認的環境設定：**個人品牌範本的 .potx 只能放 OneDrive 的根目錄…</a:t>
+              <a:t>送出提示詞前，先確認 華翔航空_簡報範本.potx 放在 OneDrive 根目錄，不是任何子資料夾。</a:t>
             </a:r>
             <a:endParaRPr lang="en-US" sz="1300" dirty="0"/>
           </a:p>
@@ -7443,7 +8203,7 @@
                 <a:ea typeface="Microsoft JhengHei" pitchFamily="34" charset="-122"/>
                 <a:cs typeface="Microsoft JhengHei" pitchFamily="34" charset="-120"/>
               </a:rPr>
-              <a:t>三個結論值得逐條看。</a:t>
+              <a:t>打開產出的簡報，翻到並列營收排行與獲利排行的第四頁，對照下面三個結論。</a:t>
             </a:r>
             <a:endParaRPr lang="en-US" sz="1300" dirty="0"/>
           </a:p>
@@ -7590,7 +8350,7 @@
                 <a:ea typeface="Microsoft JhengHei" pitchFamily="34" charset="-122"/>
                 <a:cs typeface="Microsoft JhengHei" pitchFamily="34" charset="-120"/>
               </a:rPr>
-              <a:t>請實際打開 OneDrive 裡的簡報檔，不要只看對話裡的摘要。</a:t>
+              <a:t>到 OneDrive 實際打開簡報檔，走一遍下面三個檢查點。</a:t>
             </a:r>
             <a:endParaRPr lang="en-US" sz="1300" dirty="0"/>
           </a:p>
@@ -7800,7 +8560,7 @@
                 <a:ea typeface="Microsoft JhengHei" pitchFamily="34" charset="-122"/>
                 <a:cs typeface="Microsoft JhengHei" pitchFamily="34" charset="-120"/>
               </a:rPr>
-              <a:t>13</a:t>
+              <a:t>14</a:t>
             </a:r>
             <a:endParaRPr lang="en-US" sz="900" dirty="0"/>
           </a:p>
@@ -7814,9 +8574,9 @@
 </p:sld>
 </file>
 
-<file path=ppt/slides/slide15.xml><?xml version="1.0" encoding="utf-8"?>
+<file path=ppt/slides/slide16.xml><?xml version="1.0" encoding="utf-8"?>
 <p:sld xmlns:a="http://schemas.openxmlformats.org/drawingml/2006/main" xmlns:r="http://schemas.openxmlformats.org/officeDocument/2006/relationships" xmlns:p="http://schemas.openxmlformats.org/presentationml/2006/main">
-  <p:cSld name="Slide 15">
+  <p:cSld name="Slide 16">
     <p:bg>
       <p:bgPr>
         <a:solidFill>
@@ -8376,7 +9136,7 @@
                 <a:ea typeface="Microsoft JhengHei" pitchFamily="34" charset="-122"/>
                 <a:cs typeface="Microsoft JhengHei" pitchFamily="34" charset="-120"/>
               </a:rPr>
-              <a:t>14</a:t>
+              <a:t>15</a:t>
             </a:r>
             <a:endParaRPr lang="en-US" sz="900" dirty="0"/>
           </a:p>
@@ -8390,9 +9150,9 @@
 </p:sld>
 </file>
 
-<file path=ppt/slides/slide16.xml><?xml version="1.0" encoding="utf-8"?>
+<file path=ppt/slides/slide17.xml><?xml version="1.0" encoding="utf-8"?>
 <p:sld xmlns:a="http://schemas.openxmlformats.org/drawingml/2006/main" xmlns:r="http://schemas.openxmlformats.org/officeDocument/2006/relationships" xmlns:p="http://schemas.openxmlformats.org/presentationml/2006/main">
-  <p:cSld name="Slide 16">
+  <p:cSld name="Slide 17">
     <p:bg>
       <p:bgPr>
         <a:solidFill>
@@ -8812,7 +9572,7 @@
                 <a:ea typeface="Microsoft JhengHei" pitchFamily="34" charset="-122"/>
                 <a:cs typeface="Microsoft JhengHei" pitchFamily="34" charset="-120"/>
               </a:rPr>
-              <a:t>把 AIR3 的機坪安全判定寫成自訂技能。但安全領域的技能和一般技能有個根本差異：一般技能出錯只是產出品質不好，安全技能出錯是**把應該通報的事件當場結案**。所以這個情境的重點不在觸發詞寫得漂不漂亮，而在**防護欄夠不夠硬** —— 哪些情況下它必須拒絕自己下判斷、把事情交回給人。</a:t>
+              <a:t>把 AIR3 的機坪安全判定寫成自訂技能。但安全領域的技能和一般技能有個根本差異：一般技能出錯只是產出品質不好，安全技能出錯是把應該通報的事件當場結案。所以這個情境的重點不在觸發詞寫得漂不漂亮，而在防護欄夠不夠硬 —— 哪些情況下它必須拒絕自己下判斷、把事情交回給人。</a:t>
             </a:r>
             <a:endParaRPr lang="en-US" sz="1600" dirty="0"/>
           </a:p>
@@ -8998,7 +9758,7 @@
                 <a:ea typeface="Microsoft JhengHei" pitchFamily="34" charset="-122"/>
                 <a:cs typeface="Microsoft JhengHei" pitchFamily="34" charset="-120"/>
               </a:rPr>
-              <a:t>這個提示詞和 TEL5 的差別在重心。</a:t>
+              <a:t>送出下面的提示詞建立技能。</a:t>
             </a:r>
             <a:endParaRPr lang="en-US" sz="1300" dirty="0"/>
           </a:p>
@@ -9145,7 +9905,7 @@
                 <a:ea typeface="Microsoft JhengHei" pitchFamily="34" charset="-122"/>
                 <a:cs typeface="Microsoft JhengHei" pitchFamily="34" charset="-120"/>
               </a:rPr>
-              <a:t>這個技能可以拿到 **89 分（Excellent）**，四條紅線都完整寫入。</a:t>
+              <a:t>技能建立後打開技能報告，把整份評分與理由讀完。</a:t>
             </a:r>
             <a:endParaRPr lang="en-US" sz="1300" dirty="0"/>
           </a:p>
@@ -9292,7 +10052,7 @@
                 <a:ea typeface="Microsoft JhengHei" pitchFamily="34" charset="-122"/>
                 <a:cs typeface="Microsoft JhengHei" pitchFamily="34" charset="-120"/>
               </a:rPr>
-              <a:t>這個技能的 scope 邊界寫得很完整，值得對照學習：飛航中事件…</a:t>
+              <a:t>回到技能內容，檢視 scope 邊界那一段是怎麼寫的。</a:t>
             </a:r>
             <a:endParaRPr lang="en-US" sz="1300" dirty="0"/>
           </a:p>
@@ -9497,582 +10257,6 @@
               <a:rPr lang="en-US" sz="900" dirty="0">
                 <a:solidFill>
                   <a:srgbClr val="8A8FB5"/>
-                </a:solidFill>
-                <a:latin typeface="Microsoft JhengHei" pitchFamily="34" charset="0"/>
-                <a:ea typeface="Microsoft JhengHei" pitchFamily="34" charset="-122"/>
-                <a:cs typeface="Microsoft JhengHei" pitchFamily="34" charset="-120"/>
-              </a:rPr>
-              <a:t>15</a:t>
-            </a:r>
-            <a:endParaRPr lang="en-US" sz="900" dirty="0"/>
-          </a:p>
-        </p:txBody>
-      </p:sp>
-    </p:spTree>
-  </p:cSld>
-  <p:clrMapOvr>
-    <a:masterClrMapping/>
-  </p:clrMapOvr>
-</p:sld>
-</file>
-
-<file path=ppt/slides/slide17.xml><?xml version="1.0" encoding="utf-8"?>
-<p:sld xmlns:a="http://schemas.openxmlformats.org/drawingml/2006/main" xmlns:r="http://schemas.openxmlformats.org/officeDocument/2006/relationships" xmlns:p="http://schemas.openxmlformats.org/presentationml/2006/main">
-  <p:cSld name="Slide 17">
-    <p:bg>
-      <p:bgPr>
-        <a:solidFill>
-          <a:srgbClr val="F7F8FC"/>
-        </a:solidFill>
-      </p:bgPr>
-    </p:bg>
-    <p:spTree>
-      <p:nvGrpSpPr>
-        <p:cNvPr id="1" name=""/>
-        <p:cNvGrpSpPr/>
-        <p:nvPr/>
-      </p:nvGrpSpPr>
-      <p:grpSpPr>
-        <a:xfrm>
-          <a:off x="0" y="0"/>
-          <a:ext cx="0" cy="0"/>
-          <a:chOff x="0" y="0"/>
-          <a:chExt cx="0" cy="0"/>
-        </a:xfrm>
-      </p:grpSpPr>
-      <p:sp>
-        <p:nvSpPr>
-          <p:cNvPr id="2" name="Shape 0"/>
-          <p:cNvSpPr/>
-          <p:nvPr/>
-        </p:nvSpPr>
-        <p:spPr>
-          <a:xfrm>
-            <a:off x="640080" y="566928"/>
-            <a:ext cx="384048" cy="128016"/>
-          </a:xfrm>
-          <a:prstGeom prst="rect">
-            <a:avLst/>
-          </a:prstGeom>
-          <a:solidFill>
-            <a:srgbClr val="5C2E91"/>
-          </a:solidFill>
-          <a:ln/>
-        </p:spPr>
-      </p:sp>
-      <p:sp>
-        <p:nvSpPr>
-          <p:cNvPr id="3" name="Text 1"/>
-          <p:cNvSpPr/>
-          <p:nvPr/>
-        </p:nvSpPr>
-        <p:spPr>
-          <a:xfrm>
-            <a:off x="1143000" y="457200"/>
-            <a:ext cx="8229600" cy="310896"/>
-          </a:xfrm>
-          <a:prstGeom prst="rect">
-            <a:avLst/>
-          </a:prstGeom>
-          <a:noFill/>
-          <a:ln/>
-        </p:spPr>
-        <p:txBody>
-          <a:bodyPr wrap="square" rtlCol="0" anchor="ctr"/>
-          <a:lstStyle/>
-          <a:p>
-            <a:pPr indent="0" marL="0">
-              <a:buNone/>
-            </a:pPr>
-            <a:r>
-              <a:rPr lang="en-US" sz="1200" b="1" spc="200" kern="0" dirty="0">
-                <a:solidFill>
-                  <a:srgbClr val="5C2E91"/>
-                </a:solidFill>
-                <a:latin typeface="Microsoft JhengHei" pitchFamily="34" charset="0"/>
-                <a:ea typeface="Microsoft JhengHei" pitchFamily="34" charset="-122"/>
-                <a:cs typeface="Microsoft JhengHei" pitchFamily="34" charset="-120"/>
-              </a:rPr>
-              <a:t>情境 05 · 實機示範</a:t>
-            </a:r>
-            <a:endParaRPr lang="en-US" sz="1200" dirty="0"/>
-          </a:p>
-        </p:txBody>
-      </p:sp>
-      <p:sp>
-        <p:nvSpPr>
-          <p:cNvPr id="4" name="Text 2"/>
-          <p:cNvSpPr/>
-          <p:nvPr/>
-        </p:nvSpPr>
-        <p:spPr>
-          <a:xfrm>
-            <a:off x="640080" y="786384"/>
-            <a:ext cx="10972800" cy="640080"/>
-          </a:xfrm>
-          <a:prstGeom prst="rect">
-            <a:avLst/>
-          </a:prstGeom>
-          <a:noFill/>
-          <a:ln/>
-        </p:spPr>
-        <p:txBody>
-          <a:bodyPr wrap="square" rtlCol="0" anchor="ctr"/>
-          <a:lstStyle/>
-          <a:p>
-            <a:pPr indent="0" marL="0">
-              <a:buNone/>
-            </a:pPr>
-            <a:r>
-              <a:rPr lang="en-US" sz="3000" b="1" dirty="0">
-                <a:solidFill>
-                  <a:srgbClr val="1E2235"/>
-                </a:solidFill>
-                <a:latin typeface="Microsoft JhengHei" pitchFamily="34" charset="0"/>
-                <a:ea typeface="Microsoft JhengHei" pitchFamily="34" charset="-122"/>
-                <a:cs typeface="Microsoft JhengHei" pitchFamily="34" charset="-120"/>
-              </a:rPr>
-              <a:t>看 Cowork 怎麼做、產出什麼</a:t>
-            </a:r>
-            <a:endParaRPr lang="en-US" sz="3000" dirty="0"/>
-          </a:p>
-        </p:txBody>
-      </p:sp>
-      <p:sp>
-        <p:nvSpPr>
-          <p:cNvPr id="5" name="Shape 3"/>
-          <p:cNvSpPr/>
-          <p:nvPr/>
-        </p:nvSpPr>
-        <p:spPr>
-          <a:xfrm>
-            <a:off x="585216" y="1773936"/>
-            <a:ext cx="5184648" cy="3433186"/>
-          </a:xfrm>
-          <a:prstGeom prst="rect">
-            <a:avLst/>
-          </a:prstGeom>
-          <a:solidFill>
-            <a:srgbClr val="FFFFFF"/>
-          </a:solidFill>
-          <a:ln w="12700">
-            <a:solidFill>
-              <a:srgbClr val="E4E7F2"/>
-            </a:solidFill>
-            <a:prstDash val="solid"/>
-          </a:ln>
-          <a:effectLst>
-            <a:outerShdw sx="100000" sy="100000" kx="0" ky="0" algn="bl" rotWithShape="0" blurRad="114300" dist="38100" dir="5400000">
-              <a:srgbClr val="8A90B5">
-                <a:alpha val="22000"/>
-              </a:srgbClr>
-            </a:outerShdw>
-          </a:effectLst>
-        </p:spPr>
-      </p:sp>
-      <p:pic>
-        <p:nvPicPr>
-          <p:cNvPr id="6" name="Image 0" descr="C:\temp\CoworkLab\v2\_working\screenshots\air5_01_safety_redlines.png">    </p:cNvPr>
-          <p:cNvPicPr>
-            <a:picLocks noChangeAspect="1"/>
-          </p:cNvPicPr>
-          <p:nvPr/>
-        </p:nvPicPr>
-        <p:blipFill>
-          <a:blip r:embed="rId1"/>
-          <a:stretch>
-            <a:fillRect/>
-          </a:stretch>
-        </p:blipFill>
-        <p:spPr>
-          <a:xfrm>
-            <a:off x="640080" y="1828800"/>
-            <a:ext cx="5074920" cy="3323458"/>
-          </a:xfrm>
-          <a:prstGeom prst="rect">
-            <a:avLst/>
-          </a:prstGeom>
-        </p:spPr>
-      </p:pic>
-      <p:sp>
-        <p:nvSpPr>
-          <p:cNvPr id="7" name="Text 4"/>
-          <p:cNvSpPr/>
-          <p:nvPr/>
-        </p:nvSpPr>
-        <p:spPr>
-          <a:xfrm>
-            <a:off x="640080" y="5261986"/>
-            <a:ext cx="5074920" cy="320040"/>
-          </a:xfrm>
-          <a:prstGeom prst="rect">
-            <a:avLst/>
-          </a:prstGeom>
-          <a:noFill/>
-          <a:ln/>
-        </p:spPr>
-        <p:txBody>
-          <a:bodyPr wrap="square" rtlCol="0" anchor="ctr"/>
-          <a:lstStyle/>
-          <a:p>
-            <a:pPr algn="ctr" indent="0" marL="0">
-              <a:buNone/>
-            </a:pPr>
-            <a:r>
-              <a:rPr lang="en-US" sz="1350" b="1" dirty="0">
-                <a:solidFill>
-                  <a:srgbClr val="5C2E91"/>
-                </a:solidFill>
-                <a:latin typeface="Microsoft JhengHei" pitchFamily="34" charset="0"/>
-                <a:ea typeface="Microsoft JhengHei" pitchFamily="34" charset="-122"/>
-                <a:cs typeface="Microsoft JhengHei" pitchFamily="34" charset="-120"/>
-              </a:rPr>
-              <a:t>① 你的輸入與指令</a:t>
-            </a:r>
-            <a:endParaRPr lang="en-US" sz="1350" dirty="0"/>
-          </a:p>
-        </p:txBody>
-      </p:sp>
-      <p:sp>
-        <p:nvSpPr>
-          <p:cNvPr id="8" name="Shape 5"/>
-          <p:cNvSpPr/>
-          <p:nvPr/>
-        </p:nvSpPr>
-        <p:spPr>
-          <a:xfrm>
-            <a:off x="640080" y="5074920"/>
-            <a:ext cx="10911535" cy="1143000"/>
-          </a:xfrm>
-          <a:prstGeom prst="rect">
-            <a:avLst/>
-          </a:prstGeom>
-          <a:solidFill>
-            <a:srgbClr val="FFFFFF"/>
-          </a:solidFill>
-          <a:ln w="12700">
-            <a:solidFill>
-              <a:srgbClr val="E4E7F2"/>
-            </a:solidFill>
-            <a:prstDash val="solid"/>
-          </a:ln>
-        </p:spPr>
-      </p:sp>
-      <p:sp>
-        <p:nvSpPr>
-          <p:cNvPr id="9" name="Shape 6"/>
-          <p:cNvSpPr/>
-          <p:nvPr/>
-        </p:nvSpPr>
-        <p:spPr>
-          <a:xfrm>
-            <a:off x="640080" y="5074920"/>
-            <a:ext cx="91440" cy="1143000"/>
-          </a:xfrm>
-          <a:prstGeom prst="rect">
-            <a:avLst/>
-          </a:prstGeom>
-          <a:solidFill>
-            <a:srgbClr val="5C2E91"/>
-          </a:solidFill>
-          <a:ln/>
-        </p:spPr>
-      </p:sp>
-      <p:sp>
-        <p:nvSpPr>
-          <p:cNvPr id="10" name="Text 7"/>
-          <p:cNvSpPr/>
-          <p:nvPr/>
-        </p:nvSpPr>
-        <p:spPr>
-          <a:xfrm>
-            <a:off x="914400" y="5184648"/>
-            <a:ext cx="1828800" cy="320040"/>
-          </a:xfrm>
-          <a:prstGeom prst="rect">
-            <a:avLst/>
-          </a:prstGeom>
-          <a:noFill/>
-          <a:ln/>
-        </p:spPr>
-        <p:txBody>
-          <a:bodyPr wrap="square" rtlCol="0" anchor="ctr"/>
-          <a:lstStyle/>
-          <a:p>
-            <a:pPr indent="0" marL="0">
-              <a:buNone/>
-            </a:pPr>
-            <a:r>
-              <a:rPr lang="en-US" sz="1400" b="1" dirty="0">
-                <a:solidFill>
-                  <a:srgbClr val="1E2235"/>
-                </a:solidFill>
-                <a:latin typeface="Microsoft JhengHei" pitchFamily="34" charset="0"/>
-                <a:ea typeface="Microsoft JhengHei" pitchFamily="34" charset="-122"/>
-                <a:cs typeface="Microsoft JhengHei" pitchFamily="34" charset="-120"/>
-              </a:rPr>
-              <a:t>產出驗收</a:t>
-            </a:r>
-            <a:endParaRPr lang="en-US" sz="1400" dirty="0"/>
-          </a:p>
-        </p:txBody>
-      </p:sp>
-      <p:pic>
-        <p:nvPicPr>
-          <p:cNvPr id="11" name="Image 1" descr="preencoded.png">    </p:cNvPr>
-          <p:cNvPicPr>
-            <a:picLocks noChangeAspect="1"/>
-          </p:cNvPicPr>
-          <p:nvPr/>
-        </p:nvPicPr>
-        <p:blipFill>
-          <a:blip r:embed="rId2"/>
-          <a:stretch>
-            <a:fillRect/>
-          </a:stretch>
-        </p:blipFill>
-        <p:spPr>
-          <a:xfrm>
-            <a:off x="2834640" y="5221224"/>
-            <a:ext cx="182880" cy="182880"/>
-          </a:xfrm>
-          <a:prstGeom prst="rect">
-            <a:avLst/>
-          </a:prstGeom>
-        </p:spPr>
-      </p:pic>
-      <p:sp>
-        <p:nvSpPr>
-          <p:cNvPr id="12" name="Text 8"/>
-          <p:cNvSpPr/>
-          <p:nvPr/>
-        </p:nvSpPr>
-        <p:spPr>
-          <a:xfrm>
-            <a:off x="3108960" y="5166360"/>
-            <a:ext cx="8168335" cy="310896"/>
-          </a:xfrm>
-          <a:prstGeom prst="rect">
-            <a:avLst/>
-          </a:prstGeom>
-          <a:noFill/>
-          <a:ln/>
-        </p:spPr>
-        <p:txBody>
-          <a:bodyPr wrap="square" rtlCol="0" anchor="ctr"/>
-          <a:lstStyle/>
-          <a:p>
-            <a:pPr indent="0" marL="0">
-              <a:buNone/>
-            </a:pPr>
-            <a:r>
-              <a:rPr lang="en-US" sz="1300" dirty="0">
-                <a:solidFill>
-                  <a:srgbClr val="1E2235"/>
-                </a:solidFill>
-                <a:latin typeface="Microsoft JhengHei" pitchFamily="34" charset="0"/>
-                <a:ea typeface="Microsoft JhengHei" pitchFamily="34" charset="-122"/>
-                <a:cs typeface="Microsoft JhengHei" pitchFamily="34" charset="-120"/>
-              </a:rPr>
-              <a:t>SKILL.md 有 YAML frontmatter，name 與 description 兩個欄位都存在</a:t>
-            </a:r>
-            <a:endParaRPr lang="en-US" sz="1300" dirty="0"/>
-          </a:p>
-        </p:txBody>
-      </p:sp>
-      <p:pic>
-        <p:nvPicPr>
-          <p:cNvPr id="13" name="Image 2" descr="preencoded.png">    </p:cNvPr>
-          <p:cNvPicPr>
-            <a:picLocks noChangeAspect="1"/>
-          </p:cNvPicPr>
-          <p:nvPr/>
-        </p:nvPicPr>
-        <p:blipFill>
-          <a:blip r:embed="rId3"/>
-          <a:stretch>
-            <a:fillRect/>
-          </a:stretch>
-        </p:blipFill>
-        <p:spPr>
-          <a:xfrm>
-            <a:off x="2834640" y="5559552"/>
-            <a:ext cx="182880" cy="182880"/>
-          </a:xfrm>
-          <a:prstGeom prst="rect">
-            <a:avLst/>
-          </a:prstGeom>
-        </p:spPr>
-      </p:pic>
-      <p:sp>
-        <p:nvSpPr>
-          <p:cNvPr id="14" name="Text 9"/>
-          <p:cNvSpPr/>
-          <p:nvPr/>
-        </p:nvSpPr>
-        <p:spPr>
-          <a:xfrm>
-            <a:off x="3108960" y="5504688"/>
-            <a:ext cx="8168335" cy="310896"/>
-          </a:xfrm>
-          <a:prstGeom prst="rect">
-            <a:avLst/>
-          </a:prstGeom>
-          <a:noFill/>
-          <a:ln/>
-        </p:spPr>
-        <p:txBody>
-          <a:bodyPr wrap="square" rtlCol="0" anchor="ctr"/>
-          <a:lstStyle/>
-          <a:p>
-            <a:pPr indent="0" marL="0">
-              <a:buNone/>
-            </a:pPr>
-            <a:r>
-              <a:rPr lang="en-US" sz="1300" dirty="0">
-                <a:solidFill>
-                  <a:srgbClr val="1E2235"/>
-                </a:solidFill>
-                <a:latin typeface="Microsoft JhengHei" pitchFamily="34" charset="0"/>
-                <a:ea typeface="Microsoft JhengHei" pitchFamily="34" charset="-122"/>
-                <a:cs typeface="Microsoft JhengHei" pitchFamily="34" charset="-120"/>
-              </a:rPr>
-              <a:t>「航機有損傷一律 C 級起跳、不得降判」有明確寫進技能</a:t>
-            </a:r>
-            <a:endParaRPr lang="en-US" sz="1300" dirty="0"/>
-          </a:p>
-        </p:txBody>
-      </p:sp>
-      <p:pic>
-        <p:nvPicPr>
-          <p:cNvPr id="15" name="Image 3" descr="preencoded.png">    </p:cNvPr>
-          <p:cNvPicPr>
-            <a:picLocks noChangeAspect="1"/>
-          </p:cNvPicPr>
-          <p:nvPr/>
-        </p:nvPicPr>
-        <p:blipFill>
-          <a:blip r:embed="rId4"/>
-          <a:stretch>
-            <a:fillRect/>
-          </a:stretch>
-        </p:blipFill>
-        <p:spPr>
-          <a:xfrm>
-            <a:off x="2834640" y="5897880"/>
-            <a:ext cx="182880" cy="182880"/>
-          </a:xfrm>
-          <a:prstGeom prst="rect">
-            <a:avLst/>
-          </a:prstGeom>
-        </p:spPr>
-      </p:pic>
-      <p:sp>
-        <p:nvSpPr>
-          <p:cNvPr id="16" name="Text 10"/>
-          <p:cNvSpPr/>
-          <p:nvPr/>
-        </p:nvSpPr>
-        <p:spPr>
-          <a:xfrm>
-            <a:off x="3108960" y="5843016"/>
-            <a:ext cx="8168335" cy="310896"/>
-          </a:xfrm>
-          <a:prstGeom prst="rect">
-            <a:avLst/>
-          </a:prstGeom>
-          <a:noFill/>
-          <a:ln/>
-        </p:spPr>
-        <p:txBody>
-          <a:bodyPr wrap="square" rtlCol="0" anchor="ctr"/>
-          <a:lstStyle/>
-          <a:p>
-            <a:pPr indent="0" marL="0">
-              <a:buNone/>
-            </a:pPr>
-            <a:r>
-              <a:rPr lang="en-US" sz="1300" dirty="0">
-                <a:solidFill>
-                  <a:srgbClr val="1E2235"/>
-                </a:solidFill>
-                <a:latin typeface="Microsoft JhengHei" pitchFamily="34" charset="0"/>
-                <a:ea typeface="Microsoft JhengHei" pitchFamily="34" charset="-122"/>
-                <a:cs typeface="Microsoft JhengHei" pitchFamily="34" charset="-120"/>
-              </a:rPr>
-              <a:t>「必查同機尾號近 90 天，即使 0 件也要寫出」有明確寫進技能</a:t>
-            </a:r>
-            <a:endParaRPr lang="en-US" sz="1300" dirty="0"/>
-          </a:p>
-        </p:txBody>
-      </p:sp>
-      <p:sp>
-        <p:nvSpPr>
-          <p:cNvPr id="17" name="Text 11"/>
-          <p:cNvSpPr/>
-          <p:nvPr/>
-        </p:nvSpPr>
-        <p:spPr>
-          <a:xfrm>
-            <a:off x="640080" y="6473952"/>
-            <a:ext cx="5486400" cy="274320"/>
-          </a:xfrm>
-          <a:prstGeom prst="rect">
-            <a:avLst/>
-          </a:prstGeom>
-          <a:noFill/>
-          <a:ln/>
-        </p:spPr>
-        <p:txBody>
-          <a:bodyPr wrap="square" rtlCol="0" anchor="ctr"/>
-          <a:lstStyle/>
-          <a:p>
-            <a:pPr algn="l" indent="0" marL="0">
-              <a:buNone/>
-            </a:pPr>
-            <a:r>
-              <a:rPr lang="en-US" sz="900" dirty="0">
-                <a:solidFill>
-                  <a:srgbClr val="5B6079"/>
-                </a:solidFill>
-                <a:latin typeface="Microsoft JhengHei" pitchFamily="34" charset="0"/>
-                <a:ea typeface="Microsoft JhengHei" pitchFamily="34" charset="-122"/>
-                <a:cs typeface="Microsoft JhengHei" pitchFamily="34" charset="-120"/>
-              </a:rPr>
-              <a:t>Microsoft 365 Copilot Cowork</a:t>
-            </a:r>
-            <a:endParaRPr lang="en-US" sz="900" dirty="0"/>
-          </a:p>
-        </p:txBody>
-      </p:sp>
-      <p:sp>
-        <p:nvSpPr>
-          <p:cNvPr id="18" name="Text 12"/>
-          <p:cNvSpPr/>
-          <p:nvPr/>
-        </p:nvSpPr>
-        <p:spPr>
-          <a:xfrm>
-            <a:off x="11002975" y="6473952"/>
-            <a:ext cx="548640" cy="274320"/>
-          </a:xfrm>
-          <a:prstGeom prst="rect">
-            <a:avLst/>
-          </a:prstGeom>
-          <a:noFill/>
-          <a:ln/>
-        </p:spPr>
-        <p:txBody>
-          <a:bodyPr wrap="square" rtlCol="0" anchor="ctr"/>
-          <a:lstStyle/>
-          <a:p>
-            <a:pPr algn="r" indent="0" marL="0">
-              <a:buNone/>
-            </a:pPr>
-            <a:r>
-              <a:rPr lang="en-US" sz="900" dirty="0">
-                <a:solidFill>
-                  <a:srgbClr val="5B6079"/>
                 </a:solidFill>
                 <a:latin typeface="Microsoft JhengHei" pitchFamily="34" charset="0"/>
                 <a:ea typeface="Microsoft JhengHei" pitchFamily="34" charset="-122"/>
@@ -10131,7 +10315,7 @@
             <a:avLst/>
           </a:prstGeom>
           <a:solidFill>
-            <a:srgbClr val="6366F1"/>
+            <a:srgbClr val="5C2E91"/>
           </a:solidFill>
           <a:ln/>
         </p:spPr>
@@ -10163,13 +10347,13 @@
             <a:r>
               <a:rPr lang="en-US" sz="1200" b="1" spc="200" kern="0" dirty="0">
                 <a:solidFill>
-                  <a:srgbClr val="6366F1"/>
-                </a:solidFill>
-                <a:latin typeface="Microsoft JhengHei" pitchFamily="34" charset="0"/>
-                <a:ea typeface="Microsoft JhengHei" pitchFamily="34" charset="-122"/>
-                <a:cs typeface="Microsoft JhengHei" pitchFamily="34" charset="-120"/>
-              </a:rPr>
-              <a:t>MAKE IT YOURS</a:t>
+                  <a:srgbClr val="5C2E91"/>
+                </a:solidFill>
+                <a:latin typeface="Microsoft JhengHei" pitchFamily="34" charset="0"/>
+                <a:ea typeface="Microsoft JhengHei" pitchFamily="34" charset="-122"/>
+                <a:cs typeface="Microsoft JhengHei" pitchFamily="34" charset="-120"/>
+              </a:rPr>
+              <a:t>情境 05 · 實機示範</a:t>
             </a:r>
             <a:endParaRPr lang="en-US" sz="1200" dirty="0"/>
           </a:p>
@@ -10208,7 +10392,7 @@
                 <a:ea typeface="Microsoft JhengHei" pitchFamily="34" charset="-122"/>
                 <a:cs typeface="Microsoft JhengHei" pitchFamily="34" charset="-120"/>
               </a:rPr>
-              <a:t>把情境延伸到你的日常</a:t>
+              <a:t>看 Cowork 怎麼做、產出什麼</a:t>
             </a:r>
             <a:endParaRPr lang="en-US" sz="3000" dirty="0"/>
           </a:p>
@@ -10222,8 +10406,8 @@
         </p:nvSpPr>
         <p:spPr>
           <a:xfrm>
-            <a:off x="640080" y="1783080"/>
-            <a:ext cx="10911535" cy="731520"/>
+            <a:off x="585216" y="1773936"/>
+            <a:ext cx="5184648" cy="3433186"/>
           </a:xfrm>
           <a:prstGeom prst="rect">
             <a:avLst/>
@@ -10237,38 +10421,88 @@
             </a:solidFill>
             <a:prstDash val="solid"/>
           </a:ln>
-        </p:spPr>
-      </p:sp>
-      <p:sp>
-        <p:nvSpPr>
-          <p:cNvPr id="6" name="Shape 4"/>
-          <p:cNvSpPr/>
-          <p:nvPr/>
-        </p:nvSpPr>
-        <p:spPr>
-          <a:xfrm>
-            <a:off x="841248" y="1929384"/>
-            <a:ext cx="438912" cy="438912"/>
-          </a:xfrm>
-          <a:prstGeom prst="ellipse">
-            <a:avLst/>
-          </a:prstGeom>
-          <a:solidFill>
-            <a:srgbClr val="0E2A47"/>
-          </a:solidFill>
-          <a:ln/>
-        </p:spPr>
-      </p:sp>
-      <p:sp>
-        <p:nvSpPr>
-          <p:cNvPr id="7" name="Shape 5"/>
-          <p:cNvSpPr/>
-          <p:nvPr/>
-        </p:nvSpPr>
-        <p:spPr>
-          <a:xfrm>
-            <a:off x="640080" y="2624328"/>
-            <a:ext cx="10911535" cy="731520"/>
+          <a:effectLst>
+            <a:outerShdw sx="100000" sy="100000" kx="0" ky="0" algn="bl" rotWithShape="0" blurRad="114300" dist="38100" dir="5400000">
+              <a:srgbClr val="8A90B5">
+                <a:alpha val="22000"/>
+              </a:srgbClr>
+            </a:outerShdw>
+          </a:effectLst>
+        </p:spPr>
+      </p:sp>
+      <p:pic>
+        <p:nvPicPr>
+          <p:cNvPr id="6" name="Image 0" descr="C:\temp\CoworkLab\v2\_working\screenshots\air5_01_safety_redlines.png">    </p:cNvPr>
+          <p:cNvPicPr>
+            <a:picLocks noChangeAspect="1"/>
+          </p:cNvPicPr>
+          <p:nvPr/>
+        </p:nvPicPr>
+        <p:blipFill>
+          <a:blip r:embed="rId1"/>
+          <a:stretch>
+            <a:fillRect/>
+          </a:stretch>
+        </p:blipFill>
+        <p:spPr>
+          <a:xfrm>
+            <a:off x="640080" y="1828800"/>
+            <a:ext cx="5074920" cy="3323458"/>
+          </a:xfrm>
+          <a:prstGeom prst="rect">
+            <a:avLst/>
+          </a:prstGeom>
+        </p:spPr>
+      </p:pic>
+      <p:sp>
+        <p:nvSpPr>
+          <p:cNvPr id="7" name="Text 4"/>
+          <p:cNvSpPr/>
+          <p:nvPr/>
+        </p:nvSpPr>
+        <p:spPr>
+          <a:xfrm>
+            <a:off x="640080" y="5261986"/>
+            <a:ext cx="5074920" cy="320040"/>
+          </a:xfrm>
+          <a:prstGeom prst="rect">
+            <a:avLst/>
+          </a:prstGeom>
+          <a:noFill/>
+          <a:ln/>
+        </p:spPr>
+        <p:txBody>
+          <a:bodyPr wrap="square" rtlCol="0" anchor="ctr"/>
+          <a:lstStyle/>
+          <a:p>
+            <a:pPr algn="ctr" indent="0" marL="0">
+              <a:buNone/>
+            </a:pPr>
+            <a:r>
+              <a:rPr lang="en-US" sz="1350" b="1" dirty="0">
+                <a:solidFill>
+                  <a:srgbClr val="5C2E91"/>
+                </a:solidFill>
+                <a:latin typeface="Microsoft JhengHei" pitchFamily="34" charset="0"/>
+                <a:ea typeface="Microsoft JhengHei" pitchFamily="34" charset="-122"/>
+                <a:cs typeface="Microsoft JhengHei" pitchFamily="34" charset="-120"/>
+              </a:rPr>
+              <a:t>① 你的輸入與指令</a:t>
+            </a:r>
+            <a:endParaRPr lang="en-US" sz="1350" dirty="0"/>
+          </a:p>
+        </p:txBody>
+      </p:sp>
+      <p:sp>
+        <p:nvSpPr>
+          <p:cNvPr id="8" name="Shape 5"/>
+          <p:cNvSpPr/>
+          <p:nvPr/>
+        </p:nvSpPr>
+        <p:spPr>
+          <a:xfrm>
+            <a:off x="640080" y="5074920"/>
+            <a:ext cx="10911535" cy="1143000"/>
           </a:xfrm>
           <a:prstGeom prst="rect">
             <a:avLst/>
@@ -10286,151 +10520,16 @@
       </p:sp>
       <p:sp>
         <p:nvSpPr>
-          <p:cNvPr id="8" name="Shape 6"/>
-          <p:cNvSpPr/>
-          <p:nvPr/>
-        </p:nvSpPr>
-        <p:spPr>
-          <a:xfrm>
-            <a:off x="841248" y="2770632"/>
-            <a:ext cx="438912" cy="438912"/>
-          </a:xfrm>
-          <a:prstGeom prst="ellipse">
-            <a:avLst/>
-          </a:prstGeom>
-          <a:solidFill>
-            <a:srgbClr val="0F7BAF"/>
-          </a:solidFill>
-          <a:ln/>
-        </p:spPr>
-      </p:sp>
-      <p:sp>
-        <p:nvSpPr>
-          <p:cNvPr id="9" name="Shape 7"/>
-          <p:cNvSpPr/>
-          <p:nvPr/>
-        </p:nvSpPr>
-        <p:spPr>
-          <a:xfrm>
-            <a:off x="640080" y="3465576"/>
-            <a:ext cx="10911535" cy="731520"/>
-          </a:xfrm>
-          <a:prstGeom prst="rect">
-            <a:avLst/>
-          </a:prstGeom>
-          <a:solidFill>
-            <a:srgbClr val="FFFFFF"/>
-          </a:solidFill>
-          <a:ln w="12700">
-            <a:solidFill>
-              <a:srgbClr val="E4E7F2"/>
-            </a:solidFill>
-            <a:prstDash val="solid"/>
-          </a:ln>
-        </p:spPr>
-      </p:sp>
-      <p:sp>
-        <p:nvSpPr>
-          <p:cNvPr id="10" name="Shape 8"/>
-          <p:cNvSpPr/>
-          <p:nvPr/>
-        </p:nvSpPr>
-        <p:spPr>
-          <a:xfrm>
-            <a:off x="841248" y="3611880"/>
-            <a:ext cx="438912" cy="438912"/>
-          </a:xfrm>
-          <a:prstGeom prst="ellipse">
-            <a:avLst/>
-          </a:prstGeom>
-          <a:solidFill>
-            <a:srgbClr val="B1420A"/>
-          </a:solidFill>
-          <a:ln/>
-        </p:spPr>
-      </p:sp>
-      <p:sp>
-        <p:nvSpPr>
-          <p:cNvPr id="11" name="Shape 9"/>
-          <p:cNvSpPr/>
-          <p:nvPr/>
-        </p:nvSpPr>
-        <p:spPr>
-          <a:xfrm>
-            <a:off x="640080" y="4306824"/>
-            <a:ext cx="10911535" cy="731520"/>
-          </a:xfrm>
-          <a:prstGeom prst="rect">
-            <a:avLst/>
-          </a:prstGeom>
-          <a:solidFill>
-            <a:srgbClr val="FFFFFF"/>
-          </a:solidFill>
-          <a:ln w="12700">
-            <a:solidFill>
-              <a:srgbClr val="E4E7F2"/>
-            </a:solidFill>
-            <a:prstDash val="solid"/>
-          </a:ln>
-        </p:spPr>
-      </p:sp>
-      <p:sp>
-        <p:nvSpPr>
-          <p:cNvPr id="12" name="Shape 10"/>
-          <p:cNvSpPr/>
-          <p:nvPr/>
-        </p:nvSpPr>
-        <p:spPr>
-          <a:xfrm>
-            <a:off x="841248" y="4453128"/>
-            <a:ext cx="438912" cy="438912"/>
-          </a:xfrm>
-          <a:prstGeom prst="ellipse">
-            <a:avLst/>
-          </a:prstGeom>
-          <a:solidFill>
-            <a:srgbClr val="C8952B"/>
-          </a:solidFill>
-          <a:ln/>
-        </p:spPr>
-      </p:sp>
-      <p:sp>
-        <p:nvSpPr>
-          <p:cNvPr id="13" name="Shape 11"/>
-          <p:cNvSpPr/>
-          <p:nvPr/>
-        </p:nvSpPr>
-        <p:spPr>
-          <a:xfrm>
-            <a:off x="640080" y="5148072"/>
-            <a:ext cx="10911535" cy="731520"/>
-          </a:xfrm>
-          <a:prstGeom prst="rect">
-            <a:avLst/>
-          </a:prstGeom>
-          <a:solidFill>
-            <a:srgbClr val="FFFFFF"/>
-          </a:solidFill>
-          <a:ln w="12700">
-            <a:solidFill>
-              <a:srgbClr val="E4E7F2"/>
-            </a:solidFill>
-            <a:prstDash val="solid"/>
-          </a:ln>
-        </p:spPr>
-      </p:sp>
-      <p:sp>
-        <p:nvSpPr>
-          <p:cNvPr id="14" name="Shape 12"/>
-          <p:cNvSpPr/>
-          <p:nvPr/>
-        </p:nvSpPr>
-        <p:spPr>
-          <a:xfrm>
-            <a:off x="841248" y="5294376"/>
-            <a:ext cx="438912" cy="438912"/>
-          </a:xfrm>
-          <a:prstGeom prst="ellipse">
+          <p:cNvPr id="9" name="Shape 6"/>
+          <p:cNvSpPr/>
+          <p:nvPr/>
+        </p:nvSpPr>
+        <p:spPr>
+          <a:xfrm>
+            <a:off x="640080" y="5074920"/>
+            <a:ext cx="91440" cy="1143000"/>
+          </a:xfrm>
+          <a:prstGeom prst="rect">
             <a:avLst/>
           </a:prstGeom>
           <a:solidFill>
@@ -10439,114 +10538,48 @@
           <a:ln/>
         </p:spPr>
       </p:sp>
+      <p:sp>
+        <p:nvSpPr>
+          <p:cNvPr id="10" name="Text 7"/>
+          <p:cNvSpPr/>
+          <p:nvPr/>
+        </p:nvSpPr>
+        <p:spPr>
+          <a:xfrm>
+            <a:off x="914400" y="5184648"/>
+            <a:ext cx="1828800" cy="320040"/>
+          </a:xfrm>
+          <a:prstGeom prst="rect">
+            <a:avLst/>
+          </a:prstGeom>
+          <a:noFill/>
+          <a:ln/>
+        </p:spPr>
+        <p:txBody>
+          <a:bodyPr wrap="square" rtlCol="0" anchor="ctr"/>
+          <a:lstStyle/>
+          <a:p>
+            <a:pPr indent="0" marL="0">
+              <a:buNone/>
+            </a:pPr>
+            <a:r>
+              <a:rPr lang="en-US" sz="1400" b="1" dirty="0">
+                <a:solidFill>
+                  <a:srgbClr val="1E2235"/>
+                </a:solidFill>
+                <a:latin typeface="Microsoft JhengHei" pitchFamily="34" charset="0"/>
+                <a:ea typeface="Microsoft JhengHei" pitchFamily="34" charset="-122"/>
+                <a:cs typeface="Microsoft JhengHei" pitchFamily="34" charset="-120"/>
+              </a:rPr>
+              <a:t>產出驗收</a:t>
+            </a:r>
+            <a:endParaRPr lang="en-US" sz="1400" dirty="0"/>
+          </a:p>
+        </p:txBody>
+      </p:sp>
       <p:pic>
         <p:nvPicPr>
-          <p:cNvPr id="15" name="Image 0" descr="preencoded.png">    </p:cNvPr>
-          <p:cNvPicPr>
-            <a:picLocks noChangeAspect="1"/>
-          </p:cNvPicPr>
-          <p:nvPr/>
-        </p:nvPicPr>
-        <p:blipFill>
-          <a:blip r:embed="rId1"/>
-          <a:stretch>
-            <a:fillRect/>
-          </a:stretch>
-        </p:blipFill>
-        <p:spPr>
-          <a:xfrm>
-            <a:off x="950976" y="2039112"/>
-            <a:ext cx="219456" cy="219456"/>
-          </a:xfrm>
-          <a:prstGeom prst="rect">
-            <a:avLst/>
-          </a:prstGeom>
-        </p:spPr>
-      </p:pic>
-      <p:sp>
-        <p:nvSpPr>
-          <p:cNvPr id="16" name="Text 13"/>
-          <p:cNvSpPr/>
-          <p:nvPr/>
-        </p:nvSpPr>
-        <p:spPr>
-          <a:xfrm>
-            <a:off x="1417320" y="1819656"/>
-            <a:ext cx="2182307" cy="658368"/>
-          </a:xfrm>
-          <a:prstGeom prst="rect">
-            <a:avLst/>
-          </a:prstGeom>
-          <a:noFill/>
-          <a:ln/>
-        </p:spPr>
-        <p:txBody>
-          <a:bodyPr wrap="square" rtlCol="0" anchor="ctr"/>
-          <a:lstStyle/>
-          <a:p>
-            <a:pPr indent="0" marL="0">
-              <a:buNone/>
-            </a:pPr>
-            <a:r>
-              <a:rPr lang="en-US" sz="1400" b="1" dirty="0">
-                <a:solidFill>
-                  <a:srgbClr val="0E2A47"/>
-                </a:solidFill>
-                <a:latin typeface="Microsoft JhengHei" pitchFamily="34" charset="0"/>
-                <a:ea typeface="Microsoft JhengHei" pitchFamily="34" charset="-122"/>
-                <a:cs typeface="Microsoft JhengHei" pitchFamily="34" charset="-120"/>
-              </a:rPr>
-              <a:t>航空業 · 聯管中心</a:t>
-            </a:r>
-            <a:endParaRPr lang="en-US" sz="1400" dirty="0"/>
-          </a:p>
-        </p:txBody>
-      </p:sp>
-      <p:sp>
-        <p:nvSpPr>
-          <p:cNvPr id="17" name="Text 14"/>
-          <p:cNvSpPr/>
-          <p:nvPr/>
-        </p:nvSpPr>
-        <p:spPr>
-          <a:xfrm>
-            <a:off x="3586195" y="1819656"/>
-            <a:ext cx="7747190" cy="658368"/>
-          </a:xfrm>
-          <a:prstGeom prst="rect">
-            <a:avLst/>
-          </a:prstGeom>
-          <a:noFill/>
-          <a:ln/>
-        </p:spPr>
-        <p:txBody>
-          <a:bodyPr wrap="square" rtlCol="0" anchor="ctr"/>
-          <a:lstStyle/>
-          <a:p>
-            <a:pPr indent="0" marL="0">
-              <a:lnSpc>
-                <a:spcPct val="108000"/>
-              </a:lnSpc>
-              <a:buNone/>
-            </a:pPr>
-            <a:r>
-              <a:rPr lang="en-US" sz="1350" dirty="0">
-                <a:solidFill>
-                  <a:srgbClr val="1E2235"/>
-                </a:solidFill>
-                <a:latin typeface="Microsoft JhengHei" pitchFamily="34" charset="0"/>
-                <a:ea typeface="Microsoft JhengHei" pitchFamily="34" charset="-122"/>
-                <a:cs typeface="Microsoft JhengHei" pitchFamily="34" charset="-120"/>
-              </a:rPr>
-              <a:t>💡 把原則裡的四級改成你們自己的旅客照護分級，測試同一套流程。</a:t>
-            </a:r>
-            <a:endParaRPr lang="en-US" sz="1350" dirty="0"/>
-          </a:p>
-        </p:txBody>
-      </p:sp>
-      <p:pic>
-        <p:nvPicPr>
-          <p:cNvPr id="18" name="Image 1" descr="preencoded.png">    </p:cNvPr>
+          <p:cNvPr id="11" name="Image 1" descr="preencoded.png">    </p:cNvPr>
           <p:cNvPicPr>
             <a:picLocks noChangeAspect="1"/>
           </p:cNvPicPr>
@@ -10560,8 +10593,8 @@
         </p:blipFill>
         <p:spPr>
           <a:xfrm>
-            <a:off x="950976" y="2880360"/>
-            <a:ext cx="219456" cy="219456"/>
+            <a:off x="2834640" y="5221224"/>
+            <a:ext cx="182880" cy="182880"/>
           </a:xfrm>
           <a:prstGeom prst="rect">
             <a:avLst/>
@@ -10570,14 +10603,14 @@
       </p:pic>
       <p:sp>
         <p:nvSpPr>
-          <p:cNvPr id="19" name="Text 15"/>
-          <p:cNvSpPr/>
-          <p:nvPr/>
-        </p:nvSpPr>
-        <p:spPr>
-          <a:xfrm>
-            <a:off x="1417320" y="2660904"/>
-            <a:ext cx="2182307" cy="658368"/>
+          <p:cNvPr id="12" name="Text 8"/>
+          <p:cNvSpPr/>
+          <p:nvPr/>
+        </p:nvSpPr>
+        <p:spPr>
+          <a:xfrm>
+            <a:off x="3108960" y="5166360"/>
+            <a:ext cx="8168335" cy="310896"/>
           </a:xfrm>
           <a:prstGeom prst="rect">
             <a:avLst/>
@@ -10593,49 +10626,7 @@
               <a:buNone/>
             </a:pPr>
             <a:r>
-              <a:rPr lang="en-US" sz="1400" b="1" dirty="0">
-                <a:solidFill>
-                  <a:srgbClr val="0F7BAF"/>
-                </a:solidFill>
-                <a:latin typeface="Microsoft JhengHei" pitchFamily="34" charset="0"/>
-                <a:ea typeface="Microsoft JhengHei" pitchFamily="34" charset="-122"/>
-                <a:cs typeface="Microsoft JhengHei" pitchFamily="34" charset="-120"/>
-              </a:rPr>
-              <a:t>航空業 · 組員派遣</a:t>
-            </a:r>
-            <a:endParaRPr lang="en-US" sz="1400" dirty="0"/>
-          </a:p>
-        </p:txBody>
-      </p:sp>
-      <p:sp>
-        <p:nvSpPr>
-          <p:cNvPr id="20" name="Text 16"/>
-          <p:cNvSpPr/>
-          <p:nvPr/>
-        </p:nvSpPr>
-        <p:spPr>
-          <a:xfrm>
-            <a:off x="3586195" y="2660904"/>
-            <a:ext cx="7747190" cy="658368"/>
-          </a:xfrm>
-          <a:prstGeom prst="rect">
-            <a:avLst/>
-          </a:prstGeom>
-          <a:noFill/>
-          <a:ln/>
-        </p:spPr>
-        <p:txBody>
-          <a:bodyPr wrap="square" rtlCol="0" anchor="ctr"/>
-          <a:lstStyle/>
-          <a:p>
-            <a:pPr indent="0" marL="0">
-              <a:lnSpc>
-                <a:spcPct val="108000"/>
-              </a:lnSpc>
-              <a:buNone/>
-            </a:pPr>
-            <a:r>
-              <a:rPr lang="en-US" sz="1350" dirty="0">
+              <a:rPr lang="en-US" sz="1300" dirty="0">
                 <a:solidFill>
                   <a:srgbClr val="1E2235"/>
                 </a:solidFill>
@@ -10643,15 +10634,15 @@
                 <a:ea typeface="Microsoft JhengHei" pitchFamily="34" charset="-122"/>
                 <a:cs typeface="Microsoft JhengHei" pitchFamily="34" charset="-120"/>
               </a:rPr>
-              <a:t>💡 把上限值改成你們適用的法規或公司政策，只改規則文件。</a:t>
-            </a:r>
-            <a:endParaRPr lang="en-US" sz="1350" dirty="0"/>
+              <a:t>SKILL.md 有 YAML frontmatter，name 與 description 兩個欄位都存在</a:t>
+            </a:r>
+            <a:endParaRPr lang="en-US" sz="1300" dirty="0"/>
           </a:p>
         </p:txBody>
       </p:sp>
       <p:pic>
         <p:nvPicPr>
-          <p:cNvPr id="21" name="Image 2" descr="preencoded.png">    </p:cNvPr>
+          <p:cNvPr id="13" name="Image 2" descr="preencoded.png">    </p:cNvPr>
           <p:cNvPicPr>
             <a:picLocks noChangeAspect="1"/>
           </p:cNvPicPr>
@@ -10665,8 +10656,8 @@
         </p:blipFill>
         <p:spPr>
           <a:xfrm>
-            <a:off x="950976" y="3721608"/>
-            <a:ext cx="219456" cy="219456"/>
+            <a:off x="2834640" y="5559552"/>
+            <a:ext cx="182880" cy="182880"/>
           </a:xfrm>
           <a:prstGeom prst="rect">
             <a:avLst/>
@@ -10675,14 +10666,14 @@
       </p:pic>
       <p:sp>
         <p:nvSpPr>
-          <p:cNvPr id="22" name="Text 17"/>
-          <p:cNvSpPr/>
-          <p:nvPr/>
-        </p:nvSpPr>
-        <p:spPr>
-          <a:xfrm>
-            <a:off x="1417320" y="3502152"/>
-            <a:ext cx="2182307" cy="658368"/>
+          <p:cNvPr id="14" name="Text 9"/>
+          <p:cNvSpPr/>
+          <p:nvPr/>
+        </p:nvSpPr>
+        <p:spPr>
+          <a:xfrm>
+            <a:off x="3108960" y="5504688"/>
+            <a:ext cx="8168335" cy="310896"/>
           </a:xfrm>
           <a:prstGeom prst="rect">
             <a:avLst/>
@@ -10698,49 +10689,7 @@
               <a:buNone/>
             </a:pPr>
             <a:r>
-              <a:rPr lang="en-US" sz="1400" b="1" dirty="0">
-                <a:solidFill>
-                  <a:srgbClr val="B1420A"/>
-                </a:solidFill>
-                <a:latin typeface="Microsoft JhengHei" pitchFamily="34" charset="0"/>
-                <a:ea typeface="Microsoft JhengHei" pitchFamily="34" charset="-122"/>
-                <a:cs typeface="Microsoft JhengHei" pitchFamily="34" charset="-120"/>
-              </a:rPr>
-              <a:t>航空業 · 機坪安全</a:t>
-            </a:r>
-            <a:endParaRPr lang="en-US" sz="1400" dirty="0"/>
-          </a:p>
-        </p:txBody>
-      </p:sp>
-      <p:sp>
-        <p:nvSpPr>
-          <p:cNvPr id="23" name="Text 18"/>
-          <p:cNvSpPr/>
-          <p:nvPr/>
-        </p:nvSpPr>
-        <p:spPr>
-          <a:xfrm>
-            <a:off x="3586195" y="3502152"/>
-            <a:ext cx="7747190" cy="658368"/>
-          </a:xfrm>
-          <a:prstGeom prst="rect">
-            <a:avLst/>
-          </a:prstGeom>
-          <a:noFill/>
-          <a:ln/>
-        </p:spPr>
-        <p:txBody>
-          <a:bodyPr wrap="square" rtlCol="0" anchor="ctr"/>
-          <a:lstStyle/>
-          <a:p>
-            <a:pPr indent="0" marL="0">
-              <a:lnSpc>
-                <a:spcPct val="108000"/>
-              </a:lnSpc>
-              <a:buNone/>
-            </a:pPr>
-            <a:r>
-              <a:rPr lang="en-US" sz="1350" dirty="0">
+              <a:rPr lang="en-US" sz="1300" dirty="0">
                 <a:solidFill>
                   <a:srgbClr val="1E2235"/>
                 </a:solidFill>
@@ -10748,15 +10697,15 @@
                 <a:ea typeface="Microsoft JhengHei" pitchFamily="34" charset="-122"/>
                 <a:cs typeface="Microsoft JhengHei" pitchFamily="34" charset="-120"/>
               </a:rPr>
-              <a:t>💡 把分級標準換成你們的地安事件分級表，測試同一套流程。</a:t>
-            </a:r>
-            <a:endParaRPr lang="en-US" sz="1350" dirty="0"/>
+              <a:t>「航機有損傷一律 C 級起跳、不得降判」有明確寫進技能</a:t>
+            </a:r>
+            <a:endParaRPr lang="en-US" sz="1300" dirty="0"/>
           </a:p>
         </p:txBody>
       </p:sp>
       <p:pic>
         <p:nvPicPr>
-          <p:cNvPr id="24" name="Image 3" descr="preencoded.png">    </p:cNvPr>
+          <p:cNvPr id="15" name="Image 3" descr="preencoded.png">    </p:cNvPr>
           <p:cNvPicPr>
             <a:picLocks noChangeAspect="1"/>
           </p:cNvPicPr>
@@ -10770,8 +10719,8 @@
         </p:blipFill>
         <p:spPr>
           <a:xfrm>
-            <a:off x="950976" y="4562856"/>
-            <a:ext cx="219456" cy="219456"/>
+            <a:off x="2834640" y="5897880"/>
+            <a:ext cx="182880" cy="182880"/>
           </a:xfrm>
           <a:prstGeom prst="rect">
             <a:avLst/>
@@ -10780,14 +10729,14 @@
       </p:pic>
       <p:sp>
         <p:nvSpPr>
-          <p:cNvPr id="25" name="Text 19"/>
-          <p:cNvSpPr/>
-          <p:nvPr/>
-        </p:nvSpPr>
-        <p:spPr>
-          <a:xfrm>
-            <a:off x="1417320" y="4343400"/>
-            <a:ext cx="2182307" cy="658368"/>
+          <p:cNvPr id="16" name="Text 10"/>
+          <p:cNvSpPr/>
+          <p:nvPr/>
+        </p:nvSpPr>
+        <p:spPr>
+          <a:xfrm>
+            <a:off x="3108960" y="5843016"/>
+            <a:ext cx="8168335" cy="310896"/>
           </a:xfrm>
           <a:prstGeom prst="rect">
             <a:avLst/>
@@ -10803,49 +10752,7 @@
               <a:buNone/>
             </a:pPr>
             <a:r>
-              <a:rPr lang="en-US" sz="1400" b="1" dirty="0">
-                <a:solidFill>
-                  <a:srgbClr val="C8952B"/>
-                </a:solidFill>
-                <a:latin typeface="Microsoft JhengHei" pitchFamily="34" charset="0"/>
-                <a:ea typeface="Microsoft JhengHei" pitchFamily="34" charset="-122"/>
-                <a:cs typeface="Microsoft JhengHei" pitchFamily="34" charset="-120"/>
-              </a:rPr>
-              <a:t>航空業 · 航線規劃</a:t>
-            </a:r>
-            <a:endParaRPr lang="en-US" sz="1400" dirty="0"/>
-          </a:p>
-        </p:txBody>
-      </p:sp>
-      <p:sp>
-        <p:nvSpPr>
-          <p:cNvPr id="26" name="Text 20"/>
-          <p:cNvSpPr/>
-          <p:nvPr/>
-        </p:nvSpPr>
-        <p:spPr>
-          <a:xfrm>
-            <a:off x="3586195" y="4343400"/>
-            <a:ext cx="7747190" cy="658368"/>
-          </a:xfrm>
-          <a:prstGeom prst="rect">
-            <a:avLst/>
-          </a:prstGeom>
-          <a:noFill/>
-          <a:ln/>
-        </p:spPr>
-        <p:txBody>
-          <a:bodyPr wrap="square" rtlCol="0" anchor="ctr"/>
-          <a:lstStyle/>
-          <a:p>
-            <a:pPr indent="0" marL="0">
-              <a:lnSpc>
-                <a:spcPct val="108000"/>
-              </a:lnSpc>
-              <a:buNone/>
-            </a:pPr>
-            <a:r>
-              <a:rPr lang="en-US" sz="1350" dirty="0">
+              <a:rPr lang="en-US" sz="1300" dirty="0">
                 <a:solidFill>
                   <a:srgbClr val="1E2235"/>
                 </a:solidFill>
@@ -10853,120 +10760,15 @@
                 <a:ea typeface="Microsoft JhengHei" pitchFamily="34" charset="-122"/>
                 <a:cs typeface="Microsoft JhengHei" pitchFamily="34" charset="-120"/>
               </a:rPr>
-              <a:t>💡 換成你們公司的 .potx 品牌範本，確認品牌元素有正確繼承。</a:t>
-            </a:r>
-            <a:endParaRPr lang="en-US" sz="1350" dirty="0"/>
-          </a:p>
-        </p:txBody>
-      </p:sp>
-      <p:pic>
-        <p:nvPicPr>
-          <p:cNvPr id="27" name="Image 4" descr="preencoded.png">    </p:cNvPr>
-          <p:cNvPicPr>
-            <a:picLocks noChangeAspect="1"/>
-          </p:cNvPicPr>
-          <p:nvPr/>
-        </p:nvPicPr>
-        <p:blipFill>
-          <a:blip r:embed="rId5"/>
-          <a:stretch>
-            <a:fillRect/>
-          </a:stretch>
-        </p:blipFill>
-        <p:spPr>
-          <a:xfrm>
-            <a:off x="950976" y="5404104"/>
-            <a:ext cx="219456" cy="219456"/>
-          </a:xfrm>
-          <a:prstGeom prst="rect">
-            <a:avLst/>
-          </a:prstGeom>
-        </p:spPr>
-      </p:pic>
-      <p:sp>
-        <p:nvSpPr>
-          <p:cNvPr id="28" name="Text 21"/>
-          <p:cNvSpPr/>
-          <p:nvPr/>
-        </p:nvSpPr>
-        <p:spPr>
-          <a:xfrm>
-            <a:off x="1417320" y="5184648"/>
-            <a:ext cx="2182307" cy="658368"/>
-          </a:xfrm>
-          <a:prstGeom prst="rect">
-            <a:avLst/>
-          </a:prstGeom>
-          <a:noFill/>
-          <a:ln/>
-        </p:spPr>
-        <p:txBody>
-          <a:bodyPr wrap="square" rtlCol="0" anchor="ctr"/>
-          <a:lstStyle/>
-          <a:p>
-            <a:pPr indent="0" marL="0">
-              <a:buNone/>
-            </a:pPr>
-            <a:r>
-              <a:rPr lang="en-US" sz="1400" b="1" dirty="0">
-                <a:solidFill>
-                  <a:srgbClr val="5C2E91"/>
-                </a:solidFill>
-                <a:latin typeface="Microsoft JhengHei" pitchFamily="34" charset="0"/>
-                <a:ea typeface="Microsoft JhengHei" pitchFamily="34" charset="-122"/>
-                <a:cs typeface="Microsoft JhengHei" pitchFamily="34" charset="-120"/>
-              </a:rPr>
-              <a:t>航空業 · 自訂技能</a:t>
-            </a:r>
-            <a:endParaRPr lang="en-US" sz="1400" dirty="0"/>
-          </a:p>
-        </p:txBody>
-      </p:sp>
-      <p:sp>
-        <p:nvSpPr>
-          <p:cNvPr id="29" name="Text 22"/>
-          <p:cNvSpPr/>
-          <p:nvPr/>
-        </p:nvSpPr>
-        <p:spPr>
-          <a:xfrm>
-            <a:off x="3586195" y="5184648"/>
-            <a:ext cx="7747190" cy="658368"/>
-          </a:xfrm>
-          <a:prstGeom prst="rect">
-            <a:avLst/>
-          </a:prstGeom>
-          <a:noFill/>
-          <a:ln/>
-        </p:spPr>
-        <p:txBody>
-          <a:bodyPr wrap="square" rtlCol="0" anchor="ctr"/>
-          <a:lstStyle/>
-          <a:p>
-            <a:pPr indent="0" marL="0">
-              <a:lnSpc>
-                <a:spcPct val="108000"/>
-              </a:lnSpc>
-              <a:buNone/>
-            </a:pPr>
-            <a:r>
-              <a:rPr lang="en-US" sz="1350" dirty="0">
-                <a:solidFill>
-                  <a:srgbClr val="1E2235"/>
-                </a:solidFill>
-                <a:latin typeface="Microsoft JhengHei" pitchFamily="34" charset="0"/>
-                <a:ea typeface="Microsoft JhengHei" pitchFamily="34" charset="-122"/>
-                <a:cs typeface="Microsoft JhengHei" pitchFamily="34" charset="-120"/>
-              </a:rPr>
-              <a:t>💡 故意提供一則沒有機尾號的事件，確認它真的會停下來要求補件。</a:t>
-            </a:r>
-            <a:endParaRPr lang="en-US" sz="1350" dirty="0"/>
-          </a:p>
-        </p:txBody>
-      </p:sp>
-      <p:sp>
-        <p:nvSpPr>
-          <p:cNvPr id="30" name="Text 23"/>
+              <a:t>「必查同機尾號近 90 天，即使 0 件也要寫出」有明確寫進技能</a:t>
+            </a:r>
+            <a:endParaRPr lang="en-US" sz="1300" dirty="0"/>
+          </a:p>
+        </p:txBody>
+      </p:sp>
+      <p:sp>
+        <p:nvSpPr>
+          <p:cNvPr id="17" name="Text 11"/>
           <p:cNvSpPr/>
           <p:nvPr/>
         </p:nvSpPr>
@@ -11005,7 +10807,7 @@
       </p:sp>
       <p:sp>
         <p:nvSpPr>
-          <p:cNvPr id="31" name="Text 24"/>
+          <p:cNvPr id="18" name="Text 12"/>
           <p:cNvSpPr/>
           <p:nvPr/>
         </p:nvSpPr>
@@ -11055,16 +10857,9 @@
   <p:cSld name="Slide 19">
     <p:bg>
       <p:bgPr>
-        <a:blipFill dpi="0" rotWithShape="1">
-          <a:blip r:embed="rId1">
-            <a:lum/>
-          </a:blip>
-          <a:srcRect/>
-          <a:stretch>
-            <a:fillRect/>
-          </a:stretch>
-        </a:blipFill>
-        <a:effectLst/>
+        <a:solidFill>
+          <a:srgbClr val="F7F8FC"/>
+        </a:solidFill>
       </p:bgPr>
     </p:bg>
     <p:spTree>
@@ -11096,7 +10891,7 @@
             <a:avLst/>
           </a:prstGeom>
           <a:solidFill>
-            <a:srgbClr val="22D3EE"/>
+            <a:srgbClr val="6366F1"/>
           </a:solidFill>
           <a:ln/>
         </p:spPr>
@@ -11128,13 +10923,13 @@
             <a:r>
               <a:rPr lang="en-US" sz="1200" b="1" spc="200" kern="0" dirty="0">
                 <a:solidFill>
-                  <a:srgbClr val="22D3EE"/>
-                </a:solidFill>
-                <a:latin typeface="Microsoft JhengHei" pitchFamily="34" charset="0"/>
-                <a:ea typeface="Microsoft JhengHei" pitchFamily="34" charset="-122"/>
-                <a:cs typeface="Microsoft JhengHei" pitchFamily="34" charset="-120"/>
-              </a:rPr>
-              <a:t>TRUST &amp; CONTROL</a:t>
+                  <a:srgbClr val="6366F1"/>
+                </a:solidFill>
+                <a:latin typeface="Microsoft JhengHei" pitchFamily="34" charset="0"/>
+                <a:ea typeface="Microsoft JhengHei" pitchFamily="34" charset="-122"/>
+                <a:cs typeface="Microsoft JhengHei" pitchFamily="34" charset="-120"/>
+              </a:rPr>
+              <a:t>MAKE IT YOURS</a:t>
             </a:r>
             <a:endParaRPr lang="en-US" sz="1200" dirty="0"/>
           </a:p>
@@ -11167,13 +10962,13 @@
             <a:r>
               <a:rPr lang="en-US" sz="3000" b="1" dirty="0">
                 <a:solidFill>
-                  <a:srgbClr val="FFFFFF"/>
-                </a:solidFill>
-                <a:latin typeface="Microsoft JhengHei" pitchFamily="34" charset="0"/>
-                <a:ea typeface="Microsoft JhengHei" pitchFamily="34" charset="-122"/>
-                <a:cs typeface="Microsoft JhengHei" pitchFamily="34" charset="-120"/>
-              </a:rPr>
-              <a:t>自動化，但你始終是決策者</a:t>
+                  <a:srgbClr val="1E2235"/>
+                </a:solidFill>
+                <a:latin typeface="Microsoft JhengHei" pitchFamily="34" charset="0"/>
+                <a:ea typeface="Microsoft JhengHei" pitchFamily="34" charset="-122"/>
+                <a:cs typeface="Microsoft JhengHei" pitchFamily="34" charset="-120"/>
+              </a:rPr>
+              <a:t>把情境延伸到你的日常</a:t>
             </a:r>
             <a:endParaRPr lang="en-US" sz="3000" dirty="0"/>
           </a:p>
@@ -11187,32 +10982,331 @@
         </p:nvSpPr>
         <p:spPr>
           <a:xfrm>
-            <a:off x="640080" y="1874520"/>
-            <a:ext cx="777240" cy="777240"/>
-          </a:xfrm>
-          <a:prstGeom prst="roundRect">
-            <a:avLst>
-              <a:gd name="adj" fmla="val 18824"/>
-            </a:avLst>
+            <a:off x="640080" y="1783080"/>
+            <a:ext cx="10911535" cy="731520"/>
+          </a:xfrm>
+          <a:prstGeom prst="rect">
+            <a:avLst/>
           </a:prstGeom>
           <a:solidFill>
-            <a:srgbClr val="FFFFFF">
-              <a:alpha val="14000"/>
-            </a:srgbClr>
+            <a:srgbClr val="FFFFFF"/>
           </a:solidFill>
           <a:ln w="12700">
             <a:solidFill>
-              <a:srgbClr val="22D3EE">
-                <a:alpha val="60000"/>
-              </a:srgbClr>
+              <a:srgbClr val="E4E7F2"/>
             </a:solidFill>
             <a:prstDash val="solid"/>
           </a:ln>
         </p:spPr>
       </p:sp>
+      <p:sp>
+        <p:nvSpPr>
+          <p:cNvPr id="6" name="Shape 4"/>
+          <p:cNvSpPr/>
+          <p:nvPr/>
+        </p:nvSpPr>
+        <p:spPr>
+          <a:xfrm>
+            <a:off x="841248" y="1929384"/>
+            <a:ext cx="438912" cy="438912"/>
+          </a:xfrm>
+          <a:prstGeom prst="ellipse">
+            <a:avLst/>
+          </a:prstGeom>
+          <a:solidFill>
+            <a:srgbClr val="0E2A47"/>
+          </a:solidFill>
+          <a:ln/>
+        </p:spPr>
+      </p:sp>
+      <p:sp>
+        <p:nvSpPr>
+          <p:cNvPr id="7" name="Shape 5"/>
+          <p:cNvSpPr/>
+          <p:nvPr/>
+        </p:nvSpPr>
+        <p:spPr>
+          <a:xfrm>
+            <a:off x="640080" y="2624328"/>
+            <a:ext cx="10911535" cy="731520"/>
+          </a:xfrm>
+          <a:prstGeom prst="rect">
+            <a:avLst/>
+          </a:prstGeom>
+          <a:solidFill>
+            <a:srgbClr val="FFFFFF"/>
+          </a:solidFill>
+          <a:ln w="12700">
+            <a:solidFill>
+              <a:srgbClr val="E4E7F2"/>
+            </a:solidFill>
+            <a:prstDash val="solid"/>
+          </a:ln>
+        </p:spPr>
+      </p:sp>
+      <p:sp>
+        <p:nvSpPr>
+          <p:cNvPr id="8" name="Shape 6"/>
+          <p:cNvSpPr/>
+          <p:nvPr/>
+        </p:nvSpPr>
+        <p:spPr>
+          <a:xfrm>
+            <a:off x="841248" y="2770632"/>
+            <a:ext cx="438912" cy="438912"/>
+          </a:xfrm>
+          <a:prstGeom prst="ellipse">
+            <a:avLst/>
+          </a:prstGeom>
+          <a:solidFill>
+            <a:srgbClr val="0F7BAF"/>
+          </a:solidFill>
+          <a:ln/>
+        </p:spPr>
+      </p:sp>
+      <p:sp>
+        <p:nvSpPr>
+          <p:cNvPr id="9" name="Shape 7"/>
+          <p:cNvSpPr/>
+          <p:nvPr/>
+        </p:nvSpPr>
+        <p:spPr>
+          <a:xfrm>
+            <a:off x="640080" y="3465576"/>
+            <a:ext cx="10911535" cy="731520"/>
+          </a:xfrm>
+          <a:prstGeom prst="rect">
+            <a:avLst/>
+          </a:prstGeom>
+          <a:solidFill>
+            <a:srgbClr val="FFFFFF"/>
+          </a:solidFill>
+          <a:ln w="12700">
+            <a:solidFill>
+              <a:srgbClr val="E4E7F2"/>
+            </a:solidFill>
+            <a:prstDash val="solid"/>
+          </a:ln>
+        </p:spPr>
+      </p:sp>
+      <p:sp>
+        <p:nvSpPr>
+          <p:cNvPr id="10" name="Shape 8"/>
+          <p:cNvSpPr/>
+          <p:nvPr/>
+        </p:nvSpPr>
+        <p:spPr>
+          <a:xfrm>
+            <a:off x="841248" y="3611880"/>
+            <a:ext cx="438912" cy="438912"/>
+          </a:xfrm>
+          <a:prstGeom prst="ellipse">
+            <a:avLst/>
+          </a:prstGeom>
+          <a:solidFill>
+            <a:srgbClr val="B1420A"/>
+          </a:solidFill>
+          <a:ln/>
+        </p:spPr>
+      </p:sp>
+      <p:sp>
+        <p:nvSpPr>
+          <p:cNvPr id="11" name="Shape 9"/>
+          <p:cNvSpPr/>
+          <p:nvPr/>
+        </p:nvSpPr>
+        <p:spPr>
+          <a:xfrm>
+            <a:off x="640080" y="4306824"/>
+            <a:ext cx="10911535" cy="731520"/>
+          </a:xfrm>
+          <a:prstGeom prst="rect">
+            <a:avLst/>
+          </a:prstGeom>
+          <a:solidFill>
+            <a:srgbClr val="FFFFFF"/>
+          </a:solidFill>
+          <a:ln w="12700">
+            <a:solidFill>
+              <a:srgbClr val="E4E7F2"/>
+            </a:solidFill>
+            <a:prstDash val="solid"/>
+          </a:ln>
+        </p:spPr>
+      </p:sp>
+      <p:sp>
+        <p:nvSpPr>
+          <p:cNvPr id="12" name="Shape 10"/>
+          <p:cNvSpPr/>
+          <p:nvPr/>
+        </p:nvSpPr>
+        <p:spPr>
+          <a:xfrm>
+            <a:off x="841248" y="4453128"/>
+            <a:ext cx="438912" cy="438912"/>
+          </a:xfrm>
+          <a:prstGeom prst="ellipse">
+            <a:avLst/>
+          </a:prstGeom>
+          <a:solidFill>
+            <a:srgbClr val="C8952B"/>
+          </a:solidFill>
+          <a:ln/>
+        </p:spPr>
+      </p:sp>
+      <p:sp>
+        <p:nvSpPr>
+          <p:cNvPr id="13" name="Shape 11"/>
+          <p:cNvSpPr/>
+          <p:nvPr/>
+        </p:nvSpPr>
+        <p:spPr>
+          <a:xfrm>
+            <a:off x="640080" y="5148072"/>
+            <a:ext cx="10911535" cy="731520"/>
+          </a:xfrm>
+          <a:prstGeom prst="rect">
+            <a:avLst/>
+          </a:prstGeom>
+          <a:solidFill>
+            <a:srgbClr val="FFFFFF"/>
+          </a:solidFill>
+          <a:ln w="12700">
+            <a:solidFill>
+              <a:srgbClr val="E4E7F2"/>
+            </a:solidFill>
+            <a:prstDash val="solid"/>
+          </a:ln>
+        </p:spPr>
+      </p:sp>
+      <p:sp>
+        <p:nvSpPr>
+          <p:cNvPr id="14" name="Shape 12"/>
+          <p:cNvSpPr/>
+          <p:nvPr/>
+        </p:nvSpPr>
+        <p:spPr>
+          <a:xfrm>
+            <a:off x="841248" y="5294376"/>
+            <a:ext cx="438912" cy="438912"/>
+          </a:xfrm>
+          <a:prstGeom prst="ellipse">
+            <a:avLst/>
+          </a:prstGeom>
+          <a:solidFill>
+            <a:srgbClr val="5C2E91"/>
+          </a:solidFill>
+          <a:ln/>
+        </p:spPr>
+      </p:sp>
       <p:pic>
         <p:nvPicPr>
-          <p:cNvPr id="6" name="Image 0" descr="preencoded.png">    </p:cNvPr>
+          <p:cNvPr id="15" name="Image 0" descr="preencoded.png">    </p:cNvPr>
+          <p:cNvPicPr>
+            <a:picLocks noChangeAspect="1"/>
+          </p:cNvPicPr>
+          <p:nvPr/>
+        </p:nvPicPr>
+        <p:blipFill>
+          <a:blip r:embed="rId1"/>
+          <a:stretch>
+            <a:fillRect/>
+          </a:stretch>
+        </p:blipFill>
+        <p:spPr>
+          <a:xfrm>
+            <a:off x="950976" y="2039112"/>
+            <a:ext cx="219456" cy="219456"/>
+          </a:xfrm>
+          <a:prstGeom prst="rect">
+            <a:avLst/>
+          </a:prstGeom>
+        </p:spPr>
+      </p:pic>
+      <p:sp>
+        <p:nvSpPr>
+          <p:cNvPr id="16" name="Text 13"/>
+          <p:cNvSpPr/>
+          <p:nvPr/>
+        </p:nvSpPr>
+        <p:spPr>
+          <a:xfrm>
+            <a:off x="1417320" y="1819656"/>
+            <a:ext cx="2182307" cy="658368"/>
+          </a:xfrm>
+          <a:prstGeom prst="rect">
+            <a:avLst/>
+          </a:prstGeom>
+          <a:noFill/>
+          <a:ln/>
+        </p:spPr>
+        <p:txBody>
+          <a:bodyPr wrap="square" rtlCol="0" anchor="ctr"/>
+          <a:lstStyle/>
+          <a:p>
+            <a:pPr indent="0" marL="0">
+              <a:buNone/>
+            </a:pPr>
+            <a:r>
+              <a:rPr lang="en-US" sz="1400" b="1" dirty="0">
+                <a:solidFill>
+                  <a:srgbClr val="0E2A47"/>
+                </a:solidFill>
+                <a:latin typeface="Microsoft JhengHei" pitchFamily="34" charset="0"/>
+                <a:ea typeface="Microsoft JhengHei" pitchFamily="34" charset="-122"/>
+                <a:cs typeface="Microsoft JhengHei" pitchFamily="34" charset="-120"/>
+              </a:rPr>
+              <a:t>航空業 · 聯管中心</a:t>
+            </a:r>
+            <a:endParaRPr lang="en-US" sz="1400" dirty="0"/>
+          </a:p>
+        </p:txBody>
+      </p:sp>
+      <p:sp>
+        <p:nvSpPr>
+          <p:cNvPr id="17" name="Text 14"/>
+          <p:cNvSpPr/>
+          <p:nvPr/>
+        </p:nvSpPr>
+        <p:spPr>
+          <a:xfrm>
+            <a:off x="3586195" y="1819656"/>
+            <a:ext cx="7747190" cy="658368"/>
+          </a:xfrm>
+          <a:prstGeom prst="rect">
+            <a:avLst/>
+          </a:prstGeom>
+          <a:noFill/>
+          <a:ln/>
+        </p:spPr>
+        <p:txBody>
+          <a:bodyPr wrap="square" rtlCol="0" anchor="ctr"/>
+          <a:lstStyle/>
+          <a:p>
+            <a:pPr indent="0" marL="0">
+              <a:lnSpc>
+                <a:spcPct val="108000"/>
+              </a:lnSpc>
+              <a:buNone/>
+            </a:pPr>
+            <a:r>
+              <a:rPr lang="en-US" sz="1350" dirty="0">
+                <a:solidFill>
+                  <a:srgbClr val="1E2235"/>
+                </a:solidFill>
+                <a:latin typeface="Microsoft JhengHei" pitchFamily="34" charset="0"/>
+                <a:ea typeface="Microsoft JhengHei" pitchFamily="34" charset="-122"/>
+                <a:cs typeface="Microsoft JhengHei" pitchFamily="34" charset="-120"/>
+              </a:rPr>
+              <a:t>💡 把原則裡的四級改成你們自己的旅客照護分級，測試同一套流程。</a:t>
+            </a:r>
+            <a:endParaRPr lang="en-US" sz="1350" dirty="0"/>
+          </a:p>
+        </p:txBody>
+      </p:sp>
+      <p:pic>
+        <p:nvPicPr>
+          <p:cNvPr id="18" name="Image 1" descr="preencoded.png">    </p:cNvPr>
           <p:cNvPicPr>
             <a:picLocks noChangeAspect="1"/>
           </p:cNvPicPr>
@@ -11226,8 +11320,8 @@
         </p:blipFill>
         <p:spPr>
           <a:xfrm>
-            <a:off x="804672" y="2039112"/>
-            <a:ext cx="448056" cy="448056"/>
+            <a:off x="950976" y="2880360"/>
+            <a:ext cx="219456" cy="219456"/>
           </a:xfrm>
           <a:prstGeom prst="rect">
             <a:avLst/>
@@ -11236,14 +11330,14 @@
       </p:pic>
       <p:sp>
         <p:nvSpPr>
-          <p:cNvPr id="7" name="Text 4"/>
-          <p:cNvSpPr/>
-          <p:nvPr/>
-        </p:nvSpPr>
-        <p:spPr>
-          <a:xfrm>
-            <a:off x="1691640" y="1856232"/>
-            <a:ext cx="6858000" cy="347472"/>
+          <p:cNvPr id="19" name="Text 15"/>
+          <p:cNvSpPr/>
+          <p:nvPr/>
+        </p:nvSpPr>
+        <p:spPr>
+          <a:xfrm>
+            <a:off x="1417320" y="2660904"/>
+            <a:ext cx="2182307" cy="658368"/>
           </a:xfrm>
           <a:prstGeom prst="rect">
             <a:avLst/>
@@ -11259,30 +11353,30 @@
               <a:buNone/>
             </a:pPr>
             <a:r>
-              <a:rPr lang="en-US" sz="1700" b="1" dirty="0">
-                <a:solidFill>
-                  <a:srgbClr val="FFFFFF"/>
-                </a:solidFill>
-                <a:latin typeface="Microsoft JhengHei" pitchFamily="34" charset="0"/>
-                <a:ea typeface="Microsoft JhengHei" pitchFamily="34" charset="-122"/>
-                <a:cs typeface="Microsoft JhengHei" pitchFamily="34" charset="-120"/>
-              </a:rPr>
-              <a:t>行動前審核</a:t>
-            </a:r>
-            <a:endParaRPr lang="en-US" sz="1700" dirty="0"/>
-          </a:p>
-        </p:txBody>
-      </p:sp>
-      <p:sp>
-        <p:nvSpPr>
-          <p:cNvPr id="8" name="Text 5"/>
-          <p:cNvSpPr/>
-          <p:nvPr/>
-        </p:nvSpPr>
-        <p:spPr>
-          <a:xfrm>
-            <a:off x="1691640" y="2203704"/>
-            <a:ext cx="9966960" cy="658368"/>
+              <a:rPr lang="en-US" sz="1400" b="1" dirty="0">
+                <a:solidFill>
+                  <a:srgbClr val="0F7BAF"/>
+                </a:solidFill>
+                <a:latin typeface="Microsoft JhengHei" pitchFamily="34" charset="0"/>
+                <a:ea typeface="Microsoft JhengHei" pitchFamily="34" charset="-122"/>
+                <a:cs typeface="Microsoft JhengHei" pitchFamily="34" charset="-120"/>
+              </a:rPr>
+              <a:t>航空業 · 組員派遣</a:t>
+            </a:r>
+            <a:endParaRPr lang="en-US" sz="1400" dirty="0"/>
+          </a:p>
+        </p:txBody>
+      </p:sp>
+      <p:sp>
+        <p:nvSpPr>
+          <p:cNvPr id="20" name="Text 16"/>
+          <p:cNvSpPr/>
+          <p:nvPr/>
+        </p:nvSpPr>
+        <p:spPr>
+          <a:xfrm>
+            <a:off x="3586195" y="2660904"/>
+            <a:ext cx="7747190" cy="658368"/>
           </a:xfrm>
           <a:prstGeom prst="rect">
             <a:avLst/>
@@ -11296,59 +11390,28 @@
           <a:p>
             <a:pPr indent="0" marL="0">
               <a:lnSpc>
-                <a:spcPct val="118000"/>
+                <a:spcPct val="108000"/>
               </a:lnSpc>
               <a:buNone/>
             </a:pPr>
             <a:r>
-              <a:rPr lang="en-US" sz="1300" dirty="0">
-                <a:solidFill>
-                  <a:srgbClr val="C7CAEC"/>
-                </a:solidFill>
-                <a:latin typeface="Microsoft JhengHei" pitchFamily="34" charset="0"/>
-                <a:ea typeface="Microsoft JhengHei" pitchFamily="34" charset="-122"/>
-                <a:cs typeface="Microsoft JhengHei" pitchFamily="34" charset="-120"/>
-              </a:rPr>
-              <a:t>中高風險動作會顯示 RISK-LEVEL；寄信、發 Teams、建立會議等動作先攤開可編輯預覽，核准後才送出。</a:t>
-            </a:r>
-            <a:endParaRPr lang="en-US" sz="1300" dirty="0"/>
-          </a:p>
-        </p:txBody>
-      </p:sp>
-      <p:sp>
-        <p:nvSpPr>
-          <p:cNvPr id="9" name="Shape 6"/>
-          <p:cNvSpPr/>
-          <p:nvPr/>
-        </p:nvSpPr>
-        <p:spPr>
-          <a:xfrm>
-            <a:off x="640080" y="3044952"/>
-            <a:ext cx="777240" cy="777240"/>
-          </a:xfrm>
-          <a:prstGeom prst="roundRect">
-            <a:avLst>
-              <a:gd name="adj" fmla="val 18824"/>
-            </a:avLst>
-          </a:prstGeom>
-          <a:solidFill>
-            <a:srgbClr val="FFFFFF">
-              <a:alpha val="14000"/>
-            </a:srgbClr>
-          </a:solidFill>
-          <a:ln w="12700">
-            <a:solidFill>
-              <a:srgbClr val="22D3EE">
-                <a:alpha val="60000"/>
-              </a:srgbClr>
-            </a:solidFill>
-            <a:prstDash val="solid"/>
-          </a:ln>
-        </p:spPr>
+              <a:rPr lang="en-US" sz="1350" dirty="0">
+                <a:solidFill>
+                  <a:srgbClr val="1E2235"/>
+                </a:solidFill>
+                <a:latin typeface="Microsoft JhengHei" pitchFamily="34" charset="0"/>
+                <a:ea typeface="Microsoft JhengHei" pitchFamily="34" charset="-122"/>
+                <a:cs typeface="Microsoft JhengHei" pitchFamily="34" charset="-120"/>
+              </a:rPr>
+              <a:t>💡 把上限值改成你們適用的法規或公司政策，只改規則文件。</a:t>
+            </a:r>
+            <a:endParaRPr lang="en-US" sz="1350" dirty="0"/>
+          </a:p>
+        </p:txBody>
       </p:sp>
       <p:pic>
         <p:nvPicPr>
-          <p:cNvPr id="10" name="Image 1" descr="preencoded.png">    </p:cNvPr>
+          <p:cNvPr id="21" name="Image 2" descr="preencoded.png">    </p:cNvPr>
           <p:cNvPicPr>
             <a:picLocks noChangeAspect="1"/>
           </p:cNvPicPr>
@@ -11362,8 +11425,8 @@
         </p:blipFill>
         <p:spPr>
           <a:xfrm>
-            <a:off x="804672" y="3209544"/>
-            <a:ext cx="448056" cy="448056"/>
+            <a:off x="950976" y="3721608"/>
+            <a:ext cx="219456" cy="219456"/>
           </a:xfrm>
           <a:prstGeom prst="rect">
             <a:avLst/>
@@ -11372,14 +11435,14 @@
       </p:pic>
       <p:sp>
         <p:nvSpPr>
-          <p:cNvPr id="11" name="Text 7"/>
-          <p:cNvSpPr/>
-          <p:nvPr/>
-        </p:nvSpPr>
-        <p:spPr>
-          <a:xfrm>
-            <a:off x="1691640" y="3026664"/>
-            <a:ext cx="6858000" cy="347472"/>
+          <p:cNvPr id="22" name="Text 17"/>
+          <p:cNvSpPr/>
+          <p:nvPr/>
+        </p:nvSpPr>
+        <p:spPr>
+          <a:xfrm>
+            <a:off x="1417320" y="3502152"/>
+            <a:ext cx="2182307" cy="658368"/>
           </a:xfrm>
           <a:prstGeom prst="rect">
             <a:avLst/>
@@ -11395,30 +11458,30 @@
               <a:buNone/>
             </a:pPr>
             <a:r>
-              <a:rPr lang="en-US" sz="1700" b="1" dirty="0">
-                <a:solidFill>
-                  <a:srgbClr val="FFFFFF"/>
-                </a:solidFill>
-                <a:latin typeface="Microsoft JhengHei" pitchFamily="34" charset="0"/>
-                <a:ea typeface="Microsoft JhengHei" pitchFamily="34" charset="-122"/>
-                <a:cs typeface="Microsoft JhengHei" pitchFamily="34" charset="-120"/>
-              </a:rPr>
-              <a:t>控制範圍清楚</a:t>
-            </a:r>
-            <a:endParaRPr lang="en-US" sz="1700" dirty="0"/>
-          </a:p>
-        </p:txBody>
-      </p:sp>
-      <p:sp>
-        <p:nvSpPr>
-          <p:cNvPr id="12" name="Text 8"/>
-          <p:cNvSpPr/>
-          <p:nvPr/>
-        </p:nvSpPr>
-        <p:spPr>
-          <a:xfrm>
-            <a:off x="1691640" y="3374136"/>
-            <a:ext cx="9966960" cy="658368"/>
+              <a:rPr lang="en-US" sz="1400" b="1" dirty="0">
+                <a:solidFill>
+                  <a:srgbClr val="B1420A"/>
+                </a:solidFill>
+                <a:latin typeface="Microsoft JhengHei" pitchFamily="34" charset="0"/>
+                <a:ea typeface="Microsoft JhengHei" pitchFamily="34" charset="-122"/>
+                <a:cs typeface="Microsoft JhengHei" pitchFamily="34" charset="-120"/>
+              </a:rPr>
+              <a:t>航空業 · 機坪安全</a:t>
+            </a:r>
+            <a:endParaRPr lang="en-US" sz="1400" dirty="0"/>
+          </a:p>
+        </p:txBody>
+      </p:sp>
+      <p:sp>
+        <p:nvSpPr>
+          <p:cNvPr id="23" name="Text 18"/>
+          <p:cNvSpPr/>
+          <p:nvPr/>
+        </p:nvSpPr>
+        <p:spPr>
+          <a:xfrm>
+            <a:off x="3586195" y="3502152"/>
+            <a:ext cx="7747190" cy="658368"/>
           </a:xfrm>
           <a:prstGeom prst="rect">
             <a:avLst/>
@@ -11432,59 +11495,28 @@
           <a:p>
             <a:pPr indent="0" marL="0">
               <a:lnSpc>
-                <a:spcPct val="118000"/>
+                <a:spcPct val="108000"/>
               </a:lnSpc>
               <a:buNone/>
             </a:pPr>
             <a:r>
-              <a:rPr lang="en-US" sz="1300" dirty="0">
-                <a:solidFill>
-                  <a:srgbClr val="C7CAEC"/>
-                </a:solidFill>
-                <a:latin typeface="Microsoft JhengHei" pitchFamily="34" charset="0"/>
-                <a:ea typeface="Microsoft JhengHei" pitchFamily="34" charset="-122"/>
-                <a:cs typeface="Microsoft JhengHei" pitchFamily="34" charset="-120"/>
-              </a:rPr>
-              <a:t>don’t ask again 可限定 per-recipient、per-domain 或 always；任務可軟／硬暫停、恢復或取消。</a:t>
-            </a:r>
-            <a:endParaRPr lang="en-US" sz="1300" dirty="0"/>
-          </a:p>
-        </p:txBody>
-      </p:sp>
-      <p:sp>
-        <p:nvSpPr>
-          <p:cNvPr id="13" name="Shape 9"/>
-          <p:cNvSpPr/>
-          <p:nvPr/>
-        </p:nvSpPr>
-        <p:spPr>
-          <a:xfrm>
-            <a:off x="640080" y="4215384"/>
-            <a:ext cx="777240" cy="777240"/>
-          </a:xfrm>
-          <a:prstGeom prst="roundRect">
-            <a:avLst>
-              <a:gd name="adj" fmla="val 18824"/>
-            </a:avLst>
-          </a:prstGeom>
-          <a:solidFill>
-            <a:srgbClr val="FFFFFF">
-              <a:alpha val="14000"/>
-            </a:srgbClr>
-          </a:solidFill>
-          <a:ln w="12700">
-            <a:solidFill>
-              <a:srgbClr val="22D3EE">
-                <a:alpha val="60000"/>
-              </a:srgbClr>
-            </a:solidFill>
-            <a:prstDash val="solid"/>
-          </a:ln>
-        </p:spPr>
+              <a:rPr lang="en-US" sz="1350" dirty="0">
+                <a:solidFill>
+                  <a:srgbClr val="1E2235"/>
+                </a:solidFill>
+                <a:latin typeface="Microsoft JhengHei" pitchFamily="34" charset="0"/>
+                <a:ea typeface="Microsoft JhengHei" pitchFamily="34" charset="-122"/>
+                <a:cs typeface="Microsoft JhengHei" pitchFamily="34" charset="-120"/>
+              </a:rPr>
+              <a:t>💡 把分級標準換成你們的地安事件分級表，測試同一套流程。</a:t>
+            </a:r>
+            <a:endParaRPr lang="en-US" sz="1350" dirty="0"/>
+          </a:p>
+        </p:txBody>
       </p:sp>
       <p:pic>
         <p:nvPicPr>
-          <p:cNvPr id="14" name="Image 2" descr="preencoded.png">    </p:cNvPr>
+          <p:cNvPr id="24" name="Image 3" descr="preencoded.png">    </p:cNvPr>
           <p:cNvPicPr>
             <a:picLocks noChangeAspect="1"/>
           </p:cNvPicPr>
@@ -11498,8 +11530,8 @@
         </p:blipFill>
         <p:spPr>
           <a:xfrm>
-            <a:off x="804672" y="4379976"/>
-            <a:ext cx="448056" cy="448056"/>
+            <a:off x="950976" y="4562856"/>
+            <a:ext cx="219456" cy="219456"/>
           </a:xfrm>
           <a:prstGeom prst="rect">
             <a:avLst/>
@@ -11508,14 +11540,14 @@
       </p:pic>
       <p:sp>
         <p:nvSpPr>
-          <p:cNvPr id="15" name="Text 10"/>
-          <p:cNvSpPr/>
-          <p:nvPr/>
-        </p:nvSpPr>
-        <p:spPr>
-          <a:xfrm>
-            <a:off x="1691640" y="4197096"/>
-            <a:ext cx="6858000" cy="347472"/>
+          <p:cNvPr id="25" name="Text 19"/>
+          <p:cNvSpPr/>
+          <p:nvPr/>
+        </p:nvSpPr>
+        <p:spPr>
+          <a:xfrm>
+            <a:off x="1417320" y="4343400"/>
+            <a:ext cx="2182307" cy="658368"/>
           </a:xfrm>
           <a:prstGeom prst="rect">
             <a:avLst/>
@@ -11531,30 +11563,30 @@
               <a:buNone/>
             </a:pPr>
             <a:r>
-              <a:rPr lang="en-US" sz="1700" b="1" dirty="0">
-                <a:solidFill>
-                  <a:srgbClr val="FFFFFF"/>
-                </a:solidFill>
-                <a:latin typeface="Microsoft JhengHei" pitchFamily="34" charset="0"/>
-                <a:ea typeface="Microsoft JhengHei" pitchFamily="34" charset="-122"/>
-                <a:cs typeface="Microsoft JhengHei" pitchFamily="34" charset="-120"/>
-              </a:rPr>
-              <a:t>自動化任務也有把關</a:t>
-            </a:r>
-            <a:endParaRPr lang="en-US" sz="1700" dirty="0"/>
-          </a:p>
-        </p:txBody>
-      </p:sp>
-      <p:sp>
-        <p:nvSpPr>
-          <p:cNvPr id="16" name="Text 11"/>
-          <p:cNvSpPr/>
-          <p:nvPr/>
-        </p:nvSpPr>
-        <p:spPr>
-          <a:xfrm>
-            <a:off x="1691640" y="4544568"/>
-            <a:ext cx="9966960" cy="658368"/>
+              <a:rPr lang="en-US" sz="1400" b="1" dirty="0">
+                <a:solidFill>
+                  <a:srgbClr val="C8952B"/>
+                </a:solidFill>
+                <a:latin typeface="Microsoft JhengHei" pitchFamily="34" charset="0"/>
+                <a:ea typeface="Microsoft JhengHei" pitchFamily="34" charset="-122"/>
+                <a:cs typeface="Microsoft JhengHei" pitchFamily="34" charset="-120"/>
+              </a:rPr>
+              <a:t>航空業 · 航線規劃</a:t>
+            </a:r>
+            <a:endParaRPr lang="en-US" sz="1400" dirty="0"/>
+          </a:p>
+        </p:txBody>
+      </p:sp>
+      <p:sp>
+        <p:nvSpPr>
+          <p:cNvPr id="26" name="Text 20"/>
+          <p:cNvSpPr/>
+          <p:nvPr/>
+        </p:nvSpPr>
+        <p:spPr>
+          <a:xfrm>
+            <a:off x="3586195" y="4343400"/>
+            <a:ext cx="7747190" cy="658368"/>
           </a:xfrm>
           <a:prstGeom prst="rect">
             <a:avLst/>
@@ -11568,59 +11600,28 @@
           <a:p>
             <a:pPr indent="0" marL="0">
               <a:lnSpc>
-                <a:spcPct val="118000"/>
+                <a:spcPct val="108000"/>
               </a:lnSpc>
               <a:buNone/>
             </a:pPr>
             <a:r>
-              <a:rPr lang="en-US" sz="1300" dirty="0">
-                <a:solidFill>
-                  <a:srgbClr val="C7CAEC"/>
-                </a:solidFill>
-                <a:latin typeface="Microsoft JhengHei" pitchFamily="34" charset="0"/>
-                <a:ea typeface="Microsoft JhengHei" pitchFamily="34" charset="-122"/>
-                <a:cs typeface="Microsoft JhengHei" pitchFamily="34" charset="-120"/>
-              </a:rPr>
-              <a:t>排程提示與事件驅動任務有執行頻率限制與防迴圈保護；一律以建立者權限執行，且與其他 Cowork 活動一同記錄在統一稽核日誌，套用 Microsoft Purview 政策。</a:t>
-            </a:r>
-            <a:endParaRPr lang="en-US" sz="1300" dirty="0"/>
-          </a:p>
-        </p:txBody>
-      </p:sp>
-      <p:sp>
-        <p:nvSpPr>
-          <p:cNvPr id="17" name="Shape 12"/>
-          <p:cNvSpPr/>
-          <p:nvPr/>
-        </p:nvSpPr>
-        <p:spPr>
-          <a:xfrm>
-            <a:off x="640080" y="5385816"/>
-            <a:ext cx="777240" cy="777240"/>
-          </a:xfrm>
-          <a:prstGeom prst="roundRect">
-            <a:avLst>
-              <a:gd name="adj" fmla="val 18824"/>
-            </a:avLst>
-          </a:prstGeom>
-          <a:solidFill>
-            <a:srgbClr val="FFFFFF">
-              <a:alpha val="14000"/>
-            </a:srgbClr>
-          </a:solidFill>
-          <a:ln w="12700">
-            <a:solidFill>
-              <a:srgbClr val="22D3EE">
-                <a:alpha val="60000"/>
-              </a:srgbClr>
-            </a:solidFill>
-            <a:prstDash val="solid"/>
-          </a:ln>
-        </p:spPr>
+              <a:rPr lang="en-US" sz="1350" dirty="0">
+                <a:solidFill>
+                  <a:srgbClr val="1E2235"/>
+                </a:solidFill>
+                <a:latin typeface="Microsoft JhengHei" pitchFamily="34" charset="0"/>
+                <a:ea typeface="Microsoft JhengHei" pitchFamily="34" charset="-122"/>
+                <a:cs typeface="Microsoft JhengHei" pitchFamily="34" charset="-120"/>
+              </a:rPr>
+              <a:t>💡 換成你們公司的 .potx 品牌範本，確認品牌元素有正確繼承。</a:t>
+            </a:r>
+            <a:endParaRPr lang="en-US" sz="1350" dirty="0"/>
+          </a:p>
+        </p:txBody>
       </p:sp>
       <p:pic>
         <p:nvPicPr>
-          <p:cNvPr id="18" name="Image 3" descr="preencoded.png">    </p:cNvPr>
+          <p:cNvPr id="27" name="Image 4" descr="preencoded.png">    </p:cNvPr>
           <p:cNvPicPr>
             <a:picLocks noChangeAspect="1"/>
           </p:cNvPicPr>
@@ -11634,8 +11635,8 @@
         </p:blipFill>
         <p:spPr>
           <a:xfrm>
-            <a:off x="804672" y="5550408"/>
-            <a:ext cx="448056" cy="448056"/>
+            <a:off x="950976" y="5404104"/>
+            <a:ext cx="219456" cy="219456"/>
           </a:xfrm>
           <a:prstGeom prst="rect">
             <a:avLst/>
@@ -11644,14 +11645,14 @@
       </p:pic>
       <p:sp>
         <p:nvSpPr>
-          <p:cNvPr id="19" name="Text 13"/>
-          <p:cNvSpPr/>
-          <p:nvPr/>
-        </p:nvSpPr>
-        <p:spPr>
-          <a:xfrm>
-            <a:off x="1691640" y="5367528"/>
-            <a:ext cx="6858000" cy="347472"/>
+          <p:cNvPr id="28" name="Text 21"/>
+          <p:cNvSpPr/>
+          <p:nvPr/>
+        </p:nvSpPr>
+        <p:spPr>
+          <a:xfrm>
+            <a:off x="1417320" y="5184648"/>
+            <a:ext cx="2182307" cy="658368"/>
           </a:xfrm>
           <a:prstGeom prst="rect">
             <a:avLst/>
@@ -11667,30 +11668,30 @@
               <a:buNone/>
             </a:pPr>
             <a:r>
-              <a:rPr lang="en-US" sz="1700" b="1" dirty="0">
-                <a:solidFill>
-                  <a:srgbClr val="FFFFFF"/>
-                </a:solidFill>
-                <a:latin typeface="Microsoft JhengHei" pitchFamily="34" charset="0"/>
-                <a:ea typeface="Microsoft JhengHei" pitchFamily="34" charset="-122"/>
-                <a:cs typeface="Microsoft JhengHei" pitchFamily="34" charset="-120"/>
-              </a:rPr>
-              <a:t>限制也要知道</a:t>
-            </a:r>
-            <a:endParaRPr lang="en-US" sz="1700" dirty="0"/>
-          </a:p>
-        </p:txBody>
-      </p:sp>
-      <p:sp>
-        <p:nvSpPr>
-          <p:cNvPr id="20" name="Text 14"/>
-          <p:cNvSpPr/>
-          <p:nvPr/>
-        </p:nvSpPr>
-        <p:spPr>
-          <a:xfrm>
-            <a:off x="1691640" y="5715000"/>
-            <a:ext cx="9966960" cy="658368"/>
+              <a:rPr lang="en-US" sz="1400" b="1" dirty="0">
+                <a:solidFill>
+                  <a:srgbClr val="5C2E91"/>
+                </a:solidFill>
+                <a:latin typeface="Microsoft JhengHei" pitchFamily="34" charset="0"/>
+                <a:ea typeface="Microsoft JhengHei" pitchFamily="34" charset="-122"/>
+                <a:cs typeface="Microsoft JhengHei" pitchFamily="34" charset="-120"/>
+              </a:rPr>
+              <a:t>航空業 · 自訂技能</a:t>
+            </a:r>
+            <a:endParaRPr lang="en-US" sz="1400" dirty="0"/>
+          </a:p>
+        </p:txBody>
+      </p:sp>
+      <p:sp>
+        <p:nvSpPr>
+          <p:cNvPr id="29" name="Text 22"/>
+          <p:cNvSpPr/>
+          <p:nvPr/>
+        </p:nvSpPr>
+        <p:spPr>
+          <a:xfrm>
+            <a:off x="3586195" y="5184648"/>
+            <a:ext cx="7747190" cy="658368"/>
           </a:xfrm>
           <a:prstGeom prst="rect">
             <a:avLst/>
@@ -11704,28 +11705,28 @@
           <a:p>
             <a:pPr indent="0" marL="0">
               <a:lnSpc>
-                <a:spcPct val="118000"/>
+                <a:spcPct val="108000"/>
               </a:lnSpc>
               <a:buNone/>
             </a:pPr>
             <a:r>
-              <a:rPr lang="en-US" sz="1300" dirty="0">
-                <a:solidFill>
-                  <a:srgbClr val="C7CAEC"/>
-                </a:solidFill>
-                <a:latin typeface="Microsoft JhengHei" pitchFamily="34" charset="0"/>
-                <a:ea typeface="Microsoft JhengHei" pitchFamily="34" charset="-122"/>
-                <a:cs typeface="Microsoft JhengHei" pitchFamily="34" charset="-120"/>
-              </a:rPr>
-              <a:t>不能存取本機檔案、刪除 OneDrive/SharePoint 檔案或讀取加密檔；附件 &lt;200MB；自訂技能與第三方 plugin 未經 Microsoft 驗證，需自行審閱。官方明列不適用於「免人工審查即需保證正確」的用途。</a:t>
-            </a:r>
-            <a:endParaRPr lang="en-US" sz="1300" dirty="0"/>
-          </a:p>
-        </p:txBody>
-      </p:sp>
-      <p:sp>
-        <p:nvSpPr>
-          <p:cNvPr id="21" name="Text 15"/>
+              <a:rPr lang="en-US" sz="1350" dirty="0">
+                <a:solidFill>
+                  <a:srgbClr val="1E2235"/>
+                </a:solidFill>
+                <a:latin typeface="Microsoft JhengHei" pitchFamily="34" charset="0"/>
+                <a:ea typeface="Microsoft JhengHei" pitchFamily="34" charset="-122"/>
+                <a:cs typeface="Microsoft JhengHei" pitchFamily="34" charset="-120"/>
+              </a:rPr>
+              <a:t>💡 故意提供一則沒有機尾號的事件，確認它真的會停下來要求補件。</a:t>
+            </a:r>
+            <a:endParaRPr lang="en-US" sz="1350" dirty="0"/>
+          </a:p>
+        </p:txBody>
+      </p:sp>
+      <p:sp>
+        <p:nvSpPr>
+          <p:cNvPr id="30" name="Text 23"/>
           <p:cNvSpPr/>
           <p:nvPr/>
         </p:nvSpPr>
@@ -11750,7 +11751,7 @@
             <a:r>
               <a:rPr lang="en-US" sz="900" dirty="0">
                 <a:solidFill>
-                  <a:srgbClr val="8A8FB5"/>
+                  <a:srgbClr val="5B6079"/>
                 </a:solidFill>
                 <a:latin typeface="Microsoft JhengHei" pitchFamily="34" charset="0"/>
                 <a:ea typeface="Microsoft JhengHei" pitchFamily="34" charset="-122"/>
@@ -11764,7 +11765,7 @@
       </p:sp>
       <p:sp>
         <p:nvSpPr>
-          <p:cNvPr id="22" name="Text 16"/>
+          <p:cNvPr id="31" name="Text 24"/>
           <p:cNvSpPr/>
           <p:nvPr/>
         </p:nvSpPr>
@@ -11789,7 +11790,7 @@
             <a:r>
               <a:rPr lang="en-US" sz="900" dirty="0">
                 <a:solidFill>
-                  <a:srgbClr val="8A8FB5"/>
+                  <a:srgbClr val="5B6079"/>
                 </a:solidFill>
                 <a:latin typeface="Microsoft JhengHei" pitchFamily="34" charset="0"/>
                 <a:ea typeface="Microsoft JhengHei" pitchFamily="34" charset="-122"/>
@@ -11939,7 +11940,7 @@
         </p:nvSpPr>
         <p:spPr>
           <a:xfrm>
-            <a:off x="640080" y="1737360"/>
+            <a:off x="640080" y="1664208"/>
             <a:ext cx="1005840" cy="822960"/>
           </a:xfrm>
           <a:prstGeom prst="rect">
@@ -11956,7 +11957,7 @@
               <a:buNone/>
             </a:pPr>
             <a:r>
-              <a:rPr lang="en-US" sz="3800" b="1" dirty="0">
+              <a:rPr lang="en-US" sz="3400" b="1" dirty="0">
                 <a:solidFill>
                   <a:srgbClr val="6366F1"/>
                 </a:solidFill>
@@ -11966,7 +11967,7 @@
               </a:rPr>
               <a:t>01</a:t>
             </a:r>
-            <a:endParaRPr lang="en-US" sz="3800" dirty="0"/>
+            <a:endParaRPr lang="en-US" sz="3400" dirty="0"/>
           </a:p>
         </p:txBody>
       </p:sp>
@@ -11978,7 +11979,7 @@
         </p:nvSpPr>
         <p:spPr>
           <a:xfrm>
-            <a:off x="1737360" y="1773936"/>
+            <a:off x="1737360" y="1700784"/>
             <a:ext cx="3657600" cy="457200"/>
           </a:xfrm>
           <a:prstGeom prst="rect">
@@ -11995,7 +11996,7 @@
               <a:buNone/>
             </a:pPr>
             <a:r>
-              <a:rPr lang="en-US" sz="2000" b="1" dirty="0">
+              <a:rPr lang="en-US" sz="1900" b="1" dirty="0">
                 <a:solidFill>
                   <a:srgbClr val="1E2235"/>
                 </a:solidFill>
@@ -12005,7 +12006,7 @@
               </a:rPr>
               <a:t>認識 Cowork</a:t>
             </a:r>
-            <a:endParaRPr lang="en-US" sz="2000" dirty="0"/>
+            <a:endParaRPr lang="en-US" sz="1900" dirty="0"/>
           </a:p>
         </p:txBody>
       </p:sp>
@@ -12017,7 +12018,7 @@
         </p:nvSpPr>
         <p:spPr>
           <a:xfrm>
-            <a:off x="1737360" y="2212848"/>
+            <a:off x="1737360" y="2121408"/>
             <a:ext cx="9601200" cy="365760"/>
           </a:xfrm>
           <a:prstGeom prst="rect">
@@ -12034,7 +12035,7 @@
               <a:buNone/>
             </a:pPr>
             <a:r>
-              <a:rPr lang="en-US" sz="1400" dirty="0">
+              <a:rPr lang="en-US" sz="1350" dirty="0">
                 <a:solidFill>
                   <a:srgbClr val="5B6079"/>
                 </a:solidFill>
@@ -12044,7 +12045,7 @@
               </a:rPr>
               <a:t>什麼是代理式 AI，和一般 Copilot Chat 有何不同</a:t>
             </a:r>
-            <a:endParaRPr lang="en-US" sz="1400" dirty="0"/>
+            <a:endParaRPr lang="en-US" sz="1350" dirty="0"/>
           </a:p>
         </p:txBody>
       </p:sp>
@@ -12056,7 +12057,7 @@
         </p:nvSpPr>
         <p:spPr>
           <a:xfrm>
-            <a:off x="640080" y="2816352"/>
+            <a:off x="640080" y="2578608"/>
             <a:ext cx="1005840" cy="822960"/>
           </a:xfrm>
           <a:prstGeom prst="rect">
@@ -12073,7 +12074,7 @@
               <a:buNone/>
             </a:pPr>
             <a:r>
-              <a:rPr lang="en-US" sz="3800" b="1" dirty="0">
+              <a:rPr lang="en-US" sz="3400" b="1" dirty="0">
                 <a:solidFill>
                   <a:srgbClr val="6366F1"/>
                 </a:solidFill>
@@ -12083,7 +12084,7 @@
               </a:rPr>
               <a:t>02</a:t>
             </a:r>
-            <a:endParaRPr lang="en-US" sz="3800" dirty="0"/>
+            <a:endParaRPr lang="en-US" sz="3400" dirty="0"/>
           </a:p>
         </p:txBody>
       </p:sp>
@@ -12095,7 +12096,7 @@
         </p:nvSpPr>
         <p:spPr>
           <a:xfrm>
-            <a:off x="1737360" y="2852928"/>
+            <a:off x="1737360" y="2615184"/>
             <a:ext cx="3657600" cy="457200"/>
           </a:xfrm>
           <a:prstGeom prst="rect">
@@ -12112,7 +12113,7 @@
               <a:buNone/>
             </a:pPr>
             <a:r>
-              <a:rPr lang="en-US" sz="2000" b="1" dirty="0">
+              <a:rPr lang="en-US" sz="1900" b="1" dirty="0">
                 <a:solidFill>
                   <a:srgbClr val="1E2235"/>
                 </a:solidFill>
@@ -12122,7 +12123,7 @@
               </a:rPr>
               <a:t>核心能力與運作</a:t>
             </a:r>
-            <a:endParaRPr lang="en-US" sz="2000" dirty="0"/>
+            <a:endParaRPr lang="en-US" sz="1900" dirty="0"/>
           </a:p>
         </p:txBody>
       </p:sp>
@@ -12134,7 +12135,7 @@
         </p:nvSpPr>
         <p:spPr>
           <a:xfrm>
-            <a:off x="1737360" y="3291840"/>
+            <a:off x="1737360" y="3035808"/>
             <a:ext cx="9601200" cy="365760"/>
           </a:xfrm>
           <a:prstGeom prst="rect">
@@ -12151,7 +12152,7 @@
               <a:buNone/>
             </a:pPr>
             <a:r>
-              <a:rPr lang="en-US" sz="1400" dirty="0">
+              <a:rPr lang="en-US" sz="1350" dirty="0">
                 <a:solidFill>
                   <a:srgbClr val="5B6079"/>
                 </a:solidFill>
@@ -12161,7 +12162,7 @@
               </a:rPr>
               <a:t>技能、工作區、行動前審核、自我驗證</a:t>
             </a:r>
-            <a:endParaRPr lang="en-US" sz="1400" dirty="0"/>
+            <a:endParaRPr lang="en-US" sz="1350" dirty="0"/>
           </a:p>
         </p:txBody>
       </p:sp>
@@ -12173,7 +12174,7 @@
         </p:nvSpPr>
         <p:spPr>
           <a:xfrm>
-            <a:off x="640080" y="3895344"/>
+            <a:off x="640080" y="3493008"/>
             <a:ext cx="1005840" cy="822960"/>
           </a:xfrm>
           <a:prstGeom prst="rect">
@@ -12190,7 +12191,7 @@
               <a:buNone/>
             </a:pPr>
             <a:r>
-              <a:rPr lang="en-US" sz="3800" b="1" dirty="0">
+              <a:rPr lang="en-US" sz="3400" b="1" dirty="0">
                 <a:solidFill>
                   <a:srgbClr val="6366F1"/>
                 </a:solidFill>
@@ -12200,7 +12201,7 @@
               </a:rPr>
               <a:t>03</a:t>
             </a:r>
-            <a:endParaRPr lang="en-US" sz="3800" dirty="0"/>
+            <a:endParaRPr lang="en-US" sz="3400" dirty="0"/>
           </a:p>
         </p:txBody>
       </p:sp>
@@ -12212,7 +12213,7 @@
         </p:nvSpPr>
         <p:spPr>
           <a:xfrm>
-            <a:off x="1737360" y="3931920"/>
+            <a:off x="1737360" y="3529584"/>
             <a:ext cx="3657600" cy="457200"/>
           </a:xfrm>
           <a:prstGeom prst="rect">
@@ -12229,7 +12230,7 @@
               <a:buNone/>
             </a:pPr>
             <a:r>
-              <a:rPr lang="en-US" sz="2000" b="1" dirty="0">
+              <a:rPr lang="en-US" sz="1900" b="1" dirty="0">
                 <a:solidFill>
                   <a:srgbClr val="1E2235"/>
                 </a:solidFill>
@@ -12237,21 +12238,138 @@
                 <a:ea typeface="Microsoft JhengHei" pitchFamily="34" charset="-122"/>
                 <a:cs typeface="Microsoft JhengHei" pitchFamily="34" charset="-120"/>
               </a:rPr>
+              <a:t>練習環境準備</a:t>
+            </a:r>
+            <a:endParaRPr lang="en-US" sz="1900" dirty="0"/>
+          </a:p>
+        </p:txBody>
+      </p:sp>
+      <p:sp>
+        <p:nvSpPr>
+          <p:cNvPr id="13" name="Text 11"/>
+          <p:cNvSpPr/>
+          <p:nvPr/>
+        </p:nvSpPr>
+        <p:spPr>
+          <a:xfrm>
+            <a:off x="1737360" y="3950208"/>
+            <a:ext cx="9601200" cy="365760"/>
+          </a:xfrm>
+          <a:prstGeom prst="rect">
+            <a:avLst/>
+          </a:prstGeom>
+          <a:noFill/>
+          <a:ln/>
+        </p:spPr>
+        <p:txBody>
+          <a:bodyPr wrap="square" rtlCol="0" anchor="ctr"/>
+          <a:lstStyle/>
+          <a:p>
+            <a:pPr indent="0" marL="0">
+              <a:buNone/>
+            </a:pPr>
+            <a:r>
+              <a:rPr lang="en-US" sz="1350" dirty="0">
+                <a:solidFill>
+                  <a:srgbClr val="5B6079"/>
+                </a:solidFill>
+                <a:latin typeface="Microsoft JhengHei" pitchFamily="34" charset="0"/>
+                <a:ea typeface="Microsoft JhengHei" pitchFamily="34" charset="-122"/>
+                <a:cs typeface="Microsoft JhengHei" pitchFamily="34" charset="-120"/>
+              </a:rPr>
+              <a:t>素材課前放進 OneDrive 與信箱，讓 Cowork 自己去找</a:t>
+            </a:r>
+            <a:endParaRPr lang="en-US" sz="1350" dirty="0"/>
+          </a:p>
+        </p:txBody>
+      </p:sp>
+      <p:sp>
+        <p:nvSpPr>
+          <p:cNvPr id="14" name="Text 12"/>
+          <p:cNvSpPr/>
+          <p:nvPr/>
+        </p:nvSpPr>
+        <p:spPr>
+          <a:xfrm>
+            <a:off x="640080" y="4407408"/>
+            <a:ext cx="1005840" cy="822960"/>
+          </a:xfrm>
+          <a:prstGeom prst="rect">
+            <a:avLst/>
+          </a:prstGeom>
+          <a:noFill/>
+          <a:ln/>
+        </p:spPr>
+        <p:txBody>
+          <a:bodyPr wrap="square" rtlCol="0" anchor="ctr"/>
+          <a:lstStyle/>
+          <a:p>
+            <a:pPr algn="l" indent="0" marL="0">
+              <a:buNone/>
+            </a:pPr>
+            <a:r>
+              <a:rPr lang="en-US" sz="3400" b="1" dirty="0">
+                <a:solidFill>
+                  <a:srgbClr val="6366F1"/>
+                </a:solidFill>
+                <a:latin typeface="Microsoft JhengHei" pitchFamily="34" charset="0"/>
+                <a:ea typeface="Microsoft JhengHei" pitchFamily="34" charset="-122"/>
+                <a:cs typeface="Microsoft JhengHei" pitchFamily="34" charset="-120"/>
+              </a:rPr>
+              <a:t>04</a:t>
+            </a:r>
+            <a:endParaRPr lang="en-US" sz="3400" dirty="0"/>
+          </a:p>
+        </p:txBody>
+      </p:sp>
+      <p:sp>
+        <p:nvSpPr>
+          <p:cNvPr id="15" name="Text 13"/>
+          <p:cNvSpPr/>
+          <p:nvPr/>
+        </p:nvSpPr>
+        <p:spPr>
+          <a:xfrm>
+            <a:off x="1737360" y="4443984"/>
+            <a:ext cx="3657600" cy="457200"/>
+          </a:xfrm>
+          <a:prstGeom prst="rect">
+            <a:avLst/>
+          </a:prstGeom>
+          <a:noFill/>
+          <a:ln/>
+        </p:spPr>
+        <p:txBody>
+          <a:bodyPr wrap="square" rtlCol="0" anchor="ctr"/>
+          <a:lstStyle/>
+          <a:p>
+            <a:pPr indent="0" marL="0">
+              <a:buNone/>
+            </a:pPr>
+            <a:r>
+              <a:rPr lang="en-US" sz="1900" b="1" dirty="0">
+                <a:solidFill>
+                  <a:srgbClr val="1E2235"/>
+                </a:solidFill>
+                <a:latin typeface="Microsoft JhengHei" pitchFamily="34" charset="0"/>
+                <a:ea typeface="Microsoft JhengHei" pitchFamily="34" charset="-122"/>
+                <a:cs typeface="Microsoft JhengHei" pitchFamily="34" charset="-120"/>
+              </a:rPr>
               <a:t>5 個實戰情境</a:t>
             </a:r>
-            <a:endParaRPr lang="en-US" sz="2000" dirty="0"/>
-          </a:p>
-        </p:txBody>
-      </p:sp>
-      <p:sp>
-        <p:nvSpPr>
-          <p:cNvPr id="13" name="Text 11"/>
-          <p:cNvSpPr/>
-          <p:nvPr/>
-        </p:nvSpPr>
-        <p:spPr>
-          <a:xfrm>
-            <a:off x="1737360" y="4370832"/>
+            <a:endParaRPr lang="en-US" sz="1900" dirty="0"/>
+          </a:p>
+        </p:txBody>
+      </p:sp>
+      <p:sp>
+        <p:nvSpPr>
+          <p:cNvPr id="16" name="Text 14"/>
+          <p:cNvSpPr/>
+          <p:nvPr/>
+        </p:nvSpPr>
+        <p:spPr>
+          <a:xfrm>
+            <a:off x="1737360" y="4864608"/>
             <a:ext cx="9601200" cy="365760"/>
           </a:xfrm>
           <a:prstGeom prst="rect">
@@ -12268,7 +12386,7 @@
               <a:buNone/>
             </a:pPr>
             <a:r>
-              <a:rPr lang="en-US" sz="1400" dirty="0">
+              <a:rPr lang="en-US" sz="1350" dirty="0">
                 <a:solidFill>
                   <a:srgbClr val="5B6079"/>
                 </a:solidFill>
@@ -12278,19 +12396,19 @@
               </a:rPr>
               <a:t>班機取消旅客安置排序、組員飛時四維度檢查、機坪事件 @提及觸發、季度航線績效簡報、安全判定技能，五個「只有 Cowork 做得到」的工作流</a:t>
             </a:r>
-            <a:endParaRPr lang="en-US" sz="1400" dirty="0"/>
-          </a:p>
-        </p:txBody>
-      </p:sp>
-      <p:sp>
-        <p:nvSpPr>
-          <p:cNvPr id="14" name="Text 12"/>
-          <p:cNvSpPr/>
-          <p:nvPr/>
-        </p:nvSpPr>
-        <p:spPr>
-          <a:xfrm>
-            <a:off x="640080" y="4974336"/>
+            <a:endParaRPr lang="en-US" sz="1350" dirty="0"/>
+          </a:p>
+        </p:txBody>
+      </p:sp>
+      <p:sp>
+        <p:nvSpPr>
+          <p:cNvPr id="17" name="Text 15"/>
+          <p:cNvSpPr/>
+          <p:nvPr/>
+        </p:nvSpPr>
+        <p:spPr>
+          <a:xfrm>
+            <a:off x="640080" y="5321808"/>
             <a:ext cx="1005840" cy="822960"/>
           </a:xfrm>
           <a:prstGeom prst="rect">
@@ -12307,7 +12425,7 @@
               <a:buNone/>
             </a:pPr>
             <a:r>
-              <a:rPr lang="en-US" sz="3800" b="1" dirty="0">
+              <a:rPr lang="en-US" sz="3400" b="1" dirty="0">
                 <a:solidFill>
                   <a:srgbClr val="6366F1"/>
                 </a:solidFill>
@@ -12315,21 +12433,21 @@
                 <a:ea typeface="Microsoft JhengHei" pitchFamily="34" charset="-122"/>
                 <a:cs typeface="Microsoft JhengHei" pitchFamily="34" charset="-120"/>
               </a:rPr>
-              <a:t>04</a:t>
-            </a:r>
-            <a:endParaRPr lang="en-US" sz="3800" dirty="0"/>
-          </a:p>
-        </p:txBody>
-      </p:sp>
-      <p:sp>
-        <p:nvSpPr>
-          <p:cNvPr id="15" name="Text 13"/>
-          <p:cNvSpPr/>
-          <p:nvPr/>
-        </p:nvSpPr>
-        <p:spPr>
-          <a:xfrm>
-            <a:off x="1737360" y="5010912"/>
+              <a:t>05</a:t>
+            </a:r>
+            <a:endParaRPr lang="en-US" sz="3400" dirty="0"/>
+          </a:p>
+        </p:txBody>
+      </p:sp>
+      <p:sp>
+        <p:nvSpPr>
+          <p:cNvPr id="18" name="Text 16"/>
+          <p:cNvSpPr/>
+          <p:nvPr/>
+        </p:nvSpPr>
+        <p:spPr>
+          <a:xfrm>
+            <a:off x="1737360" y="5358384"/>
             <a:ext cx="3657600" cy="457200"/>
           </a:xfrm>
           <a:prstGeom prst="rect">
@@ -12346,7 +12464,7 @@
               <a:buNone/>
             </a:pPr>
             <a:r>
-              <a:rPr lang="en-US" sz="2000" b="1" dirty="0">
+              <a:rPr lang="en-US" sz="1900" b="1" dirty="0">
                 <a:solidFill>
                   <a:srgbClr val="1E2235"/>
                 </a:solidFill>
@@ -12356,19 +12474,19 @@
               </a:rPr>
               <a:t>套用到你的日常</a:t>
             </a:r>
-            <a:endParaRPr lang="en-US" sz="2000" dirty="0"/>
-          </a:p>
-        </p:txBody>
-      </p:sp>
-      <p:sp>
-        <p:nvSpPr>
-          <p:cNvPr id="16" name="Text 14"/>
-          <p:cNvSpPr/>
-          <p:nvPr/>
-        </p:nvSpPr>
-        <p:spPr>
-          <a:xfrm>
-            <a:off x="1737360" y="5449824"/>
+            <a:endParaRPr lang="en-US" sz="1900" dirty="0"/>
+          </a:p>
+        </p:txBody>
+      </p:sp>
+      <p:sp>
+        <p:nvSpPr>
+          <p:cNvPr id="19" name="Text 17"/>
+          <p:cNvSpPr/>
+          <p:nvPr/>
+        </p:nvSpPr>
+        <p:spPr>
+          <a:xfrm>
+            <a:off x="1737360" y="5779008"/>
             <a:ext cx="9601200" cy="365760"/>
           </a:xfrm>
           <a:prstGeom prst="rect">
@@ -12385,7 +12503,7 @@
               <a:buNone/>
             </a:pPr>
             <a:r>
-              <a:rPr lang="en-US" sz="1400" dirty="0">
+              <a:rPr lang="en-US" sz="1350" dirty="0">
                 <a:solidFill>
                   <a:srgbClr val="5B6079"/>
                 </a:solidFill>
@@ -12395,13 +12513,13 @@
               </a:rPr>
               <a:t>如何把這些情境延伸到自己的工作</a:t>
             </a:r>
-            <a:endParaRPr lang="en-US" sz="1400" dirty="0"/>
-          </a:p>
-        </p:txBody>
-      </p:sp>
-      <p:sp>
-        <p:nvSpPr>
-          <p:cNvPr id="17" name="Text 15"/>
+            <a:endParaRPr lang="en-US" sz="1350" dirty="0"/>
+          </a:p>
+        </p:txBody>
+      </p:sp>
+      <p:sp>
+        <p:nvSpPr>
+          <p:cNvPr id="20" name="Text 18"/>
           <p:cNvSpPr/>
           <p:nvPr/>
         </p:nvSpPr>
@@ -12440,7 +12558,7 @@
       </p:sp>
       <p:sp>
         <p:nvSpPr>
-          <p:cNvPr id="18" name="Text 16"/>
+          <p:cNvPr id="21" name="Text 19"/>
           <p:cNvSpPr/>
           <p:nvPr/>
         </p:nvSpPr>
@@ -12518,14 +12636,34 @@
       </p:grpSpPr>
       <p:sp>
         <p:nvSpPr>
-          <p:cNvPr id="2" name="Text 0"/>
-          <p:cNvSpPr/>
-          <p:nvPr/>
-        </p:nvSpPr>
-        <p:spPr>
-          <a:xfrm>
-            <a:off x="640080" y="1371600"/>
-            <a:ext cx="10058400" cy="822960"/>
+          <p:cNvPr id="2" name="Shape 0"/>
+          <p:cNvSpPr/>
+          <p:nvPr/>
+        </p:nvSpPr>
+        <p:spPr>
+          <a:xfrm>
+            <a:off x="640080" y="566928"/>
+            <a:ext cx="384048" cy="128016"/>
+          </a:xfrm>
+          <a:prstGeom prst="rect">
+            <a:avLst/>
+          </a:prstGeom>
+          <a:solidFill>
+            <a:srgbClr val="22D3EE"/>
+          </a:solidFill>
+          <a:ln/>
+        </p:spPr>
+      </p:sp>
+      <p:sp>
+        <p:nvSpPr>
+          <p:cNvPr id="3" name="Text 1"/>
+          <p:cNvSpPr/>
+          <p:nvPr/>
+        </p:nvSpPr>
+        <p:spPr>
+          <a:xfrm>
+            <a:off x="1143000" y="457200"/>
+            <a:ext cx="8229600" cy="310896"/>
           </a:xfrm>
           <a:prstGeom prst="rect">
             <a:avLst/>
@@ -12541,7 +12679,46 @@
               <a:buNone/>
             </a:pPr>
             <a:r>
-              <a:rPr lang="en-US" sz="4000" b="1" dirty="0">
+              <a:rPr lang="en-US" sz="1200" b="1" spc="200" kern="0" dirty="0">
+                <a:solidFill>
+                  <a:srgbClr val="22D3EE"/>
+                </a:solidFill>
+                <a:latin typeface="Microsoft JhengHei" pitchFamily="34" charset="0"/>
+                <a:ea typeface="Microsoft JhengHei" pitchFamily="34" charset="-122"/>
+                <a:cs typeface="Microsoft JhengHei" pitchFamily="34" charset="-120"/>
+              </a:rPr>
+              <a:t>TRUST &amp; CONTROL</a:t>
+            </a:r>
+            <a:endParaRPr lang="en-US" sz="1200" dirty="0"/>
+          </a:p>
+        </p:txBody>
+      </p:sp>
+      <p:sp>
+        <p:nvSpPr>
+          <p:cNvPr id="4" name="Text 2"/>
+          <p:cNvSpPr/>
+          <p:nvPr/>
+        </p:nvSpPr>
+        <p:spPr>
+          <a:xfrm>
+            <a:off x="640080" y="786384"/>
+            <a:ext cx="10972800" cy="640080"/>
+          </a:xfrm>
+          <a:prstGeom prst="rect">
+            <a:avLst/>
+          </a:prstGeom>
+          <a:noFill/>
+          <a:ln/>
+        </p:spPr>
+        <p:txBody>
+          <a:bodyPr wrap="square" rtlCol="0" anchor="ctr"/>
+          <a:lstStyle/>
+          <a:p>
+            <a:pPr indent="0" marL="0">
+              <a:buNone/>
+            </a:pPr>
+            <a:r>
+              <a:rPr lang="en-US" sz="3000" b="1" dirty="0">
                 <a:solidFill>
                   <a:srgbClr val="FFFFFF"/>
                 </a:solidFill>
@@ -12549,76 +12726,37 @@
                 <a:ea typeface="Microsoft JhengHei" pitchFamily="34" charset="-122"/>
                 <a:cs typeface="Microsoft JhengHei" pitchFamily="34" charset="-120"/>
               </a:rPr>
-              <a:t>現在就開始練習</a:t>
-            </a:r>
-            <a:endParaRPr lang="en-US" sz="4000" dirty="0"/>
-          </a:p>
-        </p:txBody>
-      </p:sp>
-      <p:sp>
-        <p:nvSpPr>
-          <p:cNvPr id="3" name="Text 1"/>
-          <p:cNvSpPr/>
-          <p:nvPr/>
-        </p:nvSpPr>
-        <p:spPr>
-          <a:xfrm>
-            <a:off x="640080" y="2377440"/>
-            <a:ext cx="10058400" cy="548640"/>
-          </a:xfrm>
-          <a:prstGeom prst="rect">
-            <a:avLst/>
-          </a:prstGeom>
-          <a:noFill/>
-          <a:ln/>
-        </p:spPr>
-        <p:txBody>
-          <a:bodyPr wrap="square" rtlCol="0" anchor="ctr"/>
-          <a:lstStyle/>
-          <a:p>
-            <a:pPr indent="0" marL="0">
-              <a:buNone/>
-            </a:pPr>
-            <a:r>
-              <a:rPr lang="en-US" sz="1500" dirty="0">
-                <a:solidFill>
-                  <a:srgbClr val="C7CAEC"/>
-                </a:solidFill>
-                <a:latin typeface="Microsoft JhengHei" pitchFamily="34" charset="0"/>
-                <a:ea typeface="Microsoft JhengHei" pitchFamily="34" charset="-122"/>
-                <a:cs typeface="Microsoft JhengHei" pitchFamily="34" charset="-120"/>
-              </a:rPr>
-              <a:t>開始前請確認：每位使用者一張 M365 Copilot 授權、管理員已啟用用量計費（Copilot Credits，未啟用則無法存取）、租戶位於 Anthropic 支援地區；可在 Web/桌面/行動/Outlook/Teams 使用（本機瀏覽器工作僅限網頁版＋Edge 150 以上，且預設停用需管理員開啟）。</a:t>
-            </a:r>
-            <a:endParaRPr lang="en-US" sz="1500" dirty="0"/>
-          </a:p>
-        </p:txBody>
-      </p:sp>
-      <p:sp>
-        <p:nvSpPr>
-          <p:cNvPr id="4" name="Shape 2"/>
-          <p:cNvSpPr/>
-          <p:nvPr/>
-        </p:nvSpPr>
-        <p:spPr>
-          <a:xfrm>
-            <a:off x="640080" y="3017520"/>
-            <a:ext cx="8686800" cy="868680"/>
+              <a:t>自動化，但你始終是決策者</a:t>
+            </a:r>
+            <a:endParaRPr lang="en-US" sz="3000" dirty="0"/>
+          </a:p>
+        </p:txBody>
+      </p:sp>
+      <p:sp>
+        <p:nvSpPr>
+          <p:cNvPr id="5" name="Shape 3"/>
+          <p:cNvSpPr/>
+          <p:nvPr/>
+        </p:nvSpPr>
+        <p:spPr>
+          <a:xfrm>
+            <a:off x="640080" y="1874520"/>
+            <a:ext cx="777240" cy="777240"/>
           </a:xfrm>
           <a:prstGeom prst="roundRect">
             <a:avLst>
-              <a:gd name="adj" fmla="val 12632"/>
+              <a:gd name="adj" fmla="val 18824"/>
             </a:avLst>
           </a:prstGeom>
           <a:solidFill>
             <a:srgbClr val="FFFFFF">
-              <a:alpha val="10000"/>
+              <a:alpha val="14000"/>
             </a:srgbClr>
           </a:solidFill>
           <a:ln w="12700">
             <a:solidFill>
-              <a:srgbClr val="FFFFFF">
-                <a:alpha val="35000"/>
+              <a:srgbClr val="22D3EE">
+                <a:alpha val="60000"/>
               </a:srgbClr>
             </a:solidFill>
             <a:prstDash val="solid"/>
@@ -12627,7 +12765,7 @@
       </p:sp>
       <p:pic>
         <p:nvPicPr>
-          <p:cNvPr id="5" name="Image 0" descr="preencoded.png">    </p:cNvPr>
+          <p:cNvPr id="6" name="Image 0" descr="preencoded.png">    </p:cNvPr>
           <p:cNvPicPr>
             <a:picLocks noChangeAspect="1"/>
           </p:cNvPicPr>
@@ -12641,8 +12779,8 @@
         </p:blipFill>
         <p:spPr>
           <a:xfrm>
-            <a:off x="914400" y="3291840"/>
-            <a:ext cx="329184" cy="329184"/>
+            <a:off x="804672" y="2039112"/>
+            <a:ext cx="448056" cy="448056"/>
           </a:xfrm>
           <a:prstGeom prst="rect">
             <a:avLst/>
@@ -12651,14 +12789,14 @@
       </p:pic>
       <p:sp>
         <p:nvSpPr>
-          <p:cNvPr id="6" name="Text 3"/>
-          <p:cNvSpPr/>
-          <p:nvPr/>
-        </p:nvSpPr>
-        <p:spPr>
-          <a:xfrm>
-            <a:off x="1417320" y="3127248"/>
-            <a:ext cx="7315200" cy="320040"/>
+          <p:cNvPr id="7" name="Text 4"/>
+          <p:cNvSpPr/>
+          <p:nvPr/>
+        </p:nvSpPr>
+        <p:spPr>
+          <a:xfrm>
+            <a:off x="1691640" y="1856232"/>
+            <a:ext cx="6858000" cy="347472"/>
           </a:xfrm>
           <a:prstGeom prst="rect">
             <a:avLst/>
@@ -12674,7 +12812,7 @@
               <a:buNone/>
             </a:pPr>
             <a:r>
-              <a:rPr lang="en-US" sz="1400" b="1" dirty="0">
+              <a:rPr lang="en-US" sz="1700" b="1" dirty="0">
                 <a:solidFill>
                   <a:srgbClr val="FFFFFF"/>
                 </a:solidFill>
@@ -12682,24 +12820,22 @@
                 <a:ea typeface="Microsoft JhengHei" pitchFamily="34" charset="-122"/>
                 <a:cs typeface="Microsoft JhengHei" pitchFamily="34" charset="-120"/>
               </a:rPr>
-              <a:t>Cowork 練習手冊</a:t>
-            </a:r>
-            <a:endParaRPr lang="en-US" sz="1400" dirty="0"/>
-          </a:p>
-        </p:txBody>
-      </p:sp>
-      <p:sp>
-        <p:nvSpPr>
-          <p:cNvPr id="7" name="Text 4">
-            <a:hlinkClick r:id="rId3" tooltip=""/>
-          </p:cNvPr>
-          <p:cNvSpPr/>
-          <p:nvPr/>
-        </p:nvSpPr>
-        <p:spPr>
-          <a:xfrm>
-            <a:off x="1417320" y="3419856"/>
-            <a:ext cx="7772400" cy="320040"/>
+              <a:t>行動前審核</a:t>
+            </a:r>
+            <a:endParaRPr lang="en-US" sz="1700" dirty="0"/>
+          </a:p>
+        </p:txBody>
+      </p:sp>
+      <p:sp>
+        <p:nvSpPr>
+          <p:cNvPr id="8" name="Text 5"/>
+          <p:cNvSpPr/>
+          <p:nvPr/>
+        </p:nvSpPr>
+        <p:spPr>
+          <a:xfrm>
+            <a:off x="1691640" y="2203704"/>
+            <a:ext cx="9966960" cy="658368"/>
           </a:xfrm>
           <a:prstGeom prst="rect">
             <a:avLst/>
@@ -12712,33 +12848,196 @@
           <a:lstStyle/>
           <a:p>
             <a:pPr indent="0" marL="0">
-              <a:buNone/>
-            </a:pPr>
-            <a:r>
-              <a:rPr lang="en-US" sz="1300" u="sng" dirty="0">
-                <a:solidFill>
-                  <a:srgbClr val="9FE9FF"/>
-                </a:solidFill>
-                <a:latin typeface="Microsoft JhengHei" pitchFamily="34" charset="0"/>
-                <a:ea typeface="Microsoft JhengHei" pitchFamily="34" charset="-122"/>
-                <a:cs typeface="Microsoft JhengHei" pitchFamily="34" charset="-120"/>
-                <a:hlinkClick r:id="rId3" invalidUrl="" action="" tgtFrame="" tooltip="" history="1" highlightClick="0" endSnd="0">
-                  <a:extLst>
-                    <a:ext uri="{A12FA001-AC4F-418D-AE19-62706E023703}">
-                      <ahyp:hlinkClr xmlns:ahyp="http://schemas.microsoft.com/office/drawing/2018/hyperlinkcolor" val="tx"/>
-                    </a:ext>
-                  </a:extLst>
-                </a:hlinkClick>
-              </a:rPr>
-              <a:t>andyhung11.github.io/Copilot-in-1mins/CoworkPlaybook/</a:t>
+              <a:lnSpc>
+                <a:spcPct val="118000"/>
+              </a:lnSpc>
+              <a:buNone/>
+            </a:pPr>
+            <a:r>
+              <a:rPr lang="en-US" sz="1300" dirty="0">
+                <a:solidFill>
+                  <a:srgbClr val="C7CAEC"/>
+                </a:solidFill>
+                <a:latin typeface="Microsoft JhengHei" pitchFamily="34" charset="0"/>
+                <a:ea typeface="Microsoft JhengHei" pitchFamily="34" charset="-122"/>
+                <a:cs typeface="Microsoft JhengHei" pitchFamily="34" charset="-120"/>
+              </a:rPr>
+              <a:t>中高風險動作會顯示 RISK-LEVEL；寄信、發 Teams、建立會議等動作先攤開可編輯預覽，核准後才送出。</a:t>
             </a:r>
             <a:endParaRPr lang="en-US" sz="1300" dirty="0"/>
           </a:p>
         </p:txBody>
+      </p:sp>
+      <p:sp>
+        <p:nvSpPr>
+          <p:cNvPr id="9" name="Shape 6"/>
+          <p:cNvSpPr/>
+          <p:nvPr/>
+        </p:nvSpPr>
+        <p:spPr>
+          <a:xfrm>
+            <a:off x="640080" y="3044952"/>
+            <a:ext cx="777240" cy="777240"/>
+          </a:xfrm>
+          <a:prstGeom prst="roundRect">
+            <a:avLst>
+              <a:gd name="adj" fmla="val 18824"/>
+            </a:avLst>
+          </a:prstGeom>
+          <a:solidFill>
+            <a:srgbClr val="FFFFFF">
+              <a:alpha val="14000"/>
+            </a:srgbClr>
+          </a:solidFill>
+          <a:ln w="12700">
+            <a:solidFill>
+              <a:srgbClr val="22D3EE">
+                <a:alpha val="60000"/>
+              </a:srgbClr>
+            </a:solidFill>
+            <a:prstDash val="solid"/>
+          </a:ln>
+        </p:spPr>
       </p:sp>
       <p:pic>
         <p:nvPicPr>
-          <p:cNvPr id="8" name="Image 1" descr="preencoded.png">    </p:cNvPr>
+          <p:cNvPr id="10" name="Image 1" descr="preencoded.png">    </p:cNvPr>
+          <p:cNvPicPr>
+            <a:picLocks noChangeAspect="1"/>
+          </p:cNvPicPr>
+          <p:nvPr/>
+        </p:nvPicPr>
+        <p:blipFill>
+          <a:blip r:embed="rId3"/>
+          <a:stretch>
+            <a:fillRect/>
+          </a:stretch>
+        </p:blipFill>
+        <p:spPr>
+          <a:xfrm>
+            <a:off x="804672" y="3209544"/>
+            <a:ext cx="448056" cy="448056"/>
+          </a:xfrm>
+          <a:prstGeom prst="rect">
+            <a:avLst/>
+          </a:prstGeom>
+        </p:spPr>
+      </p:pic>
+      <p:sp>
+        <p:nvSpPr>
+          <p:cNvPr id="11" name="Text 7"/>
+          <p:cNvSpPr/>
+          <p:nvPr/>
+        </p:nvSpPr>
+        <p:spPr>
+          <a:xfrm>
+            <a:off x="1691640" y="3026664"/>
+            <a:ext cx="6858000" cy="347472"/>
+          </a:xfrm>
+          <a:prstGeom prst="rect">
+            <a:avLst/>
+          </a:prstGeom>
+          <a:noFill/>
+          <a:ln/>
+        </p:spPr>
+        <p:txBody>
+          <a:bodyPr wrap="square" rtlCol="0" anchor="ctr"/>
+          <a:lstStyle/>
+          <a:p>
+            <a:pPr indent="0" marL="0">
+              <a:buNone/>
+            </a:pPr>
+            <a:r>
+              <a:rPr lang="en-US" sz="1700" b="1" dirty="0">
+                <a:solidFill>
+                  <a:srgbClr val="FFFFFF"/>
+                </a:solidFill>
+                <a:latin typeface="Microsoft JhengHei" pitchFamily="34" charset="0"/>
+                <a:ea typeface="Microsoft JhengHei" pitchFamily="34" charset="-122"/>
+                <a:cs typeface="Microsoft JhengHei" pitchFamily="34" charset="-120"/>
+              </a:rPr>
+              <a:t>控制範圍清楚</a:t>
+            </a:r>
+            <a:endParaRPr lang="en-US" sz="1700" dirty="0"/>
+          </a:p>
+        </p:txBody>
+      </p:sp>
+      <p:sp>
+        <p:nvSpPr>
+          <p:cNvPr id="12" name="Text 8"/>
+          <p:cNvSpPr/>
+          <p:nvPr/>
+        </p:nvSpPr>
+        <p:spPr>
+          <a:xfrm>
+            <a:off x="1691640" y="3374136"/>
+            <a:ext cx="9966960" cy="658368"/>
+          </a:xfrm>
+          <a:prstGeom prst="rect">
+            <a:avLst/>
+          </a:prstGeom>
+          <a:noFill/>
+          <a:ln/>
+        </p:spPr>
+        <p:txBody>
+          <a:bodyPr wrap="square" rtlCol="0" anchor="ctr"/>
+          <a:lstStyle/>
+          <a:p>
+            <a:pPr indent="0" marL="0">
+              <a:lnSpc>
+                <a:spcPct val="118000"/>
+              </a:lnSpc>
+              <a:buNone/>
+            </a:pPr>
+            <a:r>
+              <a:rPr lang="en-US" sz="1300" dirty="0">
+                <a:solidFill>
+                  <a:srgbClr val="C7CAEC"/>
+                </a:solidFill>
+                <a:latin typeface="Microsoft JhengHei" pitchFamily="34" charset="0"/>
+                <a:ea typeface="Microsoft JhengHei" pitchFamily="34" charset="-122"/>
+                <a:cs typeface="Microsoft JhengHei" pitchFamily="34" charset="-120"/>
+              </a:rPr>
+              <a:t>don’t ask again 可限定 per-recipient、per-domain 或 always；任務可軟／硬暫停、恢復或取消。</a:t>
+            </a:r>
+            <a:endParaRPr lang="en-US" sz="1300" dirty="0"/>
+          </a:p>
+        </p:txBody>
+      </p:sp>
+      <p:sp>
+        <p:nvSpPr>
+          <p:cNvPr id="13" name="Shape 9"/>
+          <p:cNvSpPr/>
+          <p:nvPr/>
+        </p:nvSpPr>
+        <p:spPr>
+          <a:xfrm>
+            <a:off x="640080" y="4215384"/>
+            <a:ext cx="777240" cy="777240"/>
+          </a:xfrm>
+          <a:prstGeom prst="roundRect">
+            <a:avLst>
+              <a:gd name="adj" fmla="val 18824"/>
+            </a:avLst>
+          </a:prstGeom>
+          <a:solidFill>
+            <a:srgbClr val="FFFFFF">
+              <a:alpha val="14000"/>
+            </a:srgbClr>
+          </a:solidFill>
+          <a:ln w="12700">
+            <a:solidFill>
+              <a:srgbClr val="22D3EE">
+                <a:alpha val="60000"/>
+              </a:srgbClr>
+            </a:solidFill>
+            <a:prstDash val="solid"/>
+          </a:ln>
+        </p:spPr>
+      </p:sp>
+      <p:pic>
+        <p:nvPicPr>
+          <p:cNvPr id="14" name="Image 2" descr="preencoded.png">    </p:cNvPr>
           <p:cNvPicPr>
             <a:picLocks noChangeAspect="1"/>
           </p:cNvPicPr>
@@ -12752,8 +13051,8 @@
         </p:blipFill>
         <p:spPr>
           <a:xfrm>
-            <a:off x="640080" y="4315968"/>
-            <a:ext cx="237744" cy="237744"/>
+            <a:off x="804672" y="4379976"/>
+            <a:ext cx="448056" cy="448056"/>
           </a:xfrm>
           <a:prstGeom prst="rect">
             <a:avLst/>
@@ -12762,14 +13061,14 @@
       </p:pic>
       <p:sp>
         <p:nvSpPr>
-          <p:cNvPr id="9" name="Text 5"/>
-          <p:cNvSpPr/>
-          <p:nvPr/>
-        </p:nvSpPr>
-        <p:spPr>
-          <a:xfrm>
-            <a:off x="1005840" y="4261104"/>
-            <a:ext cx="9144000" cy="365760"/>
+          <p:cNvPr id="15" name="Text 10"/>
+          <p:cNvSpPr/>
+          <p:nvPr/>
+        </p:nvSpPr>
+        <p:spPr>
+          <a:xfrm>
+            <a:off x="1691640" y="4197096"/>
+            <a:ext cx="6858000" cy="347472"/>
           </a:xfrm>
           <a:prstGeom prst="rect">
             <a:avLst/>
@@ -12785,23 +13084,96 @@
               <a:buNone/>
             </a:pPr>
             <a:r>
-              <a:rPr lang="en-US" sz="1400" dirty="0">
-                <a:solidFill>
-                  <a:srgbClr val="E3E5F7"/>
-                </a:solidFill>
-                <a:latin typeface="Microsoft JhengHei" pitchFamily="34" charset="0"/>
-                <a:ea typeface="Microsoft JhengHei" pitchFamily="34" charset="-122"/>
-                <a:cs typeface="Microsoft JhengHei" pitchFamily="34" charset="-120"/>
-              </a:rPr>
-              <a:t>挑一個最貼近你工作的情境開始</a:t>
-            </a:r>
-            <a:endParaRPr lang="en-US" sz="1400" dirty="0"/>
-          </a:p>
-        </p:txBody>
+              <a:rPr lang="en-US" sz="1700" b="1" dirty="0">
+                <a:solidFill>
+                  <a:srgbClr val="FFFFFF"/>
+                </a:solidFill>
+                <a:latin typeface="Microsoft JhengHei" pitchFamily="34" charset="0"/>
+                <a:ea typeface="Microsoft JhengHei" pitchFamily="34" charset="-122"/>
+                <a:cs typeface="Microsoft JhengHei" pitchFamily="34" charset="-120"/>
+              </a:rPr>
+              <a:t>自動化任務也有把關</a:t>
+            </a:r>
+            <a:endParaRPr lang="en-US" sz="1700" dirty="0"/>
+          </a:p>
+        </p:txBody>
+      </p:sp>
+      <p:sp>
+        <p:nvSpPr>
+          <p:cNvPr id="16" name="Text 11"/>
+          <p:cNvSpPr/>
+          <p:nvPr/>
+        </p:nvSpPr>
+        <p:spPr>
+          <a:xfrm>
+            <a:off x="1691640" y="4544568"/>
+            <a:ext cx="9966960" cy="658368"/>
+          </a:xfrm>
+          <a:prstGeom prst="rect">
+            <a:avLst/>
+          </a:prstGeom>
+          <a:noFill/>
+          <a:ln/>
+        </p:spPr>
+        <p:txBody>
+          <a:bodyPr wrap="square" rtlCol="0" anchor="ctr"/>
+          <a:lstStyle/>
+          <a:p>
+            <a:pPr indent="0" marL="0">
+              <a:lnSpc>
+                <a:spcPct val="118000"/>
+              </a:lnSpc>
+              <a:buNone/>
+            </a:pPr>
+            <a:r>
+              <a:rPr lang="en-US" sz="1300" dirty="0">
+                <a:solidFill>
+                  <a:srgbClr val="C7CAEC"/>
+                </a:solidFill>
+                <a:latin typeface="Microsoft JhengHei" pitchFamily="34" charset="0"/>
+                <a:ea typeface="Microsoft JhengHei" pitchFamily="34" charset="-122"/>
+                <a:cs typeface="Microsoft JhengHei" pitchFamily="34" charset="-120"/>
+              </a:rPr>
+              <a:t>排程提示與事件驅動任務有執行頻率限制與防迴圈保護；一律以建立者權限執行，且與其他 Cowork 活動一同記錄在統一稽核日誌，套用 Microsoft Purview 政策。</a:t>
+            </a:r>
+            <a:endParaRPr lang="en-US" sz="1300" dirty="0"/>
+          </a:p>
+        </p:txBody>
+      </p:sp>
+      <p:sp>
+        <p:nvSpPr>
+          <p:cNvPr id="17" name="Shape 12"/>
+          <p:cNvSpPr/>
+          <p:nvPr/>
+        </p:nvSpPr>
+        <p:spPr>
+          <a:xfrm>
+            <a:off x="640080" y="5385816"/>
+            <a:ext cx="777240" cy="777240"/>
+          </a:xfrm>
+          <a:prstGeom prst="roundRect">
+            <a:avLst>
+              <a:gd name="adj" fmla="val 18824"/>
+            </a:avLst>
+          </a:prstGeom>
+          <a:solidFill>
+            <a:srgbClr val="FFFFFF">
+              <a:alpha val="14000"/>
+            </a:srgbClr>
+          </a:solidFill>
+          <a:ln w="12700">
+            <a:solidFill>
+              <a:srgbClr val="22D3EE">
+                <a:alpha val="60000"/>
+              </a:srgbClr>
+            </a:solidFill>
+            <a:prstDash val="solid"/>
+          </a:ln>
+        </p:spPr>
       </p:sp>
       <p:pic>
         <p:nvPicPr>
-          <p:cNvPr id="10" name="Image 2" descr="preencoded.png">    </p:cNvPr>
+          <p:cNvPr id="18" name="Image 3" descr="preencoded.png">    </p:cNvPr>
           <p:cNvPicPr>
             <a:picLocks noChangeAspect="1"/>
           </p:cNvPicPr>
@@ -12815,8 +13187,8 @@
         </p:blipFill>
         <p:spPr>
           <a:xfrm>
-            <a:off x="640080" y="4791456"/>
-            <a:ext cx="237744" cy="237744"/>
+            <a:off x="804672" y="5550408"/>
+            <a:ext cx="448056" cy="448056"/>
           </a:xfrm>
           <a:prstGeom prst="rect">
             <a:avLst/>
@@ -12825,14 +13197,14 @@
       </p:pic>
       <p:sp>
         <p:nvSpPr>
-          <p:cNvPr id="11" name="Text 6"/>
-          <p:cNvSpPr/>
-          <p:nvPr/>
-        </p:nvSpPr>
-        <p:spPr>
-          <a:xfrm>
-            <a:off x="1005840" y="4736592"/>
-            <a:ext cx="9144000" cy="365760"/>
+          <p:cNvPr id="19" name="Text 13"/>
+          <p:cNvSpPr/>
+          <p:nvPr/>
+        </p:nvSpPr>
+        <p:spPr>
+          <a:xfrm>
+            <a:off x="1691640" y="5367528"/>
+            <a:ext cx="6858000" cy="347472"/>
           </a:xfrm>
           <a:prstGeom prst="rect">
             <a:avLst/>
@@ -12848,54 +13220,30 @@
               <a:buNone/>
             </a:pPr>
             <a:r>
-              <a:rPr lang="en-US" sz="1400" dirty="0">
-                <a:solidFill>
-                  <a:srgbClr val="E3E5F7"/>
-                </a:solidFill>
-                <a:latin typeface="Microsoft JhengHei" pitchFamily="34" charset="0"/>
-                <a:ea typeface="Microsoft JhengHei" pitchFamily="34" charset="-122"/>
-                <a:cs typeface="Microsoft JhengHei" pitchFamily="34" charset="-120"/>
-              </a:rPr>
-              <a:t>自訂技能放 OneDrive /Documents/Cowork/skills/ 的 SKILL.md（最多 50 個、每個 1MB）</a:t>
-            </a:r>
-            <a:endParaRPr lang="en-US" sz="1400" dirty="0"/>
-          </a:p>
-        </p:txBody>
-      </p:sp>
-      <p:pic>
-        <p:nvPicPr>
-          <p:cNvPr id="12" name="Image 3" descr="preencoded.png">    </p:cNvPr>
-          <p:cNvPicPr>
-            <a:picLocks noChangeAspect="1"/>
-          </p:cNvPicPr>
-          <p:nvPr/>
-        </p:nvPicPr>
-        <p:blipFill>
-          <a:blip r:embed="rId6"/>
-          <a:stretch>
-            <a:fillRect/>
-          </a:stretch>
-        </p:blipFill>
-        <p:spPr>
-          <a:xfrm>
-            <a:off x="640080" y="5266944"/>
-            <a:ext cx="237744" cy="237744"/>
-          </a:xfrm>
-          <a:prstGeom prst="rect">
-            <a:avLst/>
-          </a:prstGeom>
-        </p:spPr>
-      </p:pic>
-      <p:sp>
-        <p:nvSpPr>
-          <p:cNvPr id="13" name="Text 7"/>
-          <p:cNvSpPr/>
-          <p:nvPr/>
-        </p:nvSpPr>
-        <p:spPr>
-          <a:xfrm>
-            <a:off x="1005840" y="5212080"/>
-            <a:ext cx="9144000" cy="365760"/>
+              <a:rPr lang="en-US" sz="1700" b="1" dirty="0">
+                <a:solidFill>
+                  <a:srgbClr val="FFFFFF"/>
+                </a:solidFill>
+                <a:latin typeface="Microsoft JhengHei" pitchFamily="34" charset="0"/>
+                <a:ea typeface="Microsoft JhengHei" pitchFamily="34" charset="-122"/>
+                <a:cs typeface="Microsoft JhengHei" pitchFamily="34" charset="-120"/>
+              </a:rPr>
+              <a:t>限制也要知道</a:t>
+            </a:r>
+            <a:endParaRPr lang="en-US" sz="1700" dirty="0"/>
+          </a:p>
+        </p:txBody>
+      </p:sp>
+      <p:sp>
+        <p:nvSpPr>
+          <p:cNvPr id="20" name="Text 14"/>
+          <p:cNvSpPr/>
+          <p:nvPr/>
+        </p:nvSpPr>
+        <p:spPr>
+          <a:xfrm>
+            <a:off x="1691640" y="5715000"/>
+            <a:ext cx="9966960" cy="658368"/>
           </a:xfrm>
           <a:prstGeom prst="rect">
             <a:avLst/>
@@ -12908,83 +13256,101 @@
           <a:lstStyle/>
           <a:p>
             <a:pPr indent="0" marL="0">
-              <a:buNone/>
-            </a:pPr>
-            <a:r>
-              <a:rPr lang="en-US" sz="1400" dirty="0">
-                <a:solidFill>
-                  <a:srgbClr val="E3E5F7"/>
-                </a:solidFill>
-                <a:latin typeface="Microsoft JhengHei" pitchFamily="34" charset="0"/>
-                <a:ea typeface="Microsoft JhengHei" pitchFamily="34" charset="-122"/>
-                <a:cs typeface="Microsoft JhengHei" pitchFamily="34" charset="-120"/>
-              </a:rPr>
-              <a:t>模型選擇器：Auto（預設）、GPT 5.5 Frontier、GPT 5.6 Sol／Terra、Opus 5、Sonnet 5、Fable 5（預覽・預設關閉）</a:t>
-            </a:r>
-            <a:endParaRPr lang="en-US" sz="1400" dirty="0"/>
-          </a:p>
-        </p:txBody>
-      </p:sp>
-      <p:pic>
-        <p:nvPicPr>
-          <p:cNvPr id="14" name="Image 4" descr="preencoded.png">    </p:cNvPr>
-          <p:cNvPicPr>
-            <a:picLocks noChangeAspect="1"/>
-          </p:cNvPicPr>
-          <p:nvPr/>
-        </p:nvPicPr>
-        <p:blipFill>
-          <a:blip r:embed="rId7"/>
-          <a:stretch>
-            <a:fillRect/>
-          </a:stretch>
-        </p:blipFill>
-        <p:spPr>
-          <a:xfrm>
-            <a:off x="640080" y="5742432"/>
-            <a:ext cx="237744" cy="237744"/>
-          </a:xfrm>
-          <a:prstGeom prst="rect">
-            <a:avLst/>
-          </a:prstGeom>
-        </p:spPr>
-      </p:pic>
-      <p:sp>
-        <p:nvSpPr>
-          <p:cNvPr id="15" name="Text 8"/>
-          <p:cNvSpPr/>
-          <p:nvPr/>
-        </p:nvSpPr>
-        <p:spPr>
-          <a:xfrm>
-            <a:off x="1005840" y="5687568"/>
-            <a:ext cx="9144000" cy="365760"/>
-          </a:xfrm>
-          <a:prstGeom prst="rect">
-            <a:avLst/>
-          </a:prstGeom>
-          <a:noFill/>
-          <a:ln/>
-        </p:spPr>
-        <p:txBody>
-          <a:bodyPr wrap="square" rtlCol="0" anchor="ctr"/>
-          <a:lstStyle/>
-          <a:p>
-            <a:pPr indent="0" marL="0">
-              <a:buNone/>
-            </a:pPr>
-            <a:r>
-              <a:rPr lang="en-US" sz="1400" dirty="0">
-                <a:solidFill>
-                  <a:srgbClr val="E3E5F7"/>
-                </a:solidFill>
-                <a:latin typeface="Microsoft JhengHei" pitchFamily="34" charset="0"/>
-                <a:ea typeface="Microsoft JhengHei" pitchFamily="34" charset="-122"/>
-                <a:cs typeface="Microsoft JhengHei" pitchFamily="34" charset="-120"/>
-              </a:rPr>
-              <a:t>想要自動觸發？到「Automations」頁設定排程提示（上限 5 個）或事件觸發任務（收信／被 @提及）</a:t>
-            </a:r>
-            <a:endParaRPr lang="en-US" sz="1400" dirty="0"/>
+              <a:lnSpc>
+                <a:spcPct val="118000"/>
+              </a:lnSpc>
+              <a:buNone/>
+            </a:pPr>
+            <a:r>
+              <a:rPr lang="en-US" sz="1300" dirty="0">
+                <a:solidFill>
+                  <a:srgbClr val="C7CAEC"/>
+                </a:solidFill>
+                <a:latin typeface="Microsoft JhengHei" pitchFamily="34" charset="0"/>
+                <a:ea typeface="Microsoft JhengHei" pitchFamily="34" charset="-122"/>
+                <a:cs typeface="Microsoft JhengHei" pitchFamily="34" charset="-120"/>
+              </a:rPr>
+              <a:t>不能存取本機檔案、刪除 OneDrive/SharePoint 檔案或讀取加密檔；附件 &lt;200MB；自訂技能與第三方 plugin 未經 Microsoft 驗證，需自行審閱。官方明列不適用於「免人工審查即需保證正確」的用途。</a:t>
+            </a:r>
+            <a:endParaRPr lang="en-US" sz="1300" dirty="0"/>
+          </a:p>
+        </p:txBody>
+      </p:sp>
+      <p:sp>
+        <p:nvSpPr>
+          <p:cNvPr id="21" name="Text 15"/>
+          <p:cNvSpPr/>
+          <p:nvPr/>
+        </p:nvSpPr>
+        <p:spPr>
+          <a:xfrm>
+            <a:off x="640080" y="6473952"/>
+            <a:ext cx="5486400" cy="274320"/>
+          </a:xfrm>
+          <a:prstGeom prst="rect">
+            <a:avLst/>
+          </a:prstGeom>
+          <a:noFill/>
+          <a:ln/>
+        </p:spPr>
+        <p:txBody>
+          <a:bodyPr wrap="square" rtlCol="0" anchor="ctr"/>
+          <a:lstStyle/>
+          <a:p>
+            <a:pPr algn="l" indent="0" marL="0">
+              <a:buNone/>
+            </a:pPr>
+            <a:r>
+              <a:rPr lang="en-US" sz="900" dirty="0">
+                <a:solidFill>
+                  <a:srgbClr val="8A8FB5"/>
+                </a:solidFill>
+                <a:latin typeface="Microsoft JhengHei" pitchFamily="34" charset="0"/>
+                <a:ea typeface="Microsoft JhengHei" pitchFamily="34" charset="-122"/>
+                <a:cs typeface="Microsoft JhengHei" pitchFamily="34" charset="-120"/>
+              </a:rPr>
+              <a:t>Microsoft 365 Copilot Cowork</a:t>
+            </a:r>
+            <a:endParaRPr lang="en-US" sz="900" dirty="0"/>
+          </a:p>
+        </p:txBody>
+      </p:sp>
+      <p:sp>
+        <p:nvSpPr>
+          <p:cNvPr id="22" name="Text 16"/>
+          <p:cNvSpPr/>
+          <p:nvPr/>
+        </p:nvSpPr>
+        <p:spPr>
+          <a:xfrm>
+            <a:off x="11002975" y="6473952"/>
+            <a:ext cx="548640" cy="274320"/>
+          </a:xfrm>
+          <a:prstGeom prst="rect">
+            <a:avLst/>
+          </a:prstGeom>
+          <a:noFill/>
+          <a:ln/>
+        </p:spPr>
+        <p:txBody>
+          <a:bodyPr wrap="square" rtlCol="0" anchor="ctr"/>
+          <a:lstStyle/>
+          <a:p>
+            <a:pPr algn="r" indent="0" marL="0">
+              <a:buNone/>
+            </a:pPr>
+            <a:r>
+              <a:rPr lang="en-US" sz="900" dirty="0">
+                <a:solidFill>
+                  <a:srgbClr val="8A8FB5"/>
+                </a:solidFill>
+                <a:latin typeface="Microsoft JhengHei" pitchFamily="34" charset="0"/>
+                <a:ea typeface="Microsoft JhengHei" pitchFamily="34" charset="-122"/>
+                <a:cs typeface="Microsoft JhengHei" pitchFamily="34" charset="-120"/>
+              </a:rPr>
+              <a:t>19</a:t>
+            </a:r>
+            <a:endParaRPr lang="en-US" sz="900" dirty="0"/>
           </a:p>
         </p:txBody>
       </p:sp>
@@ -13035,6 +13401,517 @@
         </p:nvSpPr>
         <p:spPr>
           <a:xfrm>
+            <a:off x="640080" y="1371600"/>
+            <a:ext cx="10058400" cy="822960"/>
+          </a:xfrm>
+          <a:prstGeom prst="rect">
+            <a:avLst/>
+          </a:prstGeom>
+          <a:noFill/>
+          <a:ln/>
+        </p:spPr>
+        <p:txBody>
+          <a:bodyPr wrap="square" rtlCol="0" anchor="ctr"/>
+          <a:lstStyle/>
+          <a:p>
+            <a:pPr indent="0" marL="0">
+              <a:buNone/>
+            </a:pPr>
+            <a:r>
+              <a:rPr lang="en-US" sz="4000" b="1" dirty="0">
+                <a:solidFill>
+                  <a:srgbClr val="FFFFFF"/>
+                </a:solidFill>
+                <a:latin typeface="Microsoft JhengHei" pitchFamily="34" charset="0"/>
+                <a:ea typeface="Microsoft JhengHei" pitchFamily="34" charset="-122"/>
+                <a:cs typeface="Microsoft JhengHei" pitchFamily="34" charset="-120"/>
+              </a:rPr>
+              <a:t>現在就開始練習</a:t>
+            </a:r>
+            <a:endParaRPr lang="en-US" sz="4000" dirty="0"/>
+          </a:p>
+        </p:txBody>
+      </p:sp>
+      <p:sp>
+        <p:nvSpPr>
+          <p:cNvPr id="3" name="Text 1"/>
+          <p:cNvSpPr/>
+          <p:nvPr/>
+        </p:nvSpPr>
+        <p:spPr>
+          <a:xfrm>
+            <a:off x="640080" y="2377440"/>
+            <a:ext cx="10058400" cy="548640"/>
+          </a:xfrm>
+          <a:prstGeom prst="rect">
+            <a:avLst/>
+          </a:prstGeom>
+          <a:noFill/>
+          <a:ln/>
+        </p:spPr>
+        <p:txBody>
+          <a:bodyPr wrap="square" rtlCol="0" anchor="ctr"/>
+          <a:lstStyle/>
+          <a:p>
+            <a:pPr indent="0" marL="0">
+              <a:buNone/>
+            </a:pPr>
+            <a:r>
+              <a:rPr lang="en-US" sz="1500" dirty="0">
+                <a:solidFill>
+                  <a:srgbClr val="C7CAEC"/>
+                </a:solidFill>
+                <a:latin typeface="Microsoft JhengHei" pitchFamily="34" charset="0"/>
+                <a:ea typeface="Microsoft JhengHei" pitchFamily="34" charset="-122"/>
+                <a:cs typeface="Microsoft JhengHei" pitchFamily="34" charset="-120"/>
+              </a:rPr>
+              <a:t>開始前請確認：每位使用者一張 M365 Copilot 授權、管理員已啟用用量計費（Copilot Credits，未啟用則無法存取）、租戶位於 Anthropic 支援地區；可在 Web/桌面/行動/Outlook/Teams 使用（本機瀏覽器工作僅限網頁版＋Edge 150 以上，且預設停用需管理員開啟）。</a:t>
+            </a:r>
+            <a:endParaRPr lang="en-US" sz="1500" dirty="0"/>
+          </a:p>
+        </p:txBody>
+      </p:sp>
+      <p:sp>
+        <p:nvSpPr>
+          <p:cNvPr id="4" name="Shape 2"/>
+          <p:cNvSpPr/>
+          <p:nvPr/>
+        </p:nvSpPr>
+        <p:spPr>
+          <a:xfrm>
+            <a:off x="640080" y="3017520"/>
+            <a:ext cx="8686800" cy="868680"/>
+          </a:xfrm>
+          <a:prstGeom prst="roundRect">
+            <a:avLst>
+              <a:gd name="adj" fmla="val 12632"/>
+            </a:avLst>
+          </a:prstGeom>
+          <a:solidFill>
+            <a:srgbClr val="FFFFFF">
+              <a:alpha val="10000"/>
+            </a:srgbClr>
+          </a:solidFill>
+          <a:ln w="12700">
+            <a:solidFill>
+              <a:srgbClr val="FFFFFF">
+                <a:alpha val="35000"/>
+              </a:srgbClr>
+            </a:solidFill>
+            <a:prstDash val="solid"/>
+          </a:ln>
+        </p:spPr>
+      </p:sp>
+      <p:pic>
+        <p:nvPicPr>
+          <p:cNvPr id="5" name="Image 0" descr="preencoded.png">    </p:cNvPr>
+          <p:cNvPicPr>
+            <a:picLocks noChangeAspect="1"/>
+          </p:cNvPicPr>
+          <p:nvPr/>
+        </p:nvPicPr>
+        <p:blipFill>
+          <a:blip r:embed="rId2"/>
+          <a:stretch>
+            <a:fillRect/>
+          </a:stretch>
+        </p:blipFill>
+        <p:spPr>
+          <a:xfrm>
+            <a:off x="914400" y="3291840"/>
+            <a:ext cx="329184" cy="329184"/>
+          </a:xfrm>
+          <a:prstGeom prst="rect">
+            <a:avLst/>
+          </a:prstGeom>
+        </p:spPr>
+      </p:pic>
+      <p:sp>
+        <p:nvSpPr>
+          <p:cNvPr id="6" name="Text 3"/>
+          <p:cNvSpPr/>
+          <p:nvPr/>
+        </p:nvSpPr>
+        <p:spPr>
+          <a:xfrm>
+            <a:off x="1417320" y="3127248"/>
+            <a:ext cx="7315200" cy="320040"/>
+          </a:xfrm>
+          <a:prstGeom prst="rect">
+            <a:avLst/>
+          </a:prstGeom>
+          <a:noFill/>
+          <a:ln/>
+        </p:spPr>
+        <p:txBody>
+          <a:bodyPr wrap="square" rtlCol="0" anchor="ctr"/>
+          <a:lstStyle/>
+          <a:p>
+            <a:pPr indent="0" marL="0">
+              <a:buNone/>
+            </a:pPr>
+            <a:r>
+              <a:rPr lang="en-US" sz="1400" b="1" dirty="0">
+                <a:solidFill>
+                  <a:srgbClr val="FFFFFF"/>
+                </a:solidFill>
+                <a:latin typeface="Microsoft JhengHei" pitchFamily="34" charset="0"/>
+                <a:ea typeface="Microsoft JhengHei" pitchFamily="34" charset="-122"/>
+                <a:cs typeface="Microsoft JhengHei" pitchFamily="34" charset="-120"/>
+              </a:rPr>
+              <a:t>Cowork 練習手冊</a:t>
+            </a:r>
+            <a:endParaRPr lang="en-US" sz="1400" dirty="0"/>
+          </a:p>
+        </p:txBody>
+      </p:sp>
+      <p:sp>
+        <p:nvSpPr>
+          <p:cNvPr id="7" name="Text 4">
+            <a:hlinkClick r:id="rId3" tooltip=""/>
+          </p:cNvPr>
+          <p:cNvSpPr/>
+          <p:nvPr/>
+        </p:nvSpPr>
+        <p:spPr>
+          <a:xfrm>
+            <a:off x="1417320" y="3419856"/>
+            <a:ext cx="7772400" cy="320040"/>
+          </a:xfrm>
+          <a:prstGeom prst="rect">
+            <a:avLst/>
+          </a:prstGeom>
+          <a:noFill/>
+          <a:ln/>
+        </p:spPr>
+        <p:txBody>
+          <a:bodyPr wrap="square" rtlCol="0" anchor="ctr"/>
+          <a:lstStyle/>
+          <a:p>
+            <a:pPr indent="0" marL="0">
+              <a:buNone/>
+            </a:pPr>
+            <a:r>
+              <a:rPr lang="en-US" sz="1300" u="sng" dirty="0">
+                <a:solidFill>
+                  <a:srgbClr val="9FE9FF"/>
+                </a:solidFill>
+                <a:latin typeface="Microsoft JhengHei" pitchFamily="34" charset="0"/>
+                <a:ea typeface="Microsoft JhengHei" pitchFamily="34" charset="-122"/>
+                <a:cs typeface="Microsoft JhengHei" pitchFamily="34" charset="-120"/>
+                <a:hlinkClick r:id="rId3" invalidUrl="" action="" tgtFrame="" tooltip="" history="1" highlightClick="0" endSnd="0">
+                  <a:extLst>
+                    <a:ext uri="{A12FA001-AC4F-418D-AE19-62706E023703}">
+                      <ahyp:hlinkClr xmlns:ahyp="http://schemas.microsoft.com/office/drawing/2018/hyperlinkcolor" val="tx"/>
+                    </a:ext>
+                  </a:extLst>
+                </a:hlinkClick>
+              </a:rPr>
+              <a:t>andyhung11.github.io/Copilot-in-1mins/CoworkPlaybook/</a:t>
+            </a:r>
+            <a:endParaRPr lang="en-US" sz="1300" dirty="0"/>
+          </a:p>
+        </p:txBody>
+      </p:sp>
+      <p:pic>
+        <p:nvPicPr>
+          <p:cNvPr id="8" name="Image 1" descr="preencoded.png">    </p:cNvPr>
+          <p:cNvPicPr>
+            <a:picLocks noChangeAspect="1"/>
+          </p:cNvPicPr>
+          <p:nvPr/>
+        </p:nvPicPr>
+        <p:blipFill>
+          <a:blip r:embed="rId4"/>
+          <a:stretch>
+            <a:fillRect/>
+          </a:stretch>
+        </p:blipFill>
+        <p:spPr>
+          <a:xfrm>
+            <a:off x="640080" y="4315968"/>
+            <a:ext cx="237744" cy="237744"/>
+          </a:xfrm>
+          <a:prstGeom prst="rect">
+            <a:avLst/>
+          </a:prstGeom>
+        </p:spPr>
+      </p:pic>
+      <p:sp>
+        <p:nvSpPr>
+          <p:cNvPr id="9" name="Text 5"/>
+          <p:cNvSpPr/>
+          <p:nvPr/>
+        </p:nvSpPr>
+        <p:spPr>
+          <a:xfrm>
+            <a:off x="1005840" y="4261104"/>
+            <a:ext cx="9144000" cy="365760"/>
+          </a:xfrm>
+          <a:prstGeom prst="rect">
+            <a:avLst/>
+          </a:prstGeom>
+          <a:noFill/>
+          <a:ln/>
+        </p:spPr>
+        <p:txBody>
+          <a:bodyPr wrap="square" rtlCol="0" anchor="ctr"/>
+          <a:lstStyle/>
+          <a:p>
+            <a:pPr indent="0" marL="0">
+              <a:buNone/>
+            </a:pPr>
+            <a:r>
+              <a:rPr lang="en-US" sz="1400" dirty="0">
+                <a:solidFill>
+                  <a:srgbClr val="E3E5F7"/>
+                </a:solidFill>
+                <a:latin typeface="Microsoft JhengHei" pitchFamily="34" charset="0"/>
+                <a:ea typeface="Microsoft JhengHei" pitchFamily="34" charset="-122"/>
+                <a:cs typeface="Microsoft JhengHei" pitchFamily="34" charset="-120"/>
+              </a:rPr>
+              <a:t>挑一個最貼近你工作的情境開始</a:t>
+            </a:r>
+            <a:endParaRPr lang="en-US" sz="1400" dirty="0"/>
+          </a:p>
+        </p:txBody>
+      </p:sp>
+      <p:pic>
+        <p:nvPicPr>
+          <p:cNvPr id="10" name="Image 2" descr="preencoded.png">    </p:cNvPr>
+          <p:cNvPicPr>
+            <a:picLocks noChangeAspect="1"/>
+          </p:cNvPicPr>
+          <p:nvPr/>
+        </p:nvPicPr>
+        <p:blipFill>
+          <a:blip r:embed="rId5"/>
+          <a:stretch>
+            <a:fillRect/>
+          </a:stretch>
+        </p:blipFill>
+        <p:spPr>
+          <a:xfrm>
+            <a:off x="640080" y="4791456"/>
+            <a:ext cx="237744" cy="237744"/>
+          </a:xfrm>
+          <a:prstGeom prst="rect">
+            <a:avLst/>
+          </a:prstGeom>
+        </p:spPr>
+      </p:pic>
+      <p:sp>
+        <p:nvSpPr>
+          <p:cNvPr id="11" name="Text 6"/>
+          <p:cNvSpPr/>
+          <p:nvPr/>
+        </p:nvSpPr>
+        <p:spPr>
+          <a:xfrm>
+            <a:off x="1005840" y="4736592"/>
+            <a:ext cx="9144000" cy="365760"/>
+          </a:xfrm>
+          <a:prstGeom prst="rect">
+            <a:avLst/>
+          </a:prstGeom>
+          <a:noFill/>
+          <a:ln/>
+        </p:spPr>
+        <p:txBody>
+          <a:bodyPr wrap="square" rtlCol="0" anchor="ctr"/>
+          <a:lstStyle/>
+          <a:p>
+            <a:pPr indent="0" marL="0">
+              <a:buNone/>
+            </a:pPr>
+            <a:r>
+              <a:rPr lang="en-US" sz="1400" dirty="0">
+                <a:solidFill>
+                  <a:srgbClr val="E3E5F7"/>
+                </a:solidFill>
+                <a:latin typeface="Microsoft JhengHei" pitchFamily="34" charset="0"/>
+                <a:ea typeface="Microsoft JhengHei" pitchFamily="34" charset="-122"/>
+                <a:cs typeface="Microsoft JhengHei" pitchFamily="34" charset="-120"/>
+              </a:rPr>
+              <a:t>自訂技能放 OneDrive /Documents/Cowork/skills/ 的 SKILL.md（最多 50 個、每個 1MB）</a:t>
+            </a:r>
+            <a:endParaRPr lang="en-US" sz="1400" dirty="0"/>
+          </a:p>
+        </p:txBody>
+      </p:sp>
+      <p:pic>
+        <p:nvPicPr>
+          <p:cNvPr id="12" name="Image 3" descr="preencoded.png">    </p:cNvPr>
+          <p:cNvPicPr>
+            <a:picLocks noChangeAspect="1"/>
+          </p:cNvPicPr>
+          <p:nvPr/>
+        </p:nvPicPr>
+        <p:blipFill>
+          <a:blip r:embed="rId6"/>
+          <a:stretch>
+            <a:fillRect/>
+          </a:stretch>
+        </p:blipFill>
+        <p:spPr>
+          <a:xfrm>
+            <a:off x="640080" y="5266944"/>
+            <a:ext cx="237744" cy="237744"/>
+          </a:xfrm>
+          <a:prstGeom prst="rect">
+            <a:avLst/>
+          </a:prstGeom>
+        </p:spPr>
+      </p:pic>
+      <p:sp>
+        <p:nvSpPr>
+          <p:cNvPr id="13" name="Text 7"/>
+          <p:cNvSpPr/>
+          <p:nvPr/>
+        </p:nvSpPr>
+        <p:spPr>
+          <a:xfrm>
+            <a:off x="1005840" y="5212080"/>
+            <a:ext cx="9144000" cy="365760"/>
+          </a:xfrm>
+          <a:prstGeom prst="rect">
+            <a:avLst/>
+          </a:prstGeom>
+          <a:noFill/>
+          <a:ln/>
+        </p:spPr>
+        <p:txBody>
+          <a:bodyPr wrap="square" rtlCol="0" anchor="ctr"/>
+          <a:lstStyle/>
+          <a:p>
+            <a:pPr indent="0" marL="0">
+              <a:buNone/>
+            </a:pPr>
+            <a:r>
+              <a:rPr lang="en-US" sz="1400" dirty="0">
+                <a:solidFill>
+                  <a:srgbClr val="E3E5F7"/>
+                </a:solidFill>
+                <a:latin typeface="Microsoft JhengHei" pitchFamily="34" charset="0"/>
+                <a:ea typeface="Microsoft JhengHei" pitchFamily="34" charset="-122"/>
+                <a:cs typeface="Microsoft JhengHei" pitchFamily="34" charset="-120"/>
+              </a:rPr>
+              <a:t>模型選擇器：Auto（預設）、GPT 5.5 Frontier、GPT 5.6 Sol／Terra、Opus 5、Sonnet 5、Fable 5（預覽・預設關閉）</a:t>
+            </a:r>
+            <a:endParaRPr lang="en-US" sz="1400" dirty="0"/>
+          </a:p>
+        </p:txBody>
+      </p:sp>
+      <p:pic>
+        <p:nvPicPr>
+          <p:cNvPr id="14" name="Image 4" descr="preencoded.png">    </p:cNvPr>
+          <p:cNvPicPr>
+            <a:picLocks noChangeAspect="1"/>
+          </p:cNvPicPr>
+          <p:nvPr/>
+        </p:nvPicPr>
+        <p:blipFill>
+          <a:blip r:embed="rId7"/>
+          <a:stretch>
+            <a:fillRect/>
+          </a:stretch>
+        </p:blipFill>
+        <p:spPr>
+          <a:xfrm>
+            <a:off x="640080" y="5742432"/>
+            <a:ext cx="237744" cy="237744"/>
+          </a:xfrm>
+          <a:prstGeom prst="rect">
+            <a:avLst/>
+          </a:prstGeom>
+        </p:spPr>
+      </p:pic>
+      <p:sp>
+        <p:nvSpPr>
+          <p:cNvPr id="15" name="Text 8"/>
+          <p:cNvSpPr/>
+          <p:nvPr/>
+        </p:nvSpPr>
+        <p:spPr>
+          <a:xfrm>
+            <a:off x="1005840" y="5687568"/>
+            <a:ext cx="9144000" cy="365760"/>
+          </a:xfrm>
+          <a:prstGeom prst="rect">
+            <a:avLst/>
+          </a:prstGeom>
+          <a:noFill/>
+          <a:ln/>
+        </p:spPr>
+        <p:txBody>
+          <a:bodyPr wrap="square" rtlCol="0" anchor="ctr"/>
+          <a:lstStyle/>
+          <a:p>
+            <a:pPr indent="0" marL="0">
+              <a:buNone/>
+            </a:pPr>
+            <a:r>
+              <a:rPr lang="en-US" sz="1400" dirty="0">
+                <a:solidFill>
+                  <a:srgbClr val="E3E5F7"/>
+                </a:solidFill>
+                <a:latin typeface="Microsoft JhengHei" pitchFamily="34" charset="0"/>
+                <a:ea typeface="Microsoft JhengHei" pitchFamily="34" charset="-122"/>
+                <a:cs typeface="Microsoft JhengHei" pitchFamily="34" charset="-120"/>
+              </a:rPr>
+              <a:t>想要自動觸發？到「Automations」頁設定排程提示（上限 5 個）或事件觸發任務（收信／被 @提及）</a:t>
+            </a:r>
+            <a:endParaRPr lang="en-US" sz="1400" dirty="0"/>
+          </a:p>
+        </p:txBody>
+      </p:sp>
+    </p:spTree>
+  </p:cSld>
+  <p:clrMapOvr>
+    <a:masterClrMapping/>
+  </p:clrMapOvr>
+</p:sld>
+</file>
+
+<file path=ppt/slides/slide22.xml><?xml version="1.0" encoding="utf-8"?>
+<p:sld xmlns:a="http://schemas.openxmlformats.org/drawingml/2006/main" xmlns:r="http://schemas.openxmlformats.org/officeDocument/2006/relationships" xmlns:p="http://schemas.openxmlformats.org/presentationml/2006/main">
+  <p:cSld name="Slide 22">
+    <p:bg>
+      <p:bgPr>
+        <a:blipFill dpi="0" rotWithShape="1">
+          <a:blip r:embed="rId1">
+            <a:lum/>
+          </a:blip>
+          <a:srcRect/>
+          <a:stretch>
+            <a:fillRect/>
+          </a:stretch>
+        </a:blipFill>
+        <a:effectLst/>
+      </p:bgPr>
+    </p:bg>
+    <p:spTree>
+      <p:nvGrpSpPr>
+        <p:cNvPr id="1" name=""/>
+        <p:cNvGrpSpPr/>
+        <p:nvPr/>
+      </p:nvGrpSpPr>
+      <p:grpSpPr>
+        <a:xfrm>
+          <a:off x="0" y="0"/>
+          <a:ext cx="0" cy="0"/>
+          <a:chOff x="0" y="0"/>
+          <a:chExt cx="0" cy="0"/>
+        </a:xfrm>
+      </p:grpSpPr>
+      <p:sp>
+        <p:nvSpPr>
+          <p:cNvPr id="2" name="Text 0"/>
+          <p:cNvSpPr/>
+          <p:nvPr/>
+        </p:nvSpPr>
+        <p:spPr>
+          <a:xfrm>
             <a:off x="640080" y="2377440"/>
             <a:ext cx="10058400" cy="1097280"/>
           </a:xfrm>
@@ -17961,6 +18838,1846 @@
                 <a:ea typeface="Microsoft JhengHei" pitchFamily="34" charset="-122"/>
                 <a:cs typeface="Microsoft JhengHei" pitchFamily="34" charset="-120"/>
               </a:rPr>
+              <a:t>BEFORE YOU START</a:t>
+            </a:r>
+            <a:endParaRPr lang="en-US" sz="1200" dirty="0"/>
+          </a:p>
+        </p:txBody>
+      </p:sp>
+      <p:sp>
+        <p:nvSpPr>
+          <p:cNvPr id="4" name="Text 2"/>
+          <p:cNvSpPr/>
+          <p:nvPr/>
+        </p:nvSpPr>
+        <p:spPr>
+          <a:xfrm>
+            <a:off x="640080" y="786384"/>
+            <a:ext cx="10972800" cy="640080"/>
+          </a:xfrm>
+          <a:prstGeom prst="rect">
+            <a:avLst/>
+          </a:prstGeom>
+          <a:noFill/>
+          <a:ln/>
+        </p:spPr>
+        <p:txBody>
+          <a:bodyPr wrap="square" rtlCol="0" anchor="ctr"/>
+          <a:lstStyle/>
+          <a:p>
+            <a:pPr indent="0" marL="0">
+              <a:buNone/>
+            </a:pPr>
+            <a:r>
+              <a:rPr lang="en-US" sz="3000" b="1" dirty="0">
+                <a:solidFill>
+                  <a:srgbClr val="1E2235"/>
+                </a:solidFill>
+                <a:latin typeface="Microsoft JhengHei" pitchFamily="34" charset="0"/>
+                <a:ea typeface="Microsoft JhengHei" pitchFamily="34" charset="-122"/>
+                <a:cs typeface="Microsoft JhengHei" pitchFamily="34" charset="-120"/>
+              </a:rPr>
+              <a:t>練習環境準備</a:t>
+            </a:r>
+            <a:endParaRPr lang="en-US" sz="3000" dirty="0"/>
+          </a:p>
+        </p:txBody>
+      </p:sp>
+      <p:sp>
+        <p:nvSpPr>
+          <p:cNvPr id="5" name="Text 3"/>
+          <p:cNvSpPr/>
+          <p:nvPr/>
+        </p:nvSpPr>
+        <p:spPr>
+          <a:xfrm>
+            <a:off x="640080" y="1481328"/>
+            <a:ext cx="10972800" cy="329184"/>
+          </a:xfrm>
+          <a:prstGeom prst="rect">
+            <a:avLst/>
+          </a:prstGeom>
+          <a:noFill/>
+          <a:ln/>
+        </p:spPr>
+        <p:txBody>
+          <a:bodyPr wrap="square" rtlCol="0" anchor="ctr"/>
+          <a:lstStyle/>
+          <a:p>
+            <a:pPr indent="0" marL="0">
+              <a:buNone/>
+            </a:pPr>
+            <a:r>
+              <a:rPr lang="en-US" sz="1300" dirty="0">
+                <a:solidFill>
+                  <a:srgbClr val="5B6079"/>
+                </a:solidFill>
+                <a:latin typeface="Microsoft JhengHei" pitchFamily="34" charset="0"/>
+                <a:ea typeface="Microsoft JhengHei" pitchFamily="34" charset="-122"/>
+                <a:cs typeface="Microsoft JhengHei" pitchFamily="34" charset="-120"/>
+              </a:rPr>
+              <a:t>素材課前先放進 OneDrive 的 文件/Cowork_Lab/航空業/，練習時 Cowork 自己去找 · 準備時間 約 12 分鐘</a:t>
+            </a:r>
+            <a:endParaRPr lang="en-US" sz="1300" dirty="0"/>
+          </a:p>
+        </p:txBody>
+      </p:sp>
+      <p:sp>
+        <p:nvSpPr>
+          <p:cNvPr id="6" name="Shape 4"/>
+          <p:cNvSpPr/>
+          <p:nvPr/>
+        </p:nvSpPr>
+        <p:spPr>
+          <a:xfrm>
+            <a:off x="640080" y="1874520"/>
+            <a:ext cx="5272888" cy="777240"/>
+          </a:xfrm>
+          <a:prstGeom prst="rect">
+            <a:avLst/>
+          </a:prstGeom>
+          <a:solidFill>
+            <a:srgbClr val="FFFFFF"/>
+          </a:solidFill>
+          <a:ln w="12700">
+            <a:solidFill>
+              <a:srgbClr val="E4E7F2"/>
+            </a:solidFill>
+            <a:prstDash val="solid"/>
+          </a:ln>
+        </p:spPr>
+      </p:sp>
+      <p:sp>
+        <p:nvSpPr>
+          <p:cNvPr id="7" name="Shape 5"/>
+          <p:cNvSpPr/>
+          <p:nvPr/>
+        </p:nvSpPr>
+        <p:spPr>
+          <a:xfrm>
+            <a:off x="640080" y="1874520"/>
+            <a:ext cx="68580" cy="777240"/>
+          </a:xfrm>
+          <a:prstGeom prst="rect">
+            <a:avLst/>
+          </a:prstGeom>
+          <a:solidFill>
+            <a:srgbClr val="6366F1"/>
+          </a:solidFill>
+          <a:ln/>
+        </p:spPr>
+      </p:sp>
+      <p:sp>
+        <p:nvSpPr>
+          <p:cNvPr id="8" name="Text 6"/>
+          <p:cNvSpPr/>
+          <p:nvPr/>
+        </p:nvSpPr>
+        <p:spPr>
+          <a:xfrm>
+            <a:off x="804672" y="1929384"/>
+            <a:ext cx="411480" cy="329184"/>
+          </a:xfrm>
+          <a:prstGeom prst="rect">
+            <a:avLst/>
+          </a:prstGeom>
+          <a:noFill/>
+          <a:ln/>
+        </p:spPr>
+        <p:txBody>
+          <a:bodyPr wrap="square" rtlCol="0" anchor="ctr"/>
+          <a:lstStyle/>
+          <a:p>
+            <a:pPr algn="ctr" indent="0" marL="0">
+              <a:buNone/>
+            </a:pPr>
+            <a:r>
+              <a:rPr lang="en-US" sz="1500" dirty="0">
+                <a:solidFill>
+                  <a:srgbClr val="000000"/>
+                </a:solidFill>
+                <a:latin typeface="Microsoft JhengHei" pitchFamily="34" charset="0"/>
+                <a:ea typeface="Microsoft JhengHei" pitchFamily="34" charset="-122"/>
+                <a:cs typeface="Microsoft JhengHei" pitchFamily="34" charset="-120"/>
+              </a:rPr>
+              <a:t>📁</a:t>
+            </a:r>
+            <a:endParaRPr lang="en-US" sz="1500" dirty="0"/>
+          </a:p>
+        </p:txBody>
+      </p:sp>
+      <p:sp>
+        <p:nvSpPr>
+          <p:cNvPr id="9" name="Text 7"/>
+          <p:cNvSpPr/>
+          <p:nvPr/>
+        </p:nvSpPr>
+        <p:spPr>
+          <a:xfrm>
+            <a:off x="1243584" y="1920240"/>
+            <a:ext cx="4495648" cy="292608"/>
+          </a:xfrm>
+          <a:prstGeom prst="rect">
+            <a:avLst/>
+          </a:prstGeom>
+          <a:noFill/>
+          <a:ln/>
+        </p:spPr>
+        <p:txBody>
+          <a:bodyPr wrap="square" rtlCol="0" anchor="ctr"/>
+          <a:lstStyle/>
+          <a:p>
+            <a:pPr indent="0" marL="0">
+              <a:buNone/>
+            </a:pPr>
+            <a:r>
+              <a:rPr lang="en-US" sz="1250" b="1" dirty="0">
+                <a:solidFill>
+                  <a:srgbClr val="1E2235"/>
+                </a:solidFill>
+                <a:latin typeface="Microsoft JhengHei" pitchFamily="34" charset="0"/>
+                <a:ea typeface="Microsoft JhengHei" pitchFamily="34" charset="-122"/>
+                <a:cs typeface="Microsoft JhengHei" pitchFamily="34" charset="-120"/>
+              </a:rPr>
+              <a:t>建立 OneDrive 資料夾，把四個情境的素材放進去</a:t>
+            </a:r>
+            <a:endParaRPr lang="en-US" sz="1250" dirty="0"/>
+          </a:p>
+        </p:txBody>
+      </p:sp>
+      <p:sp>
+        <p:nvSpPr>
+          <p:cNvPr id="10" name="Text 8"/>
+          <p:cNvSpPr/>
+          <p:nvPr/>
+        </p:nvSpPr>
+        <p:spPr>
+          <a:xfrm>
+            <a:off x="1243584" y="2194560"/>
+            <a:ext cx="4495648" cy="411480"/>
+          </a:xfrm>
+          <a:prstGeom prst="rect">
+            <a:avLst/>
+          </a:prstGeom>
+          <a:noFill/>
+          <a:ln/>
+        </p:spPr>
+        <p:txBody>
+          <a:bodyPr wrap="square" rtlCol="0" anchor="ctr"/>
+          <a:lstStyle/>
+          <a:p>
+            <a:pPr indent="0" marL="0">
+              <a:lnSpc>
+                <a:spcPct val="112000"/>
+              </a:lnSpc>
+              <a:buNone/>
+            </a:pPr>
+            <a:r>
+              <a:rPr lang="en-US" sz="1050" dirty="0">
+                <a:solidFill>
+                  <a:srgbClr val="5B6079"/>
+                </a:solidFill>
+                <a:latin typeface="Microsoft JhengHei" pitchFamily="34" charset="0"/>
+                <a:ea typeface="Microsoft JhengHei" pitchFamily="34" charset="-122"/>
+                <a:cs typeface="Microsoft JhengHei" pitchFamily="34" charset="-120"/>
+              </a:rPr>
+              <a:t>在 OneDrive 建立 文件/Cowork_Lab/航空業/，底下再開四個子資料夾：AIR1_航班異常…</a:t>
+            </a:r>
+            <a:endParaRPr lang="en-US" sz="1050" dirty="0"/>
+          </a:p>
+        </p:txBody>
+      </p:sp>
+      <p:sp>
+        <p:nvSpPr>
+          <p:cNvPr id="11" name="Shape 9"/>
+          <p:cNvSpPr/>
+          <p:nvPr/>
+        </p:nvSpPr>
+        <p:spPr>
+          <a:xfrm>
+            <a:off x="6278728" y="1874520"/>
+            <a:ext cx="5272888" cy="777240"/>
+          </a:xfrm>
+          <a:prstGeom prst="rect">
+            <a:avLst/>
+          </a:prstGeom>
+          <a:solidFill>
+            <a:srgbClr val="FFFFFF"/>
+          </a:solidFill>
+          <a:ln w="12700">
+            <a:solidFill>
+              <a:srgbClr val="E4E7F2"/>
+            </a:solidFill>
+            <a:prstDash val="solid"/>
+          </a:ln>
+        </p:spPr>
+      </p:sp>
+      <p:sp>
+        <p:nvSpPr>
+          <p:cNvPr id="12" name="Shape 10"/>
+          <p:cNvSpPr/>
+          <p:nvPr/>
+        </p:nvSpPr>
+        <p:spPr>
+          <a:xfrm>
+            <a:off x="6278728" y="1874520"/>
+            <a:ext cx="68580" cy="777240"/>
+          </a:xfrm>
+          <a:prstGeom prst="rect">
+            <a:avLst/>
+          </a:prstGeom>
+          <a:solidFill>
+            <a:srgbClr val="6366F1"/>
+          </a:solidFill>
+          <a:ln/>
+        </p:spPr>
+      </p:sp>
+      <p:sp>
+        <p:nvSpPr>
+          <p:cNvPr id="13" name="Text 11"/>
+          <p:cNvSpPr/>
+          <p:nvPr/>
+        </p:nvSpPr>
+        <p:spPr>
+          <a:xfrm>
+            <a:off x="6443320" y="1929384"/>
+            <a:ext cx="411480" cy="329184"/>
+          </a:xfrm>
+          <a:prstGeom prst="rect">
+            <a:avLst/>
+          </a:prstGeom>
+          <a:noFill/>
+          <a:ln/>
+        </p:spPr>
+        <p:txBody>
+          <a:bodyPr wrap="square" rtlCol="0" anchor="ctr"/>
+          <a:lstStyle/>
+          <a:p>
+            <a:pPr algn="ctr" indent="0" marL="0">
+              <a:buNone/>
+            </a:pPr>
+            <a:r>
+              <a:rPr lang="en-US" sz="1500" dirty="0">
+                <a:solidFill>
+                  <a:srgbClr val="000000"/>
+                </a:solidFill>
+                <a:latin typeface="Microsoft JhengHei" pitchFamily="34" charset="0"/>
+                <a:ea typeface="Microsoft JhengHei" pitchFamily="34" charset="-122"/>
+                <a:cs typeface="Microsoft JhengHei" pitchFamily="34" charset="-120"/>
+              </a:rPr>
+              <a:t>📇</a:t>
+            </a:r>
+            <a:endParaRPr lang="en-US" sz="1500" dirty="0"/>
+          </a:p>
+        </p:txBody>
+      </p:sp>
+      <p:sp>
+        <p:nvSpPr>
+          <p:cNvPr id="14" name="Text 12"/>
+          <p:cNvSpPr/>
+          <p:nvPr/>
+        </p:nvSpPr>
+        <p:spPr>
+          <a:xfrm>
+            <a:off x="6882232" y="1920240"/>
+            <a:ext cx="4495648" cy="292608"/>
+          </a:xfrm>
+          <a:prstGeom prst="rect">
+            <a:avLst/>
+          </a:prstGeom>
+          <a:noFill/>
+          <a:ln/>
+        </p:spPr>
+        <p:txBody>
+          <a:bodyPr wrap="square" rtlCol="0" anchor="ctr"/>
+          <a:lstStyle/>
+          <a:p>
+            <a:pPr indent="0" marL="0">
+              <a:buNone/>
+            </a:pPr>
+            <a:r>
+              <a:rPr lang="en-US" sz="1250" b="1" dirty="0">
+                <a:solidFill>
+                  <a:srgbClr val="1E2235"/>
+                </a:solidFill>
+                <a:latin typeface="Microsoft JhengHei" pitchFamily="34" charset="0"/>
+                <a:ea typeface="Microsoft JhengHei" pitchFamily="34" charset="-122"/>
+                <a:cs typeface="Microsoft JhengHei" pitchFamily="34" charset="-120"/>
+              </a:rPr>
+              <a:t>把聯絡窗口清單放在母層，信件才寄得出去</a:t>
+            </a:r>
+            <a:endParaRPr lang="en-US" sz="1250" dirty="0"/>
+          </a:p>
+        </p:txBody>
+      </p:sp>
+      <p:sp>
+        <p:nvSpPr>
+          <p:cNvPr id="15" name="Text 13"/>
+          <p:cNvSpPr/>
+          <p:nvPr/>
+        </p:nvSpPr>
+        <p:spPr>
+          <a:xfrm>
+            <a:off x="6882232" y="2194560"/>
+            <a:ext cx="4495648" cy="411480"/>
+          </a:xfrm>
+          <a:prstGeom prst="rect">
+            <a:avLst/>
+          </a:prstGeom>
+          <a:noFill/>
+          <a:ln/>
+        </p:spPr>
+        <p:txBody>
+          <a:bodyPr wrap="square" rtlCol="0" anchor="ctr"/>
+          <a:lstStyle/>
+          <a:p>
+            <a:pPr indent="0" marL="0">
+              <a:lnSpc>
+                <a:spcPct val="112000"/>
+              </a:lnSpc>
+              <a:buNone/>
+            </a:pPr>
+            <a:r>
+              <a:rPr lang="en-US" sz="1050" dirty="0">
+                <a:solidFill>
+                  <a:srgbClr val="5B6079"/>
+                </a:solidFill>
+                <a:latin typeface="Microsoft JhengHei" pitchFamily="34" charset="0"/>
+                <a:ea typeface="Microsoft JhengHei" pitchFamily="34" charset="-122"/>
+                <a:cs typeface="Microsoft JhengHei" pitchFamily="34" charset="-120"/>
+              </a:rPr>
+              <a:t>聯絡窗口清單.md 要放在 航空業 母資料夾，不要放進任何子資料夾 —— 放母層 Cowork 比較容易撈到。</a:t>
+            </a:r>
+            <a:endParaRPr lang="en-US" sz="1050" dirty="0"/>
+          </a:p>
+        </p:txBody>
+      </p:sp>
+      <p:sp>
+        <p:nvSpPr>
+          <p:cNvPr id="16" name="Shape 14"/>
+          <p:cNvSpPr/>
+          <p:nvPr/>
+        </p:nvSpPr>
+        <p:spPr>
+          <a:xfrm>
+            <a:off x="640080" y="2779776"/>
+            <a:ext cx="5272888" cy="777240"/>
+          </a:xfrm>
+          <a:prstGeom prst="rect">
+            <a:avLst/>
+          </a:prstGeom>
+          <a:solidFill>
+            <a:srgbClr val="FFFFFF"/>
+          </a:solidFill>
+          <a:ln w="12700">
+            <a:solidFill>
+              <a:srgbClr val="E4E7F2"/>
+            </a:solidFill>
+            <a:prstDash val="solid"/>
+          </a:ln>
+        </p:spPr>
+      </p:sp>
+      <p:sp>
+        <p:nvSpPr>
+          <p:cNvPr id="17" name="Shape 15"/>
+          <p:cNvSpPr/>
+          <p:nvPr/>
+        </p:nvSpPr>
+        <p:spPr>
+          <a:xfrm>
+            <a:off x="640080" y="2779776"/>
+            <a:ext cx="68580" cy="777240"/>
+          </a:xfrm>
+          <a:prstGeom prst="rect">
+            <a:avLst/>
+          </a:prstGeom>
+          <a:solidFill>
+            <a:srgbClr val="6366F1"/>
+          </a:solidFill>
+          <a:ln/>
+        </p:spPr>
+      </p:sp>
+      <p:sp>
+        <p:nvSpPr>
+          <p:cNvPr id="18" name="Text 16"/>
+          <p:cNvSpPr/>
+          <p:nvPr/>
+        </p:nvSpPr>
+        <p:spPr>
+          <a:xfrm>
+            <a:off x="804672" y="2834640"/>
+            <a:ext cx="411480" cy="329184"/>
+          </a:xfrm>
+          <a:prstGeom prst="rect">
+            <a:avLst/>
+          </a:prstGeom>
+          <a:noFill/>
+          <a:ln/>
+        </p:spPr>
+        <p:txBody>
+          <a:bodyPr wrap="square" rtlCol="0" anchor="ctr"/>
+          <a:lstStyle/>
+          <a:p>
+            <a:pPr algn="ctr" indent="0" marL="0">
+              <a:buNone/>
+            </a:pPr>
+            <a:r>
+              <a:rPr lang="en-US" sz="1500" dirty="0">
+                <a:solidFill>
+                  <a:srgbClr val="000000"/>
+                </a:solidFill>
+                <a:latin typeface="Microsoft JhengHei" pitchFamily="34" charset="0"/>
+                <a:ea typeface="Microsoft JhengHei" pitchFamily="34" charset="-122"/>
+                <a:cs typeface="Microsoft JhengHei" pitchFamily="34" charset="-120"/>
+              </a:rPr>
+              <a:t>🎨</a:t>
+            </a:r>
+            <a:endParaRPr lang="en-US" sz="1500" dirty="0"/>
+          </a:p>
+        </p:txBody>
+      </p:sp>
+      <p:sp>
+        <p:nvSpPr>
+          <p:cNvPr id="19" name="Text 17"/>
+          <p:cNvSpPr/>
+          <p:nvPr/>
+        </p:nvSpPr>
+        <p:spPr>
+          <a:xfrm>
+            <a:off x="1243584" y="2825496"/>
+            <a:ext cx="4495648" cy="292608"/>
+          </a:xfrm>
+          <a:prstGeom prst="rect">
+            <a:avLst/>
+          </a:prstGeom>
+          <a:noFill/>
+          <a:ln/>
+        </p:spPr>
+        <p:txBody>
+          <a:bodyPr wrap="square" rtlCol="0" anchor="ctr"/>
+          <a:lstStyle/>
+          <a:p>
+            <a:pPr indent="0" marL="0">
+              <a:buNone/>
+            </a:pPr>
+            <a:r>
+              <a:rPr lang="en-US" sz="1250" b="1" dirty="0">
+                <a:solidFill>
+                  <a:srgbClr val="1E2235"/>
+                </a:solidFill>
+                <a:latin typeface="Microsoft JhengHei" pitchFamily="34" charset="0"/>
+                <a:ea typeface="Microsoft JhengHei" pitchFamily="34" charset="-122"/>
+                <a:cs typeface="Microsoft JhengHei" pitchFamily="34" charset="-120"/>
+              </a:rPr>
+              <a:t>⚠️ 品牌範本必須放 OneDrive 根目錄（AIR4 專用，最容易出錯）</a:t>
+            </a:r>
+            <a:endParaRPr lang="en-US" sz="1250" dirty="0"/>
+          </a:p>
+        </p:txBody>
+      </p:sp>
+      <p:sp>
+        <p:nvSpPr>
+          <p:cNvPr id="20" name="Text 18"/>
+          <p:cNvSpPr/>
+          <p:nvPr/>
+        </p:nvSpPr>
+        <p:spPr>
+          <a:xfrm>
+            <a:off x="1243584" y="3099816"/>
+            <a:ext cx="4495648" cy="411480"/>
+          </a:xfrm>
+          <a:prstGeom prst="rect">
+            <a:avLst/>
+          </a:prstGeom>
+          <a:noFill/>
+          <a:ln/>
+        </p:spPr>
+        <p:txBody>
+          <a:bodyPr wrap="square" rtlCol="0" anchor="ctr"/>
+          <a:lstStyle/>
+          <a:p>
+            <a:pPr indent="0" marL="0">
+              <a:lnSpc>
+                <a:spcPct val="112000"/>
+              </a:lnSpc>
+              <a:buNone/>
+            </a:pPr>
+            <a:r>
+              <a:rPr lang="en-US" sz="1050" dirty="0">
+                <a:solidFill>
+                  <a:srgbClr val="5B6079"/>
+                </a:solidFill>
+                <a:latin typeface="Microsoft JhengHei" pitchFamily="34" charset="0"/>
+                <a:ea typeface="Microsoft JhengHei" pitchFamily="34" charset="-122"/>
+                <a:cs typeface="Microsoft JhengHei" pitchFamily="34" charset="-120"/>
+              </a:rPr>
+              <a:t>華翔航空_簡報範本.potx 必須放在 OneDrive 的根目錄…</a:t>
+            </a:r>
+            <a:endParaRPr lang="en-US" sz="1050" dirty="0"/>
+          </a:p>
+        </p:txBody>
+      </p:sp>
+      <p:sp>
+        <p:nvSpPr>
+          <p:cNvPr id="21" name="Shape 19"/>
+          <p:cNvSpPr/>
+          <p:nvPr/>
+        </p:nvSpPr>
+        <p:spPr>
+          <a:xfrm>
+            <a:off x="6278728" y="2779776"/>
+            <a:ext cx="5272888" cy="777240"/>
+          </a:xfrm>
+          <a:prstGeom prst="rect">
+            <a:avLst/>
+          </a:prstGeom>
+          <a:solidFill>
+            <a:srgbClr val="FFFFFF"/>
+          </a:solidFill>
+          <a:ln w="12700">
+            <a:solidFill>
+              <a:srgbClr val="E4E7F2"/>
+            </a:solidFill>
+            <a:prstDash val="solid"/>
+          </a:ln>
+        </p:spPr>
+      </p:sp>
+      <p:sp>
+        <p:nvSpPr>
+          <p:cNvPr id="22" name="Shape 20"/>
+          <p:cNvSpPr/>
+          <p:nvPr/>
+        </p:nvSpPr>
+        <p:spPr>
+          <a:xfrm>
+            <a:off x="6278728" y="2779776"/>
+            <a:ext cx="68580" cy="777240"/>
+          </a:xfrm>
+          <a:prstGeom prst="rect">
+            <a:avLst/>
+          </a:prstGeom>
+          <a:solidFill>
+            <a:srgbClr val="6366F1"/>
+          </a:solidFill>
+          <a:ln/>
+        </p:spPr>
+      </p:sp>
+      <p:sp>
+        <p:nvSpPr>
+          <p:cNvPr id="23" name="Text 21"/>
+          <p:cNvSpPr/>
+          <p:nvPr/>
+        </p:nvSpPr>
+        <p:spPr>
+          <a:xfrm>
+            <a:off x="6443320" y="2834640"/>
+            <a:ext cx="411480" cy="329184"/>
+          </a:xfrm>
+          <a:prstGeom prst="rect">
+            <a:avLst/>
+          </a:prstGeom>
+          <a:noFill/>
+          <a:ln/>
+        </p:spPr>
+        <p:txBody>
+          <a:bodyPr wrap="square" rtlCol="0" anchor="ctr"/>
+          <a:lstStyle/>
+          <a:p>
+            <a:pPr algn="ctr" indent="0" marL="0">
+              <a:buNone/>
+            </a:pPr>
+            <a:r>
+              <a:rPr lang="en-US" sz="1500" dirty="0">
+                <a:solidFill>
+                  <a:srgbClr val="000000"/>
+                </a:solidFill>
+                <a:latin typeface="Microsoft JhengHei" pitchFamily="34" charset="0"/>
+                <a:ea typeface="Microsoft JhengHei" pitchFamily="34" charset="-122"/>
+                <a:cs typeface="Microsoft JhengHei" pitchFamily="34" charset="-120"/>
+              </a:rPr>
+              <a:t>📧</a:t>
+            </a:r>
+            <a:endParaRPr lang="en-US" sz="1500" dirty="0"/>
+          </a:p>
+        </p:txBody>
+      </p:sp>
+      <p:sp>
+        <p:nvSpPr>
+          <p:cNvPr id="24" name="Text 22"/>
+          <p:cNvSpPr/>
+          <p:nvPr/>
+        </p:nvSpPr>
+        <p:spPr>
+          <a:xfrm>
+            <a:off x="6882232" y="2825496"/>
+            <a:ext cx="4495648" cy="292608"/>
+          </a:xfrm>
+          <a:prstGeom prst="rect">
+            <a:avLst/>
+          </a:prstGeom>
+          <a:noFill/>
+          <a:ln/>
+        </p:spPr>
+        <p:txBody>
+          <a:bodyPr wrap="square" rtlCol="0" anchor="ctr"/>
+          <a:lstStyle/>
+          <a:p>
+            <a:pPr indent="0" marL="0">
+              <a:buNone/>
+            </a:pPr>
+            <a:r>
+              <a:rPr lang="en-US" sz="1250" b="1" dirty="0">
+                <a:solidFill>
+                  <a:srgbClr val="1E2235"/>
+                </a:solidFill>
+                <a:latin typeface="Microsoft JhengHei" pitchFamily="34" charset="0"/>
+                <a:ea typeface="Microsoft JhengHei" pitchFamily="34" charset="-122"/>
+                <a:cs typeface="Microsoft JhengHei" pitchFamily="34" charset="-120"/>
+              </a:rPr>
+              <a:t>寄一封 AIR1 的航班取消通知給自己</a:t>
+            </a:r>
+            <a:endParaRPr lang="en-US" sz="1250" dirty="0"/>
+          </a:p>
+        </p:txBody>
+      </p:sp>
+      <p:sp>
+        <p:nvSpPr>
+          <p:cNvPr id="25" name="Text 23"/>
+          <p:cNvSpPr/>
+          <p:nvPr/>
+        </p:nvSpPr>
+        <p:spPr>
+          <a:xfrm>
+            <a:off x="6882232" y="3099816"/>
+            <a:ext cx="4495648" cy="411480"/>
+          </a:xfrm>
+          <a:prstGeom prst="rect">
+            <a:avLst/>
+          </a:prstGeom>
+          <a:noFill/>
+          <a:ln/>
+        </p:spPr>
+        <p:txBody>
+          <a:bodyPr wrap="square" rtlCol="0" anchor="ctr"/>
+          <a:lstStyle/>
+          <a:p>
+            <a:pPr indent="0" marL="0">
+              <a:lnSpc>
+                <a:spcPct val="112000"/>
+              </a:lnSpc>
+              <a:buNone/>
+            </a:pPr>
+            <a:r>
+              <a:rPr lang="en-US" sz="1050" dirty="0">
+                <a:solidFill>
+                  <a:srgbClr val="5B6079"/>
+                </a:solidFill>
+                <a:latin typeface="Microsoft JhengHei" pitchFamily="34" charset="0"/>
+                <a:ea typeface="Microsoft JhengHei" pitchFamily="34" charset="-122"/>
+                <a:cs typeface="Microsoft JhengHei" pitchFamily="34" charset="-120"/>
+              </a:rPr>
+              <a:t>照 AIR1_航班取消通知.md 的主旨與內文，用你自己的帳號寄一封給自己。</a:t>
+            </a:r>
+            <a:endParaRPr lang="en-US" sz="1050" dirty="0"/>
+          </a:p>
+        </p:txBody>
+      </p:sp>
+      <p:sp>
+        <p:nvSpPr>
+          <p:cNvPr id="26" name="Shape 24"/>
+          <p:cNvSpPr/>
+          <p:nvPr/>
+        </p:nvSpPr>
+        <p:spPr>
+          <a:xfrm>
+            <a:off x="640080" y="3685032"/>
+            <a:ext cx="5272888" cy="777240"/>
+          </a:xfrm>
+          <a:prstGeom prst="rect">
+            <a:avLst/>
+          </a:prstGeom>
+          <a:solidFill>
+            <a:srgbClr val="FFFFFF"/>
+          </a:solidFill>
+          <a:ln w="12700">
+            <a:solidFill>
+              <a:srgbClr val="E4E7F2"/>
+            </a:solidFill>
+            <a:prstDash val="solid"/>
+          </a:ln>
+        </p:spPr>
+      </p:sp>
+      <p:sp>
+        <p:nvSpPr>
+          <p:cNvPr id="27" name="Shape 25"/>
+          <p:cNvSpPr/>
+          <p:nvPr/>
+        </p:nvSpPr>
+        <p:spPr>
+          <a:xfrm>
+            <a:off x="640080" y="3685032"/>
+            <a:ext cx="68580" cy="777240"/>
+          </a:xfrm>
+          <a:prstGeom prst="rect">
+            <a:avLst/>
+          </a:prstGeom>
+          <a:solidFill>
+            <a:srgbClr val="6366F1"/>
+          </a:solidFill>
+          <a:ln/>
+        </p:spPr>
+      </p:sp>
+      <p:sp>
+        <p:nvSpPr>
+          <p:cNvPr id="28" name="Text 26"/>
+          <p:cNvSpPr/>
+          <p:nvPr/>
+        </p:nvSpPr>
+        <p:spPr>
+          <a:xfrm>
+            <a:off x="804672" y="3739896"/>
+            <a:ext cx="411480" cy="329184"/>
+          </a:xfrm>
+          <a:prstGeom prst="rect">
+            <a:avLst/>
+          </a:prstGeom>
+          <a:noFill/>
+          <a:ln/>
+        </p:spPr>
+        <p:txBody>
+          <a:bodyPr wrap="square" rtlCol="0" anchor="ctr"/>
+          <a:lstStyle/>
+          <a:p>
+            <a:pPr algn="ctr" indent="0" marL="0">
+              <a:buNone/>
+            </a:pPr>
+            <a:r>
+              <a:rPr lang="en-US" sz="1500" dirty="0">
+                <a:solidFill>
+                  <a:srgbClr val="000000"/>
+                </a:solidFill>
+                <a:latin typeface="Microsoft JhengHei" pitchFamily="34" charset="0"/>
+                <a:ea typeface="Microsoft JhengHei" pitchFamily="34" charset="-122"/>
+                <a:cs typeface="Microsoft JhengHei" pitchFamily="34" charset="-120"/>
+              </a:rPr>
+              <a:t>💬</a:t>
+            </a:r>
+            <a:endParaRPr lang="en-US" sz="1500" dirty="0"/>
+          </a:p>
+        </p:txBody>
+      </p:sp>
+      <p:sp>
+        <p:nvSpPr>
+          <p:cNvPr id="29" name="Text 27"/>
+          <p:cNvSpPr/>
+          <p:nvPr/>
+        </p:nvSpPr>
+        <p:spPr>
+          <a:xfrm>
+            <a:off x="1243584" y="3730752"/>
+            <a:ext cx="4495648" cy="292608"/>
+          </a:xfrm>
+          <a:prstGeom prst="rect">
+            <a:avLst/>
+          </a:prstGeom>
+          <a:noFill/>
+          <a:ln/>
+        </p:spPr>
+        <p:txBody>
+          <a:bodyPr wrap="square" rtlCol="0" anchor="ctr"/>
+          <a:lstStyle/>
+          <a:p>
+            <a:pPr indent="0" marL="0">
+              <a:buNone/>
+            </a:pPr>
+            <a:r>
+              <a:rPr lang="en-US" sz="1250" b="1" dirty="0">
+                <a:solidFill>
+                  <a:srgbClr val="1E2235"/>
+                </a:solidFill>
+                <a:latin typeface="Microsoft JhengHei" pitchFamily="34" charset="0"/>
+                <a:ea typeface="Microsoft JhengHei" pitchFamily="34" charset="-122"/>
+                <a:cs typeface="Microsoft JhengHei" pitchFamily="34" charset="-120"/>
+              </a:rPr>
+              <a:t>⚠️ 課前先建好「機坪安全通報」頻道（AIR3 專用，名稱要一字不差）</a:t>
+            </a:r>
+            <a:endParaRPr lang="en-US" sz="1250" dirty="0"/>
+          </a:p>
+        </p:txBody>
+      </p:sp>
+      <p:sp>
+        <p:nvSpPr>
+          <p:cNvPr id="30" name="Text 28"/>
+          <p:cNvSpPr/>
+          <p:nvPr/>
+        </p:nvSpPr>
+        <p:spPr>
+          <a:xfrm>
+            <a:off x="1243584" y="4005072"/>
+            <a:ext cx="4495648" cy="411480"/>
+          </a:xfrm>
+          <a:prstGeom prst="rect">
+            <a:avLst/>
+          </a:prstGeom>
+          <a:noFill/>
+          <a:ln/>
+        </p:spPr>
+        <p:txBody>
+          <a:bodyPr wrap="square" rtlCol="0" anchor="ctr"/>
+          <a:lstStyle/>
+          <a:p>
+            <a:pPr indent="0" marL="0">
+              <a:lnSpc>
+                <a:spcPct val="112000"/>
+              </a:lnSpc>
+              <a:buNone/>
+            </a:pPr>
+            <a:r>
+              <a:rPr lang="en-US" sz="1050" dirty="0">
+                <a:solidFill>
+                  <a:srgbClr val="5B6079"/>
+                </a:solidFill>
+                <a:latin typeface="Microsoft JhengHei" pitchFamily="34" charset="0"/>
+                <a:ea typeface="Microsoft JhengHei" pitchFamily="34" charset="-122"/>
+                <a:cs typeface="Microsoft JhengHei" pitchFamily="34" charset="-120"/>
+              </a:rPr>
+              <a:t>AIR3 的觸發源不是 Email，是 Teams @提及，這一節三件事任一沒做到，現場就會卡住。</a:t>
+            </a:r>
+            <a:endParaRPr lang="en-US" sz="1050" dirty="0"/>
+          </a:p>
+        </p:txBody>
+      </p:sp>
+      <p:sp>
+        <p:nvSpPr>
+          <p:cNvPr id="31" name="Shape 29"/>
+          <p:cNvSpPr/>
+          <p:nvPr/>
+        </p:nvSpPr>
+        <p:spPr>
+          <a:xfrm>
+            <a:off x="6278728" y="3685032"/>
+            <a:ext cx="5272888" cy="777240"/>
+          </a:xfrm>
+          <a:prstGeom prst="rect">
+            <a:avLst/>
+          </a:prstGeom>
+          <a:solidFill>
+            <a:srgbClr val="FFFFFF"/>
+          </a:solidFill>
+          <a:ln w="12700">
+            <a:solidFill>
+              <a:srgbClr val="E4E7F2"/>
+            </a:solidFill>
+            <a:prstDash val="solid"/>
+          </a:ln>
+        </p:spPr>
+      </p:sp>
+      <p:sp>
+        <p:nvSpPr>
+          <p:cNvPr id="32" name="Shape 30"/>
+          <p:cNvSpPr/>
+          <p:nvPr/>
+        </p:nvSpPr>
+        <p:spPr>
+          <a:xfrm>
+            <a:off x="6278728" y="3685032"/>
+            <a:ext cx="68580" cy="777240"/>
+          </a:xfrm>
+          <a:prstGeom prst="rect">
+            <a:avLst/>
+          </a:prstGeom>
+          <a:solidFill>
+            <a:srgbClr val="6366F1"/>
+          </a:solidFill>
+          <a:ln/>
+        </p:spPr>
+      </p:sp>
+      <p:sp>
+        <p:nvSpPr>
+          <p:cNvPr id="33" name="Text 31"/>
+          <p:cNvSpPr/>
+          <p:nvPr/>
+        </p:nvSpPr>
+        <p:spPr>
+          <a:xfrm>
+            <a:off x="6443320" y="3739896"/>
+            <a:ext cx="411480" cy="329184"/>
+          </a:xfrm>
+          <a:prstGeom prst="rect">
+            <a:avLst/>
+          </a:prstGeom>
+          <a:noFill/>
+          <a:ln/>
+        </p:spPr>
+        <p:txBody>
+          <a:bodyPr wrap="square" rtlCol="0" anchor="ctr"/>
+          <a:lstStyle/>
+          <a:p>
+            <a:pPr algn="ctr" indent="0" marL="0">
+              <a:buNone/>
+            </a:pPr>
+            <a:r>
+              <a:rPr lang="en-US" sz="1500" dirty="0">
+                <a:solidFill>
+                  <a:srgbClr val="000000"/>
+                </a:solidFill>
+                <a:latin typeface="Microsoft JhengHei" pitchFamily="34" charset="0"/>
+                <a:ea typeface="Microsoft JhengHei" pitchFamily="34" charset="-122"/>
+                <a:cs typeface="Microsoft JhengHei" pitchFamily="34" charset="-120"/>
+              </a:rPr>
+              <a:t>📅</a:t>
+            </a:r>
+            <a:endParaRPr lang="en-US" sz="1500" dirty="0"/>
+          </a:p>
+        </p:txBody>
+      </p:sp>
+      <p:sp>
+        <p:nvSpPr>
+          <p:cNvPr id="34" name="Text 32"/>
+          <p:cNvSpPr/>
+          <p:nvPr/>
+        </p:nvSpPr>
+        <p:spPr>
+          <a:xfrm>
+            <a:off x="6882232" y="3730752"/>
+            <a:ext cx="4495648" cy="292608"/>
+          </a:xfrm>
+          <a:prstGeom prst="rect">
+            <a:avLst/>
+          </a:prstGeom>
+          <a:noFill/>
+          <a:ln/>
+        </p:spPr>
+        <p:txBody>
+          <a:bodyPr wrap="square" rtlCol="0" anchor="ctr"/>
+          <a:lstStyle/>
+          <a:p>
+            <a:pPr indent="0" marL="0">
+              <a:buNone/>
+            </a:pPr>
+            <a:r>
+              <a:rPr lang="en-US" sz="1250" b="1" dirty="0">
+                <a:solidFill>
+                  <a:srgbClr val="1E2235"/>
+                </a:solidFill>
+                <a:latin typeface="Microsoft JhengHei" pitchFamily="34" charset="0"/>
+                <a:ea typeface="Microsoft JhengHei" pitchFamily="34" charset="-122"/>
+                <a:cs typeface="Microsoft JhengHei" pitchFamily="34" charset="-120"/>
+              </a:rPr>
+              <a:t>行事曆留些空檔</a:t>
+            </a:r>
+            <a:endParaRPr lang="en-US" sz="1250" dirty="0"/>
+          </a:p>
+        </p:txBody>
+      </p:sp>
+      <p:sp>
+        <p:nvSpPr>
+          <p:cNvPr id="35" name="Text 33"/>
+          <p:cNvSpPr/>
+          <p:nvPr/>
+        </p:nvSpPr>
+        <p:spPr>
+          <a:xfrm>
+            <a:off x="6882232" y="4005072"/>
+            <a:ext cx="4495648" cy="411480"/>
+          </a:xfrm>
+          <a:prstGeom prst="rect">
+            <a:avLst/>
+          </a:prstGeom>
+          <a:noFill/>
+          <a:ln/>
+        </p:spPr>
+        <p:txBody>
+          <a:bodyPr wrap="square" rtlCol="0" anchor="ctr"/>
+          <a:lstStyle/>
+          <a:p>
+            <a:pPr indent="0" marL="0">
+              <a:lnSpc>
+                <a:spcPct val="112000"/>
+              </a:lnSpc>
+              <a:buNone/>
+            </a:pPr>
+            <a:r>
+              <a:rPr lang="en-US" sz="1050" dirty="0">
+                <a:solidFill>
+                  <a:srgbClr val="5B6079"/>
+                </a:solidFill>
+                <a:latin typeface="Microsoft JhengHei" pitchFamily="34" charset="0"/>
+                <a:ea typeface="Microsoft JhengHei" pitchFamily="34" charset="-122"/>
+                <a:cs typeface="Microsoft JhengHei" pitchFamily="34" charset="-120"/>
+              </a:rPr>
+              <a:t>AIR1 會排跨部門處理會議、AIR4 會排季度檢討會議，本週保留一些空檔即可。</a:t>
+            </a:r>
+            <a:endParaRPr lang="en-US" sz="1050" dirty="0"/>
+          </a:p>
+        </p:txBody>
+      </p:sp>
+      <p:sp>
+        <p:nvSpPr>
+          <p:cNvPr id="36" name="Shape 34"/>
+          <p:cNvSpPr/>
+          <p:nvPr/>
+        </p:nvSpPr>
+        <p:spPr>
+          <a:xfrm>
+            <a:off x="640080" y="4590288"/>
+            <a:ext cx="5272888" cy="777240"/>
+          </a:xfrm>
+          <a:prstGeom prst="rect">
+            <a:avLst/>
+          </a:prstGeom>
+          <a:solidFill>
+            <a:srgbClr val="FFFFFF"/>
+          </a:solidFill>
+          <a:ln w="12700">
+            <a:solidFill>
+              <a:srgbClr val="E4E7F2"/>
+            </a:solidFill>
+            <a:prstDash val="solid"/>
+          </a:ln>
+        </p:spPr>
+      </p:sp>
+      <p:sp>
+        <p:nvSpPr>
+          <p:cNvPr id="37" name="Shape 35"/>
+          <p:cNvSpPr/>
+          <p:nvPr/>
+        </p:nvSpPr>
+        <p:spPr>
+          <a:xfrm>
+            <a:off x="640080" y="4590288"/>
+            <a:ext cx="68580" cy="777240"/>
+          </a:xfrm>
+          <a:prstGeom prst="rect">
+            <a:avLst/>
+          </a:prstGeom>
+          <a:solidFill>
+            <a:srgbClr val="6366F1"/>
+          </a:solidFill>
+          <a:ln/>
+        </p:spPr>
+      </p:sp>
+      <p:sp>
+        <p:nvSpPr>
+          <p:cNvPr id="38" name="Text 36"/>
+          <p:cNvSpPr/>
+          <p:nvPr/>
+        </p:nvSpPr>
+        <p:spPr>
+          <a:xfrm>
+            <a:off x="804672" y="4645152"/>
+            <a:ext cx="411480" cy="329184"/>
+          </a:xfrm>
+          <a:prstGeom prst="rect">
+            <a:avLst/>
+          </a:prstGeom>
+          <a:noFill/>
+          <a:ln/>
+        </p:spPr>
+        <p:txBody>
+          <a:bodyPr wrap="square" rtlCol="0" anchor="ctr"/>
+          <a:lstStyle/>
+          <a:p>
+            <a:pPr algn="ctr" indent="0" marL="0">
+              <a:buNone/>
+            </a:pPr>
+            <a:r>
+              <a:rPr lang="en-US" sz="1500" dirty="0">
+                <a:solidFill>
+                  <a:srgbClr val="000000"/>
+                </a:solidFill>
+                <a:latin typeface="Microsoft JhengHei" pitchFamily="34" charset="0"/>
+                <a:ea typeface="Microsoft JhengHei" pitchFamily="34" charset="-122"/>
+                <a:cs typeface="Microsoft JhengHei" pitchFamily="34" charset="-120"/>
+              </a:rPr>
+              <a:t>🧩</a:t>
+            </a:r>
+            <a:endParaRPr lang="en-US" sz="1500" dirty="0"/>
+          </a:p>
+        </p:txBody>
+      </p:sp>
+      <p:sp>
+        <p:nvSpPr>
+          <p:cNvPr id="39" name="Text 37"/>
+          <p:cNvSpPr/>
+          <p:nvPr/>
+        </p:nvSpPr>
+        <p:spPr>
+          <a:xfrm>
+            <a:off x="1243584" y="4636008"/>
+            <a:ext cx="4495648" cy="292608"/>
+          </a:xfrm>
+          <a:prstGeom prst="rect">
+            <a:avLst/>
+          </a:prstGeom>
+          <a:noFill/>
+          <a:ln/>
+        </p:spPr>
+        <p:txBody>
+          <a:bodyPr wrap="square" rtlCol="0" anchor="ctr"/>
+          <a:lstStyle/>
+          <a:p>
+            <a:pPr indent="0" marL="0">
+              <a:buNone/>
+            </a:pPr>
+            <a:r>
+              <a:rPr lang="en-US" sz="1250" b="1" dirty="0">
+                <a:solidFill>
+                  <a:srgbClr val="1E2235"/>
+                </a:solidFill>
+                <a:latin typeface="Microsoft JhengHei" pitchFamily="34" charset="0"/>
+                <a:ea typeface="Microsoft JhengHei" pitchFamily="34" charset="-122"/>
+                <a:cs typeface="Microsoft JhengHei" pitchFamily="34" charset="-120"/>
+              </a:rPr>
+              <a:t>技能資料夾先保持乾淨</a:t>
+            </a:r>
+            <a:endParaRPr lang="en-US" sz="1250" dirty="0"/>
+          </a:p>
+        </p:txBody>
+      </p:sp>
+      <p:sp>
+        <p:nvSpPr>
+          <p:cNvPr id="40" name="Text 38"/>
+          <p:cNvSpPr/>
+          <p:nvPr/>
+        </p:nvSpPr>
+        <p:spPr>
+          <a:xfrm>
+            <a:off x="1243584" y="4910328"/>
+            <a:ext cx="4495648" cy="411480"/>
+          </a:xfrm>
+          <a:prstGeom prst="rect">
+            <a:avLst/>
+          </a:prstGeom>
+          <a:noFill/>
+          <a:ln/>
+        </p:spPr>
+        <p:txBody>
+          <a:bodyPr wrap="square" rtlCol="0" anchor="ctr"/>
+          <a:lstStyle/>
+          <a:p>
+            <a:pPr indent="0" marL="0">
+              <a:lnSpc>
+                <a:spcPct val="112000"/>
+              </a:lnSpc>
+              <a:buNone/>
+            </a:pPr>
+            <a:r>
+              <a:rPr lang="en-US" sz="1050" dirty="0">
+                <a:solidFill>
+                  <a:srgbClr val="5B6079"/>
+                </a:solidFill>
+                <a:latin typeface="Microsoft JhengHei" pitchFamily="34" charset="0"/>
+                <a:ea typeface="Microsoft JhengHei" pitchFamily="34" charset="-122"/>
+                <a:cs typeface="Microsoft JhengHei" pitchFamily="34" charset="-120"/>
+              </a:rPr>
+              <a:t>AIR5 是現場建立技能的示範，所以不要先把 AIR5_SKILL.md 放進 文件/Cowork/skills…</a:t>
+            </a:r>
+            <a:endParaRPr lang="en-US" sz="1050" dirty="0"/>
+          </a:p>
+        </p:txBody>
+      </p:sp>
+      <p:sp>
+        <p:nvSpPr>
+          <p:cNvPr id="41" name="Shape 39"/>
+          <p:cNvSpPr/>
+          <p:nvPr/>
+        </p:nvSpPr>
+        <p:spPr>
+          <a:xfrm>
+            <a:off x="6278728" y="4590288"/>
+            <a:ext cx="5272888" cy="777240"/>
+          </a:xfrm>
+          <a:prstGeom prst="rect">
+            <a:avLst/>
+          </a:prstGeom>
+          <a:solidFill>
+            <a:srgbClr val="FFFFFF"/>
+          </a:solidFill>
+          <a:ln w="12700">
+            <a:solidFill>
+              <a:srgbClr val="E4E7F2"/>
+            </a:solidFill>
+            <a:prstDash val="solid"/>
+          </a:ln>
+        </p:spPr>
+      </p:sp>
+      <p:sp>
+        <p:nvSpPr>
+          <p:cNvPr id="42" name="Shape 40"/>
+          <p:cNvSpPr/>
+          <p:nvPr/>
+        </p:nvSpPr>
+        <p:spPr>
+          <a:xfrm>
+            <a:off x="6278728" y="4590288"/>
+            <a:ext cx="68580" cy="777240"/>
+          </a:xfrm>
+          <a:prstGeom prst="rect">
+            <a:avLst/>
+          </a:prstGeom>
+          <a:solidFill>
+            <a:srgbClr val="6366F1"/>
+          </a:solidFill>
+          <a:ln/>
+        </p:spPr>
+      </p:sp>
+      <p:sp>
+        <p:nvSpPr>
+          <p:cNvPr id="43" name="Text 41"/>
+          <p:cNvSpPr/>
+          <p:nvPr/>
+        </p:nvSpPr>
+        <p:spPr>
+          <a:xfrm>
+            <a:off x="6443320" y="4645152"/>
+            <a:ext cx="411480" cy="329184"/>
+          </a:xfrm>
+          <a:prstGeom prst="rect">
+            <a:avLst/>
+          </a:prstGeom>
+          <a:noFill/>
+          <a:ln/>
+        </p:spPr>
+        <p:txBody>
+          <a:bodyPr wrap="square" rtlCol="0" anchor="ctr"/>
+          <a:lstStyle/>
+          <a:p>
+            <a:pPr algn="ctr" indent="0" marL="0">
+              <a:buNone/>
+            </a:pPr>
+            <a:r>
+              <a:rPr lang="en-US" sz="1500" dirty="0">
+                <a:solidFill>
+                  <a:srgbClr val="000000"/>
+                </a:solidFill>
+                <a:latin typeface="Microsoft JhengHei" pitchFamily="34" charset="0"/>
+                <a:ea typeface="Microsoft JhengHei" pitchFamily="34" charset="-122"/>
+                <a:cs typeface="Microsoft JhengHei" pitchFamily="34" charset="-120"/>
+              </a:rPr>
+              <a:t>⏰</a:t>
+            </a:r>
+            <a:endParaRPr lang="en-US" sz="1500" dirty="0"/>
+          </a:p>
+        </p:txBody>
+      </p:sp>
+      <p:sp>
+        <p:nvSpPr>
+          <p:cNvPr id="44" name="Text 42"/>
+          <p:cNvSpPr/>
+          <p:nvPr/>
+        </p:nvSpPr>
+        <p:spPr>
+          <a:xfrm>
+            <a:off x="6882232" y="4636008"/>
+            <a:ext cx="4495648" cy="292608"/>
+          </a:xfrm>
+          <a:prstGeom prst="rect">
+            <a:avLst/>
+          </a:prstGeom>
+          <a:noFill/>
+          <a:ln/>
+        </p:spPr>
+        <p:txBody>
+          <a:bodyPr wrap="square" rtlCol="0" anchor="ctr"/>
+          <a:lstStyle/>
+          <a:p>
+            <a:pPr indent="0" marL="0">
+              <a:buNone/>
+            </a:pPr>
+            <a:r>
+              <a:rPr lang="en-US" sz="1250" b="1" dirty="0">
+                <a:solidFill>
+                  <a:srgbClr val="1E2235"/>
+                </a:solidFill>
+                <a:latin typeface="Microsoft JhengHei" pitchFamily="34" charset="0"/>
+                <a:ea typeface="Microsoft JhengHei" pitchFamily="34" charset="-122"/>
+                <a:cs typeface="Microsoft JhengHei" pitchFamily="34" charset="-120"/>
+              </a:rPr>
+              <a:t>自動化頁面先清乾淨，示範完也要收</a:t>
+            </a:r>
+            <a:endParaRPr lang="en-US" sz="1250" dirty="0"/>
+          </a:p>
+        </p:txBody>
+      </p:sp>
+      <p:sp>
+        <p:nvSpPr>
+          <p:cNvPr id="45" name="Text 43"/>
+          <p:cNvSpPr/>
+          <p:nvPr/>
+        </p:nvSpPr>
+        <p:spPr>
+          <a:xfrm>
+            <a:off x="6882232" y="4910328"/>
+            <a:ext cx="4495648" cy="411480"/>
+          </a:xfrm>
+          <a:prstGeom prst="rect">
+            <a:avLst/>
+          </a:prstGeom>
+          <a:noFill/>
+          <a:ln/>
+        </p:spPr>
+        <p:txBody>
+          <a:bodyPr wrap="square" rtlCol="0" anchor="ctr"/>
+          <a:lstStyle/>
+          <a:p>
+            <a:pPr indent="0" marL="0">
+              <a:lnSpc>
+                <a:spcPct val="112000"/>
+              </a:lnSpc>
+              <a:buNone/>
+            </a:pPr>
+            <a:r>
+              <a:rPr lang="en-US" sz="1050" dirty="0">
+                <a:solidFill>
+                  <a:srgbClr val="5B6079"/>
+                </a:solidFill>
+                <a:latin typeface="Microsoft JhengHei" pitchFamily="34" charset="0"/>
+                <a:ea typeface="Microsoft JhengHei" pitchFamily="34" charset="-122"/>
+                <a:cs typeface="Microsoft JhengHei" pitchFamily="34" charset="-120"/>
+              </a:rPr>
+              <a:t>AIR3 會建立事件觸發任務，開始前請先確認自動化頁面沒有殘留的舊任務，避免互相干擾。</a:t>
+            </a:r>
+            <a:endParaRPr lang="en-US" sz="1050" dirty="0"/>
+          </a:p>
+        </p:txBody>
+      </p:sp>
+      <p:sp>
+        <p:nvSpPr>
+          <p:cNvPr id="46" name="Shape 44"/>
+          <p:cNvSpPr/>
+          <p:nvPr/>
+        </p:nvSpPr>
+        <p:spPr>
+          <a:xfrm>
+            <a:off x="640080" y="5532120"/>
+            <a:ext cx="10911535" cy="749808"/>
+          </a:xfrm>
+          <a:prstGeom prst="rect">
+            <a:avLst/>
+          </a:prstGeom>
+          <a:solidFill>
+            <a:srgbClr val="FFFFFF"/>
+          </a:solidFill>
+          <a:ln w="12700">
+            <a:solidFill>
+              <a:srgbClr val="E4E7F2"/>
+            </a:solidFill>
+            <a:prstDash val="solid"/>
+          </a:ln>
+        </p:spPr>
+      </p:sp>
+      <p:sp>
+        <p:nvSpPr>
+          <p:cNvPr id="47" name="Shape 45"/>
+          <p:cNvSpPr/>
+          <p:nvPr/>
+        </p:nvSpPr>
+        <p:spPr>
+          <a:xfrm>
+            <a:off x="640080" y="5532120"/>
+            <a:ext cx="91440" cy="749808"/>
+          </a:xfrm>
+          <a:prstGeom prst="rect">
+            <a:avLst/>
+          </a:prstGeom>
+          <a:solidFill>
+            <a:srgbClr val="6366F1"/>
+          </a:solidFill>
+          <a:ln/>
+        </p:spPr>
+      </p:sp>
+      <p:sp>
+        <p:nvSpPr>
+          <p:cNvPr id="48" name="Text 46"/>
+          <p:cNvSpPr/>
+          <p:nvPr/>
+        </p:nvSpPr>
+        <p:spPr>
+          <a:xfrm>
+            <a:off x="914400" y="5614416"/>
+            <a:ext cx="1828800" cy="274320"/>
+          </a:xfrm>
+          <a:prstGeom prst="rect">
+            <a:avLst/>
+          </a:prstGeom>
+          <a:noFill/>
+          <a:ln/>
+        </p:spPr>
+        <p:txBody>
+          <a:bodyPr wrap="square" rtlCol="0" anchor="ctr"/>
+          <a:lstStyle/>
+          <a:p>
+            <a:pPr indent="0" marL="0">
+              <a:buNone/>
+            </a:pPr>
+            <a:r>
+              <a:rPr lang="en-US" sz="1200" b="1" dirty="0">
+                <a:solidFill>
+                  <a:srgbClr val="1E2235"/>
+                </a:solidFill>
+                <a:latin typeface="Microsoft JhengHei" pitchFamily="34" charset="0"/>
+                <a:ea typeface="Microsoft JhengHei" pitchFamily="34" charset="-122"/>
+                <a:cs typeface="Microsoft JhengHei" pitchFamily="34" charset="-120"/>
+              </a:rPr>
+              <a:t>開課前最後檢查</a:t>
+            </a:r>
+            <a:endParaRPr lang="en-US" sz="1200" dirty="0"/>
+          </a:p>
+        </p:txBody>
+      </p:sp>
+      <p:pic>
+        <p:nvPicPr>
+          <p:cNvPr id="49" name="Image 0" descr="preencoded.png">    </p:cNvPr>
+          <p:cNvPicPr>
+            <a:picLocks noChangeAspect="1"/>
+          </p:cNvPicPr>
+          <p:nvPr/>
+        </p:nvPicPr>
+        <p:blipFill>
+          <a:blip r:embed="rId1"/>
+          <a:stretch>
+            <a:fillRect/>
+          </a:stretch>
+        </p:blipFill>
+        <p:spPr>
+          <a:xfrm>
+            <a:off x="2743200" y="5641848"/>
+            <a:ext cx="155448" cy="155448"/>
+          </a:xfrm>
+          <a:prstGeom prst="rect">
+            <a:avLst/>
+          </a:prstGeom>
+        </p:spPr>
+      </p:pic>
+      <p:sp>
+        <p:nvSpPr>
+          <p:cNvPr id="50" name="Text 47"/>
+          <p:cNvSpPr/>
+          <p:nvPr/>
+        </p:nvSpPr>
+        <p:spPr>
+          <a:xfrm>
+            <a:off x="2999232" y="5586984"/>
+            <a:ext cx="8259775" cy="237744"/>
+          </a:xfrm>
+          <a:prstGeom prst="rect">
+            <a:avLst/>
+          </a:prstGeom>
+          <a:noFill/>
+          <a:ln/>
+        </p:spPr>
+        <p:txBody>
+          <a:bodyPr wrap="square" rtlCol="0" anchor="ctr"/>
+          <a:lstStyle/>
+          <a:p>
+            <a:pPr indent="0" marL="0">
+              <a:buNone/>
+            </a:pPr>
+            <a:r>
+              <a:rPr lang="en-US" sz="1050" dirty="0">
+                <a:solidFill>
+                  <a:srgbClr val="1E2235"/>
+                </a:solidFill>
+                <a:latin typeface="Microsoft JhengHei" pitchFamily="34" charset="0"/>
+                <a:ea typeface="Microsoft JhengHei" pitchFamily="34" charset="-122"/>
+                <a:cs typeface="Microsoft JhengHei" pitchFamily="34" charset="-120"/>
+              </a:rPr>
+              <a:t>OneDrive 的「航空業」底下四個子資料夾都看得到，檔案打得開</a:t>
+            </a:r>
+            <a:endParaRPr lang="en-US" sz="1050" dirty="0"/>
+          </a:p>
+        </p:txBody>
+      </p:sp>
+      <p:pic>
+        <p:nvPicPr>
+          <p:cNvPr id="51" name="Image 1" descr="preencoded.png">    </p:cNvPr>
+          <p:cNvPicPr>
+            <a:picLocks noChangeAspect="1"/>
+          </p:cNvPicPr>
+          <p:nvPr/>
+        </p:nvPicPr>
+        <p:blipFill>
+          <a:blip r:embed="rId2"/>
+          <a:stretch>
+            <a:fillRect/>
+          </a:stretch>
+        </p:blipFill>
+        <p:spPr>
+          <a:xfrm>
+            <a:off x="2743200" y="5852160"/>
+            <a:ext cx="155448" cy="155448"/>
+          </a:xfrm>
+          <a:prstGeom prst="rect">
+            <a:avLst/>
+          </a:prstGeom>
+        </p:spPr>
+      </p:pic>
+      <p:sp>
+        <p:nvSpPr>
+          <p:cNvPr id="52" name="Text 48"/>
+          <p:cNvSpPr/>
+          <p:nvPr/>
+        </p:nvSpPr>
+        <p:spPr>
+          <a:xfrm>
+            <a:off x="2999232" y="5797296"/>
+            <a:ext cx="8259775" cy="237744"/>
+          </a:xfrm>
+          <a:prstGeom prst="rect">
+            <a:avLst/>
+          </a:prstGeom>
+          <a:noFill/>
+          <a:ln/>
+        </p:spPr>
+        <p:txBody>
+          <a:bodyPr wrap="square" rtlCol="0" anchor="ctr"/>
+          <a:lstStyle/>
+          <a:p>
+            <a:pPr indent="0" marL="0">
+              <a:buNone/>
+            </a:pPr>
+            <a:r>
+              <a:rPr lang="en-US" sz="1050" dirty="0">
+                <a:solidFill>
+                  <a:srgbClr val="1E2235"/>
+                </a:solidFill>
+                <a:latin typeface="Microsoft JhengHei" pitchFamily="34" charset="0"/>
+                <a:ea typeface="Microsoft JhengHei" pitchFamily="34" charset="-122"/>
+                <a:cs typeface="Microsoft JhengHei" pitchFamily="34" charset="-120"/>
+              </a:rPr>
+              <a:t>聯絡窗口清單.md 在「航空業」母層，不是在子資料夾裡</a:t>
+            </a:r>
+            <a:endParaRPr lang="en-US" sz="1050" dirty="0"/>
+          </a:p>
+        </p:txBody>
+      </p:sp>
+      <p:pic>
+        <p:nvPicPr>
+          <p:cNvPr id="53" name="Image 2" descr="preencoded.png">    </p:cNvPr>
+          <p:cNvPicPr>
+            <a:picLocks noChangeAspect="1"/>
+          </p:cNvPicPr>
+          <p:nvPr/>
+        </p:nvPicPr>
+        <p:blipFill>
+          <a:blip r:embed="rId3"/>
+          <a:stretch>
+            <a:fillRect/>
+          </a:stretch>
+        </p:blipFill>
+        <p:spPr>
+          <a:xfrm>
+            <a:off x="2743200" y="6062472"/>
+            <a:ext cx="155448" cy="155448"/>
+          </a:xfrm>
+          <a:prstGeom prst="rect">
+            <a:avLst/>
+          </a:prstGeom>
+        </p:spPr>
+      </p:pic>
+      <p:sp>
+        <p:nvSpPr>
+          <p:cNvPr id="54" name="Text 49"/>
+          <p:cNvSpPr/>
+          <p:nvPr/>
+        </p:nvSpPr>
+        <p:spPr>
+          <a:xfrm>
+            <a:off x="2999232" y="6007608"/>
+            <a:ext cx="8259775" cy="237744"/>
+          </a:xfrm>
+          <a:prstGeom prst="rect">
+            <a:avLst/>
+          </a:prstGeom>
+          <a:noFill/>
+          <a:ln/>
+        </p:spPr>
+        <p:txBody>
+          <a:bodyPr wrap="square" rtlCol="0" anchor="ctr"/>
+          <a:lstStyle/>
+          <a:p>
+            <a:pPr indent="0" marL="0">
+              <a:buNone/>
+            </a:pPr>
+            <a:r>
+              <a:rPr lang="en-US" sz="1050" dirty="0">
+                <a:solidFill>
+                  <a:srgbClr val="1E2235"/>
+                </a:solidFill>
+                <a:latin typeface="Microsoft JhengHei" pitchFamily="34" charset="0"/>
+                <a:ea typeface="Microsoft JhengHei" pitchFamily="34" charset="-122"/>
+                <a:cs typeface="Microsoft JhengHei" pitchFamily="34" charset="-120"/>
+              </a:rPr>
+              <a:t>華翔航空_簡報範本.potx 在 OneDrive 根目錄，不是在子資料夾裡</a:t>
+            </a:r>
+            <a:endParaRPr lang="en-US" sz="1050" dirty="0"/>
+          </a:p>
+        </p:txBody>
+      </p:sp>
+      <p:sp>
+        <p:nvSpPr>
+          <p:cNvPr id="55" name="Text 50"/>
+          <p:cNvSpPr/>
+          <p:nvPr/>
+        </p:nvSpPr>
+        <p:spPr>
+          <a:xfrm>
+            <a:off x="640080" y="6473952"/>
+            <a:ext cx="5486400" cy="274320"/>
+          </a:xfrm>
+          <a:prstGeom prst="rect">
+            <a:avLst/>
+          </a:prstGeom>
+          <a:noFill/>
+          <a:ln/>
+        </p:spPr>
+        <p:txBody>
+          <a:bodyPr wrap="square" rtlCol="0" anchor="ctr"/>
+          <a:lstStyle/>
+          <a:p>
+            <a:pPr algn="l" indent="0" marL="0">
+              <a:buNone/>
+            </a:pPr>
+            <a:r>
+              <a:rPr lang="en-US" sz="900" dirty="0">
+                <a:solidFill>
+                  <a:srgbClr val="5B6079"/>
+                </a:solidFill>
+                <a:latin typeface="Microsoft JhengHei" pitchFamily="34" charset="0"/>
+                <a:ea typeface="Microsoft JhengHei" pitchFamily="34" charset="-122"/>
+                <a:cs typeface="Microsoft JhengHei" pitchFamily="34" charset="-120"/>
+              </a:rPr>
+              <a:t>Microsoft 365 Copilot Cowork</a:t>
+            </a:r>
+            <a:endParaRPr lang="en-US" sz="900" dirty="0"/>
+          </a:p>
+        </p:txBody>
+      </p:sp>
+      <p:sp>
+        <p:nvSpPr>
+          <p:cNvPr id="56" name="Text 51"/>
+          <p:cNvSpPr/>
+          <p:nvPr/>
+        </p:nvSpPr>
+        <p:spPr>
+          <a:xfrm>
+            <a:off x="11002975" y="6473952"/>
+            <a:ext cx="548640" cy="274320"/>
+          </a:xfrm>
+          <a:prstGeom prst="rect">
+            <a:avLst/>
+          </a:prstGeom>
+          <a:noFill/>
+          <a:ln/>
+        </p:spPr>
+        <p:txBody>
+          <a:bodyPr wrap="square" rtlCol="0" anchor="ctr"/>
+          <a:lstStyle/>
+          <a:p>
+            <a:pPr algn="r" indent="0" marL="0">
+              <a:buNone/>
+            </a:pPr>
+            <a:r>
+              <a:rPr lang="en-US" sz="900" dirty="0">
+                <a:solidFill>
+                  <a:srgbClr val="5B6079"/>
+                </a:solidFill>
+                <a:latin typeface="Microsoft JhengHei" pitchFamily="34" charset="0"/>
+                <a:ea typeface="Microsoft JhengHei" pitchFamily="34" charset="-122"/>
+                <a:cs typeface="Microsoft JhengHei" pitchFamily="34" charset="-120"/>
+              </a:rPr>
+              <a:t>6</a:t>
+            </a:r>
+            <a:endParaRPr lang="en-US" sz="900" dirty="0"/>
+          </a:p>
+        </p:txBody>
+      </p:sp>
+    </p:spTree>
+  </p:cSld>
+  <p:clrMapOvr>
+    <a:masterClrMapping/>
+  </p:clrMapOvr>
+</p:sld>
+</file>
+
+<file path=ppt/slides/slide8.xml><?xml version="1.0" encoding="utf-8"?>
+<p:sld xmlns:a="http://schemas.openxmlformats.org/drawingml/2006/main" xmlns:r="http://schemas.openxmlformats.org/officeDocument/2006/relationships" xmlns:p="http://schemas.openxmlformats.org/presentationml/2006/main">
+  <p:cSld name="Slide 8">
+    <p:bg>
+      <p:bgPr>
+        <a:solidFill>
+          <a:srgbClr val="F7F8FC"/>
+        </a:solidFill>
+      </p:bgPr>
+    </p:bg>
+    <p:spTree>
+      <p:nvGrpSpPr>
+        <p:cNvPr id="1" name=""/>
+        <p:cNvGrpSpPr/>
+        <p:nvPr/>
+      </p:nvGrpSpPr>
+      <p:grpSpPr>
+        <a:xfrm>
+          <a:off x="0" y="0"/>
+          <a:ext cx="0" cy="0"/>
+          <a:chOff x="0" y="0"/>
+          <a:chExt cx="0" cy="0"/>
+        </a:xfrm>
+      </p:grpSpPr>
+      <p:sp>
+        <p:nvSpPr>
+          <p:cNvPr id="2" name="Shape 0"/>
+          <p:cNvSpPr/>
+          <p:nvPr/>
+        </p:nvSpPr>
+        <p:spPr>
+          <a:xfrm>
+            <a:off x="640080" y="566928"/>
+            <a:ext cx="384048" cy="128016"/>
+          </a:xfrm>
+          <a:prstGeom prst="rect">
+            <a:avLst/>
+          </a:prstGeom>
+          <a:solidFill>
+            <a:srgbClr val="6366F1"/>
+          </a:solidFill>
+          <a:ln/>
+        </p:spPr>
+      </p:sp>
+      <p:sp>
+        <p:nvSpPr>
+          <p:cNvPr id="3" name="Text 1"/>
+          <p:cNvSpPr/>
+          <p:nvPr/>
+        </p:nvSpPr>
+        <p:spPr>
+          <a:xfrm>
+            <a:off x="1143000" y="457200"/>
+            <a:ext cx="8229600" cy="310896"/>
+          </a:xfrm>
+          <a:prstGeom prst="rect">
+            <a:avLst/>
+          </a:prstGeom>
+          <a:noFill/>
+          <a:ln/>
+        </p:spPr>
+        <p:txBody>
+          <a:bodyPr wrap="square" rtlCol="0" anchor="ctr"/>
+          <a:lstStyle/>
+          <a:p>
+            <a:pPr indent="0" marL="0">
+              <a:buNone/>
+            </a:pPr>
+            <a:r>
+              <a:rPr lang="en-US" sz="1200" b="1" spc="200" kern="0" dirty="0">
+                <a:solidFill>
+                  <a:srgbClr val="6366F1"/>
+                </a:solidFill>
+                <a:latin typeface="Microsoft JhengHei" pitchFamily="34" charset="0"/>
+                <a:ea typeface="Microsoft JhengHei" pitchFamily="34" charset="-122"/>
+                <a:cs typeface="Microsoft JhengHei" pitchFamily="34" charset="-120"/>
+              </a:rPr>
               <a:t>5 SCENARIOS</a:t>
             </a:r>
             <a:endParaRPr lang="en-US" sz="1200" dirty="0"/>
@@ -19438,7 +22155,7 @@
                 <a:ea typeface="Microsoft JhengHei" pitchFamily="34" charset="-122"/>
                 <a:cs typeface="Microsoft JhengHei" pitchFamily="34" charset="-120"/>
               </a:rPr>
-              <a:t>6</a:t>
+              <a:t>7</a:t>
             </a:r>
             <a:endParaRPr lang="en-US" sz="900" dirty="0"/>
           </a:p>
@@ -19452,9 +22169,9 @@
 </p:sld>
 </file>
 
-<file path=ppt/slides/slide8.xml><?xml version="1.0" encoding="utf-8"?>
+<file path=ppt/slides/slide9.xml><?xml version="1.0" encoding="utf-8"?>
 <p:sld xmlns:a="http://schemas.openxmlformats.org/drawingml/2006/main" xmlns:r="http://schemas.openxmlformats.org/officeDocument/2006/relationships" xmlns:p="http://schemas.openxmlformats.org/presentationml/2006/main">
-  <p:cSld name="Slide 8">
+  <p:cSld name="Slide 9">
     <p:bg>
       <p:bgPr>
         <a:solidFill>
@@ -19935,7 +22652,7 @@
                 <a:ea typeface="Microsoft JhengHei" pitchFamily="34" charset="-122"/>
                 <a:cs typeface="Microsoft JhengHei" pitchFamily="34" charset="-120"/>
               </a:rPr>
-              <a:t>班機取消，八位旅客要安置。這不是「該不該處理」的排除題，而是**「先處理誰」的排序題**。而排序最容易錯的地方，是把會員等級當成第一判準 —— 鑽石卡但沒有後續行程的旅客，時間壓力其實最低；經濟艙的單獨旅行孩童，照護責任卻最高。這個情境測的就是：它會不會被「VIP」兩個字帶著走。</a:t>
+              <a:t>班機取消，八位旅客要安置。這不是「該不該處理」的排除題，而是「先處理誰」的排序題。而排序最容易錯的地方，是把會員等級當成第一判準 —— 鑽石卡但沒有後續行程的旅客，時間壓力其實最低；經濟艙的單獨旅行孩童，照護責任卻最高。這個情境測的就是：它會不會被「VIP」兩個字帶著走。</a:t>
             </a:r>
             <a:endParaRPr lang="en-US" sz="1600" dirty="0"/>
           </a:p>
@@ -20121,7 +22838,7 @@
                 <a:ea typeface="Microsoft JhengHei" pitchFamily="34" charset="-122"/>
                 <a:cs typeface="Microsoft JhengHei" pitchFamily="34" charset="-120"/>
               </a:rPr>
-              <a:t>提示詞刻意要求「逐位旅客判定安置分級**並寫出所依據的條件**」。</a:t>
+              <a:t>這個情境不要上傳任何檔案。</a:t>
             </a:r>
             <a:endParaRPr lang="en-US" sz="1300" dirty="0"/>
           </a:p>
@@ -20268,7 +22985,7 @@
                 <a:ea typeface="Microsoft JhengHei" pitchFamily="34" charset="-122"/>
                 <a:cs typeface="Microsoft JhengHei" pitchFamily="34" charset="-120"/>
               </a:rPr>
-              <a:t>八位分級都會判對，其中四位是刻意設計的陷阱。</a:t>
+              <a:t>等它跑完分級，把八位旅客的判定結果逐位對照下面的說明。</a:t>
             </a:r>
             <a:endParaRPr lang="en-US" sz="1300" dirty="0"/>
           </a:p>
@@ -20415,7 +23132,7 @@
                 <a:ea typeface="Microsoft JhengHei" pitchFamily="34" charset="-122"/>
                 <a:cs typeface="Microsoft JhengHei" pitchFamily="34" charset="-120"/>
               </a:rPr>
-              <a:t>八封通知都存成草稿，內容依旅客需求各自不同：單獨旅行孩童那封依原則寫成「致監護人」…</a:t>
+              <a:t>展開右側工作區，看它讀了哪些檔案，再到 Outlook 草稿匣打開那八封通知。</a:t>
             </a:r>
             <a:endParaRPr lang="en-US" sz="1300" dirty="0"/>
           </a:p>
@@ -20562,7 +23279,7 @@
                 <a:ea typeface="Microsoft JhengHei" pitchFamily="34" charset="-122"/>
                 <a:cs typeface="Microsoft JhengHei" pitchFamily="34" charset="-120"/>
               </a:rPr>
-              <a:t>核准前建議依分級順序檢查，而不是照草稿匣的排列順序 —— Tier 1 那三封最需要仔細看，因為對象是孩童…</a:t>
+              <a:t>逐封檢查草稿後按下核准，讓它把八封通知送出。</a:t>
             </a:r>
             <a:endParaRPr lang="en-US" sz="1300" dirty="0"/>
           </a:p>
@@ -20709,7 +23426,7 @@
                 <a:ea typeface="Microsoft JhengHei" pitchFamily="34" charset="-122"/>
                 <a:cs typeface="Microsoft JhengHei" pitchFamily="34" charset="-120"/>
               </a:rPr>
-              <a:t>最後一定要到**寄件備份**打開幾封來看，不要只信對話裡的摘要。</a:t>
+              <a:t>到 Outlook 的寄件備份，實際打開幾封已經寄出的信。</a:t>
             </a:r>
             <a:endParaRPr lang="en-US" sz="1300" dirty="0"/>
           </a:p>
@@ -20782,677 +23499,6 @@
               <a:rPr lang="en-US" sz="900" dirty="0">
                 <a:solidFill>
                   <a:srgbClr val="8A8FB5"/>
-                </a:solidFill>
-                <a:latin typeface="Microsoft JhengHei" pitchFamily="34" charset="0"/>
-                <a:ea typeface="Microsoft JhengHei" pitchFamily="34" charset="-122"/>
-                <a:cs typeface="Microsoft JhengHei" pitchFamily="34" charset="-120"/>
-              </a:rPr>
-              <a:t>7</a:t>
-            </a:r>
-            <a:endParaRPr lang="en-US" sz="900" dirty="0"/>
-          </a:p>
-        </p:txBody>
-      </p:sp>
-    </p:spTree>
-  </p:cSld>
-  <p:clrMapOvr>
-    <a:masterClrMapping/>
-  </p:clrMapOvr>
-</p:sld>
-</file>
-
-<file path=ppt/slides/slide9.xml><?xml version="1.0" encoding="utf-8"?>
-<p:sld xmlns:a="http://schemas.openxmlformats.org/drawingml/2006/main" xmlns:r="http://schemas.openxmlformats.org/officeDocument/2006/relationships" xmlns:p="http://schemas.openxmlformats.org/presentationml/2006/main">
-  <p:cSld name="Slide 9">
-    <p:bg>
-      <p:bgPr>
-        <a:solidFill>
-          <a:srgbClr val="F7F8FC"/>
-        </a:solidFill>
-      </p:bgPr>
-    </p:bg>
-    <p:spTree>
-      <p:nvGrpSpPr>
-        <p:cNvPr id="1" name=""/>
-        <p:cNvGrpSpPr/>
-        <p:nvPr/>
-      </p:nvGrpSpPr>
-      <p:grpSpPr>
-        <a:xfrm>
-          <a:off x="0" y="0"/>
-          <a:ext cx="0" cy="0"/>
-          <a:chOff x="0" y="0"/>
-          <a:chExt cx="0" cy="0"/>
-        </a:xfrm>
-      </p:grpSpPr>
-      <p:sp>
-        <p:nvSpPr>
-          <p:cNvPr id="2" name="Shape 0"/>
-          <p:cNvSpPr/>
-          <p:nvPr/>
-        </p:nvSpPr>
-        <p:spPr>
-          <a:xfrm>
-            <a:off x="640080" y="566928"/>
-            <a:ext cx="384048" cy="128016"/>
-          </a:xfrm>
-          <a:prstGeom prst="rect">
-            <a:avLst/>
-          </a:prstGeom>
-          <a:solidFill>
-            <a:srgbClr val="0E2A47"/>
-          </a:solidFill>
-          <a:ln/>
-        </p:spPr>
-      </p:sp>
-      <p:sp>
-        <p:nvSpPr>
-          <p:cNvPr id="3" name="Text 1"/>
-          <p:cNvSpPr/>
-          <p:nvPr/>
-        </p:nvSpPr>
-        <p:spPr>
-          <a:xfrm>
-            <a:off x="1143000" y="457200"/>
-            <a:ext cx="8229600" cy="310896"/>
-          </a:xfrm>
-          <a:prstGeom prst="rect">
-            <a:avLst/>
-          </a:prstGeom>
-          <a:noFill/>
-          <a:ln/>
-        </p:spPr>
-        <p:txBody>
-          <a:bodyPr wrap="square" rtlCol="0" anchor="ctr"/>
-          <a:lstStyle/>
-          <a:p>
-            <a:pPr indent="0" marL="0">
-              <a:buNone/>
-            </a:pPr>
-            <a:r>
-              <a:rPr lang="en-US" sz="1200" b="1" spc="200" kern="0" dirty="0">
-                <a:solidFill>
-                  <a:srgbClr val="0E2A47"/>
-                </a:solidFill>
-                <a:latin typeface="Microsoft JhengHei" pitchFamily="34" charset="0"/>
-                <a:ea typeface="Microsoft JhengHei" pitchFamily="34" charset="-122"/>
-                <a:cs typeface="Microsoft JhengHei" pitchFamily="34" charset="-120"/>
-              </a:rPr>
-              <a:t>情境 01 · 實機示範</a:t>
-            </a:r>
-            <a:endParaRPr lang="en-US" sz="1200" dirty="0"/>
-          </a:p>
-        </p:txBody>
-      </p:sp>
-      <p:sp>
-        <p:nvSpPr>
-          <p:cNvPr id="4" name="Text 2"/>
-          <p:cNvSpPr/>
-          <p:nvPr/>
-        </p:nvSpPr>
-        <p:spPr>
-          <a:xfrm>
-            <a:off x="640080" y="786384"/>
-            <a:ext cx="10972800" cy="640080"/>
-          </a:xfrm>
-          <a:prstGeom prst="rect">
-            <a:avLst/>
-          </a:prstGeom>
-          <a:noFill/>
-          <a:ln/>
-        </p:spPr>
-        <p:txBody>
-          <a:bodyPr wrap="square" rtlCol="0" anchor="ctr"/>
-          <a:lstStyle/>
-          <a:p>
-            <a:pPr indent="0" marL="0">
-              <a:buNone/>
-            </a:pPr>
-            <a:r>
-              <a:rPr lang="en-US" sz="3000" b="1" dirty="0">
-                <a:solidFill>
-                  <a:srgbClr val="1E2235"/>
-                </a:solidFill>
-                <a:latin typeface="Microsoft JhengHei" pitchFamily="34" charset="0"/>
-                <a:ea typeface="Microsoft JhengHei" pitchFamily="34" charset="-122"/>
-                <a:cs typeface="Microsoft JhengHei" pitchFamily="34" charset="-120"/>
-              </a:rPr>
-              <a:t>看 Cowork 怎麼做、產出什麼</a:t>
-            </a:r>
-            <a:endParaRPr lang="en-US" sz="3000" dirty="0"/>
-          </a:p>
-        </p:txBody>
-      </p:sp>
-      <p:sp>
-        <p:nvSpPr>
-          <p:cNvPr id="5" name="Shape 3"/>
-          <p:cNvSpPr/>
-          <p:nvPr/>
-        </p:nvSpPr>
-        <p:spPr>
-          <a:xfrm>
-            <a:off x="585216" y="1773936"/>
-            <a:ext cx="5184648" cy="3433186"/>
-          </a:xfrm>
-          <a:prstGeom prst="rect">
-            <a:avLst/>
-          </a:prstGeom>
-          <a:solidFill>
-            <a:srgbClr val="FFFFFF"/>
-          </a:solidFill>
-          <a:ln w="12700">
-            <a:solidFill>
-              <a:srgbClr val="E4E7F2"/>
-            </a:solidFill>
-            <a:prstDash val="solid"/>
-          </a:ln>
-          <a:effectLst>
-            <a:outerShdw sx="100000" sy="100000" kx="0" ky="0" algn="bl" rotWithShape="0" blurRad="114300" dist="38100" dir="5400000">
-              <a:srgbClr val="8A90B5">
-                <a:alpha val="22000"/>
-              </a:srgbClr>
-            </a:outerShdw>
-          </a:effectLst>
-        </p:spPr>
-      </p:sp>
-      <p:pic>
-        <p:nvPicPr>
-          <p:cNvPr id="6" name="Image 0" descr="C:\temp\CoworkLab\v2\_working\screenshots\air1_01_tiers.png">    </p:cNvPr>
-          <p:cNvPicPr>
-            <a:picLocks noChangeAspect="1"/>
-          </p:cNvPicPr>
-          <p:nvPr/>
-        </p:nvPicPr>
-        <p:blipFill>
-          <a:blip r:embed="rId1"/>
-          <a:stretch>
-            <a:fillRect/>
-          </a:stretch>
-        </p:blipFill>
-        <p:spPr>
-          <a:xfrm>
-            <a:off x="640080" y="1828800"/>
-            <a:ext cx="5074920" cy="3323458"/>
-          </a:xfrm>
-          <a:prstGeom prst="rect">
-            <a:avLst/>
-          </a:prstGeom>
-        </p:spPr>
-      </p:pic>
-      <p:sp>
-        <p:nvSpPr>
-          <p:cNvPr id="7" name="Text 4"/>
-          <p:cNvSpPr/>
-          <p:nvPr/>
-        </p:nvSpPr>
-        <p:spPr>
-          <a:xfrm>
-            <a:off x="640080" y="5261986"/>
-            <a:ext cx="5074920" cy="320040"/>
-          </a:xfrm>
-          <a:prstGeom prst="rect">
-            <a:avLst/>
-          </a:prstGeom>
-          <a:noFill/>
-          <a:ln/>
-        </p:spPr>
-        <p:txBody>
-          <a:bodyPr wrap="square" rtlCol="0" anchor="ctr"/>
-          <a:lstStyle/>
-          <a:p>
-            <a:pPr algn="ctr" indent="0" marL="0">
-              <a:buNone/>
-            </a:pPr>
-            <a:r>
-              <a:rPr lang="en-US" sz="1350" b="1" dirty="0">
-                <a:solidFill>
-                  <a:srgbClr val="0E2A47"/>
-                </a:solidFill>
-                <a:latin typeface="Microsoft JhengHei" pitchFamily="34" charset="0"/>
-                <a:ea typeface="Microsoft JhengHei" pitchFamily="34" charset="-122"/>
-                <a:cs typeface="Microsoft JhengHei" pitchFamily="34" charset="-120"/>
-              </a:rPr>
-              <a:t>① 你的輸入與指令</a:t>
-            </a:r>
-            <a:endParaRPr lang="en-US" sz="1350" dirty="0"/>
-          </a:p>
-        </p:txBody>
-      </p:sp>
-      <p:sp>
-        <p:nvSpPr>
-          <p:cNvPr id="8" name="Shape 5"/>
-          <p:cNvSpPr/>
-          <p:nvPr/>
-        </p:nvSpPr>
-        <p:spPr>
-          <a:xfrm>
-            <a:off x="6163056" y="1773936"/>
-            <a:ext cx="5184648" cy="3433186"/>
-          </a:xfrm>
-          <a:prstGeom prst="rect">
-            <a:avLst/>
-          </a:prstGeom>
-          <a:solidFill>
-            <a:srgbClr val="FFFFFF"/>
-          </a:solidFill>
-          <a:ln w="12700">
-            <a:solidFill>
-              <a:srgbClr val="E4E7F2"/>
-            </a:solidFill>
-            <a:prstDash val="solid"/>
-          </a:ln>
-          <a:effectLst>
-            <a:outerShdw sx="100000" sy="100000" kx="0" ky="0" algn="bl" rotWithShape="0" blurRad="114300" dist="38100" dir="5400000">
-              <a:srgbClr val="8A90B5">
-                <a:alpha val="22000"/>
-              </a:srgbClr>
-            </a:outerShdw>
-          </a:effectLst>
-        </p:spPr>
-      </p:sp>
-      <p:pic>
-        <p:nvPicPr>
-          <p:cNvPr id="9" name="Image 1" descr="C:\temp\CoworkLab\v2\_working\screenshots\air1_04_sent_email_um.png">    </p:cNvPr>
-          <p:cNvPicPr>
-            <a:picLocks noChangeAspect="1"/>
-          </p:cNvPicPr>
-          <p:nvPr/>
-        </p:nvPicPr>
-        <p:blipFill>
-          <a:blip r:embed="rId2"/>
-          <a:stretch>
-            <a:fillRect/>
-          </a:stretch>
-        </p:blipFill>
-        <p:spPr>
-          <a:xfrm>
-            <a:off x="6217920" y="1828800"/>
-            <a:ext cx="5074920" cy="3323458"/>
-          </a:xfrm>
-          <a:prstGeom prst="rect">
-            <a:avLst/>
-          </a:prstGeom>
-        </p:spPr>
-      </p:pic>
-      <p:sp>
-        <p:nvSpPr>
-          <p:cNvPr id="10" name="Text 6"/>
-          <p:cNvSpPr/>
-          <p:nvPr/>
-        </p:nvSpPr>
-        <p:spPr>
-          <a:xfrm>
-            <a:off x="6217920" y="5261986"/>
-            <a:ext cx="5074920" cy="320040"/>
-          </a:xfrm>
-          <a:prstGeom prst="rect">
-            <a:avLst/>
-          </a:prstGeom>
-          <a:noFill/>
-          <a:ln/>
-        </p:spPr>
-        <p:txBody>
-          <a:bodyPr wrap="square" rtlCol="0" anchor="ctr"/>
-          <a:lstStyle/>
-          <a:p>
-            <a:pPr algn="ctr" indent="0" marL="0">
-              <a:buNone/>
-            </a:pPr>
-            <a:r>
-              <a:rPr lang="en-US" sz="1350" b="1" dirty="0">
-                <a:solidFill>
-                  <a:srgbClr val="0E2A47"/>
-                </a:solidFill>
-                <a:latin typeface="Microsoft JhengHei" pitchFamily="34" charset="0"/>
-                <a:ea typeface="Microsoft JhengHei" pitchFamily="34" charset="-122"/>
-                <a:cs typeface="Microsoft JhengHei" pitchFamily="34" charset="-120"/>
-              </a:rPr>
-              <a:t>② 產出成果</a:t>
-            </a:r>
-            <a:endParaRPr lang="en-US" sz="1350" dirty="0"/>
-          </a:p>
-        </p:txBody>
-      </p:sp>
-      <p:sp>
-        <p:nvSpPr>
-          <p:cNvPr id="11" name="Shape 7"/>
-          <p:cNvSpPr/>
-          <p:nvPr/>
-        </p:nvSpPr>
-        <p:spPr>
-          <a:xfrm>
-            <a:off x="640080" y="5074920"/>
-            <a:ext cx="10911535" cy="1143000"/>
-          </a:xfrm>
-          <a:prstGeom prst="rect">
-            <a:avLst/>
-          </a:prstGeom>
-          <a:solidFill>
-            <a:srgbClr val="FFFFFF"/>
-          </a:solidFill>
-          <a:ln w="12700">
-            <a:solidFill>
-              <a:srgbClr val="E4E7F2"/>
-            </a:solidFill>
-            <a:prstDash val="solid"/>
-          </a:ln>
-        </p:spPr>
-      </p:sp>
-      <p:sp>
-        <p:nvSpPr>
-          <p:cNvPr id="12" name="Shape 8"/>
-          <p:cNvSpPr/>
-          <p:nvPr/>
-        </p:nvSpPr>
-        <p:spPr>
-          <a:xfrm>
-            <a:off x="640080" y="5074920"/>
-            <a:ext cx="91440" cy="1143000"/>
-          </a:xfrm>
-          <a:prstGeom prst="rect">
-            <a:avLst/>
-          </a:prstGeom>
-          <a:solidFill>
-            <a:srgbClr val="0E2A47"/>
-          </a:solidFill>
-          <a:ln/>
-        </p:spPr>
-      </p:sp>
-      <p:sp>
-        <p:nvSpPr>
-          <p:cNvPr id="13" name="Text 9"/>
-          <p:cNvSpPr/>
-          <p:nvPr/>
-        </p:nvSpPr>
-        <p:spPr>
-          <a:xfrm>
-            <a:off x="914400" y="5184648"/>
-            <a:ext cx="1828800" cy="320040"/>
-          </a:xfrm>
-          <a:prstGeom prst="rect">
-            <a:avLst/>
-          </a:prstGeom>
-          <a:noFill/>
-          <a:ln/>
-        </p:spPr>
-        <p:txBody>
-          <a:bodyPr wrap="square" rtlCol="0" anchor="ctr"/>
-          <a:lstStyle/>
-          <a:p>
-            <a:pPr indent="0" marL="0">
-              <a:buNone/>
-            </a:pPr>
-            <a:r>
-              <a:rPr lang="en-US" sz="1400" b="1" dirty="0">
-                <a:solidFill>
-                  <a:srgbClr val="1E2235"/>
-                </a:solidFill>
-                <a:latin typeface="Microsoft JhengHei" pitchFamily="34" charset="0"/>
-                <a:ea typeface="Microsoft JhengHei" pitchFamily="34" charset="-122"/>
-                <a:cs typeface="Microsoft JhengHei" pitchFamily="34" charset="-120"/>
-              </a:rPr>
-              <a:t>產出驗收</a:t>
-            </a:r>
-            <a:endParaRPr lang="en-US" sz="1400" dirty="0"/>
-          </a:p>
-        </p:txBody>
-      </p:sp>
-      <p:pic>
-        <p:nvPicPr>
-          <p:cNvPr id="14" name="Image 2" descr="preencoded.png">    </p:cNvPr>
-          <p:cNvPicPr>
-            <a:picLocks noChangeAspect="1"/>
-          </p:cNvPicPr>
-          <p:nvPr/>
-        </p:nvPicPr>
-        <p:blipFill>
-          <a:blip r:embed="rId3"/>
-          <a:stretch>
-            <a:fillRect/>
-          </a:stretch>
-        </p:blipFill>
-        <p:spPr>
-          <a:xfrm>
-            <a:off x="2834640" y="5221224"/>
-            <a:ext cx="182880" cy="182880"/>
-          </a:xfrm>
-          <a:prstGeom prst="rect">
-            <a:avLst/>
-          </a:prstGeom>
-        </p:spPr>
-      </p:pic>
-      <p:sp>
-        <p:nvSpPr>
-          <p:cNvPr id="15" name="Text 10"/>
-          <p:cNvSpPr/>
-          <p:nvPr/>
-        </p:nvSpPr>
-        <p:spPr>
-          <a:xfrm>
-            <a:off x="3108960" y="5166360"/>
-            <a:ext cx="8168335" cy="310896"/>
-          </a:xfrm>
-          <a:prstGeom prst="rect">
-            <a:avLst/>
-          </a:prstGeom>
-          <a:noFill/>
-          <a:ln/>
-        </p:spPr>
-        <p:txBody>
-          <a:bodyPr wrap="square" rtlCol="0" anchor="ctr"/>
-          <a:lstStyle/>
-          <a:p>
-            <a:pPr indent="0" marL="0">
-              <a:buNone/>
-            </a:pPr>
-            <a:r>
-              <a:rPr lang="en-US" sz="1300" dirty="0">
-                <a:solidFill>
-                  <a:srgbClr val="1E2235"/>
-                </a:solidFill>
-                <a:latin typeface="Microsoft JhengHei" pitchFamily="34" charset="0"/>
-                <a:ea typeface="Microsoft JhengHei" pitchFamily="34" charset="-122"/>
-                <a:cs typeface="Microsoft JhengHei" pitchFamily="34" charset="-120"/>
-              </a:rPr>
-              <a:t>八位旅客都有分級，且每位都寫出所依據的條件</a:t>
-            </a:r>
-            <a:endParaRPr lang="en-US" sz="1300" dirty="0"/>
-          </a:p>
-        </p:txBody>
-      </p:sp>
-      <p:pic>
-        <p:nvPicPr>
-          <p:cNvPr id="16" name="Image 3" descr="preencoded.png">    </p:cNvPr>
-          <p:cNvPicPr>
-            <a:picLocks noChangeAspect="1"/>
-          </p:cNvPicPr>
-          <p:nvPr/>
-        </p:nvPicPr>
-        <p:blipFill>
-          <a:blip r:embed="rId4"/>
-          <a:stretch>
-            <a:fillRect/>
-          </a:stretch>
-        </p:blipFill>
-        <p:spPr>
-          <a:xfrm>
-            <a:off x="2834640" y="5559552"/>
-            <a:ext cx="182880" cy="182880"/>
-          </a:xfrm>
-          <a:prstGeom prst="rect">
-            <a:avLst/>
-          </a:prstGeom>
-        </p:spPr>
-      </p:pic>
-      <p:sp>
-        <p:nvSpPr>
-          <p:cNvPr id="17" name="Text 11"/>
-          <p:cNvSpPr/>
-          <p:nvPr/>
-        </p:nvSpPr>
-        <p:spPr>
-          <a:xfrm>
-            <a:off x="3108960" y="5504688"/>
-            <a:ext cx="8168335" cy="310896"/>
-          </a:xfrm>
-          <a:prstGeom prst="rect">
-            <a:avLst/>
-          </a:prstGeom>
-          <a:noFill/>
-          <a:ln/>
-        </p:spPr>
-        <p:txBody>
-          <a:bodyPr wrap="square" rtlCol="0" anchor="ctr"/>
-          <a:lstStyle/>
-          <a:p>
-            <a:pPr indent="0" marL="0">
-              <a:buNone/>
-            </a:pPr>
-            <a:r>
-              <a:rPr lang="en-US" sz="1300" dirty="0">
-                <a:solidFill>
-                  <a:srgbClr val="1E2235"/>
-                </a:solidFill>
-                <a:latin typeface="Microsoft JhengHei" pitchFamily="34" charset="0"/>
-                <a:ea typeface="Microsoft JhengHei" pitchFamily="34" charset="-122"/>
-                <a:cs typeface="Microsoft JhengHei" pitchFamily="34" charset="-120"/>
-              </a:rPr>
-              <a:t>鑽石卡但終點站抵達者被判為 Tier 4，未因會員等級提前</a:t>
-            </a:r>
-            <a:endParaRPr lang="en-US" sz="1300" dirty="0"/>
-          </a:p>
-        </p:txBody>
-      </p:sp>
-      <p:pic>
-        <p:nvPicPr>
-          <p:cNvPr id="18" name="Image 4" descr="preencoded.png">    </p:cNvPr>
-          <p:cNvPicPr>
-            <a:picLocks noChangeAspect="1"/>
-          </p:cNvPicPr>
-          <p:nvPr/>
-        </p:nvPicPr>
-        <p:blipFill>
-          <a:blip r:embed="rId5"/>
-          <a:stretch>
-            <a:fillRect/>
-          </a:stretch>
-        </p:blipFill>
-        <p:spPr>
-          <a:xfrm>
-            <a:off x="2834640" y="5897880"/>
-            <a:ext cx="182880" cy="182880"/>
-          </a:xfrm>
-          <a:prstGeom prst="rect">
-            <a:avLst/>
-          </a:prstGeom>
-        </p:spPr>
-      </p:pic>
-      <p:sp>
-        <p:nvSpPr>
-          <p:cNvPr id="19" name="Text 12"/>
-          <p:cNvSpPr/>
-          <p:nvPr/>
-        </p:nvSpPr>
-        <p:spPr>
-          <a:xfrm>
-            <a:off x="3108960" y="5843016"/>
-            <a:ext cx="8168335" cy="310896"/>
-          </a:xfrm>
-          <a:prstGeom prst="rect">
-            <a:avLst/>
-          </a:prstGeom>
-          <a:noFill/>
-          <a:ln/>
-        </p:spPr>
-        <p:txBody>
-          <a:bodyPr wrap="square" rtlCol="0" anchor="ctr"/>
-          <a:lstStyle/>
-          <a:p>
-            <a:pPr indent="0" marL="0">
-              <a:buNone/>
-            </a:pPr>
-            <a:r>
-              <a:rPr lang="en-US" sz="1300" dirty="0">
-                <a:solidFill>
-                  <a:srgbClr val="1E2235"/>
-                </a:solidFill>
-                <a:latin typeface="Microsoft JhengHei" pitchFamily="34" charset="0"/>
-                <a:ea typeface="Microsoft JhengHei" pitchFamily="34" charset="-122"/>
-                <a:cs typeface="Microsoft JhengHei" pitchFamily="34" charset="-120"/>
-              </a:rPr>
-              <a:t>經濟艙的單獨旅行孩童被判為 Tier 1，未因艙等降級</a:t>
-            </a:r>
-            <a:endParaRPr lang="en-US" sz="1300" dirty="0"/>
-          </a:p>
-        </p:txBody>
-      </p:sp>
-      <p:sp>
-        <p:nvSpPr>
-          <p:cNvPr id="20" name="Text 13"/>
-          <p:cNvSpPr/>
-          <p:nvPr/>
-        </p:nvSpPr>
-        <p:spPr>
-          <a:xfrm>
-            <a:off x="640080" y="6473952"/>
-            <a:ext cx="5486400" cy="274320"/>
-          </a:xfrm>
-          <a:prstGeom prst="rect">
-            <a:avLst/>
-          </a:prstGeom>
-          <a:noFill/>
-          <a:ln/>
-        </p:spPr>
-        <p:txBody>
-          <a:bodyPr wrap="square" rtlCol="0" anchor="ctr"/>
-          <a:lstStyle/>
-          <a:p>
-            <a:pPr algn="l" indent="0" marL="0">
-              <a:buNone/>
-            </a:pPr>
-            <a:r>
-              <a:rPr lang="en-US" sz="900" dirty="0">
-                <a:solidFill>
-                  <a:srgbClr val="5B6079"/>
-                </a:solidFill>
-                <a:latin typeface="Microsoft JhengHei" pitchFamily="34" charset="0"/>
-                <a:ea typeface="Microsoft JhengHei" pitchFamily="34" charset="-122"/>
-                <a:cs typeface="Microsoft JhengHei" pitchFamily="34" charset="-120"/>
-              </a:rPr>
-              <a:t>Microsoft 365 Copilot Cowork</a:t>
-            </a:r>
-            <a:endParaRPr lang="en-US" sz="900" dirty="0"/>
-          </a:p>
-        </p:txBody>
-      </p:sp>
-      <p:sp>
-        <p:nvSpPr>
-          <p:cNvPr id="21" name="Text 14"/>
-          <p:cNvSpPr/>
-          <p:nvPr/>
-        </p:nvSpPr>
-        <p:spPr>
-          <a:xfrm>
-            <a:off x="11002975" y="6473952"/>
-            <a:ext cx="548640" cy="274320"/>
-          </a:xfrm>
-          <a:prstGeom prst="rect">
-            <a:avLst/>
-          </a:prstGeom>
-          <a:noFill/>
-          <a:ln/>
-        </p:spPr>
-        <p:txBody>
-          <a:bodyPr wrap="square" rtlCol="0" anchor="ctr"/>
-          <a:lstStyle/>
-          <a:p>
-            <a:pPr algn="r" indent="0" marL="0">
-              <a:buNone/>
-            </a:pPr>
-            <a:r>
-              <a:rPr lang="en-US" sz="900" dirty="0">
-                <a:solidFill>
-                  <a:srgbClr val="5B6079"/>
                 </a:solidFill>
                 <a:latin typeface="Microsoft JhengHei" pitchFamily="34" charset="0"/>
                 <a:ea typeface="Microsoft JhengHei" pitchFamily="34" charset="-122"/>
